--- a/NidhiAI_Final_Submission.pptx
+++ b/NidhiAI_Final_Submission.pptx
@@ -6897,7 +6897,7 @@
               <a:buNone/>
             </a:pPr>
             <a:r>
-              <a:rPr lang="en-GB" sz="1600">
+              <a:rPr lang="en-GB" sz="1200">
                 <a:solidFill>
                   <a:srgbClr val="202729"/>
                 </a:solidFill>
@@ -6932,7 +6932,7 @@
               <a:buNone/>
             </a:pPr>
             <a:r>
-              <a:rPr lang="en-GB" sz="1600">
+              <a:rPr lang="en-GB" sz="1200">
                 <a:solidFill>
                   <a:srgbClr val="202729"/>
                 </a:solidFill>
@@ -6967,7 +6967,7 @@
               <a:buNone/>
             </a:pPr>
             <a:r>
-              <a:rPr lang="en-GB" sz="1600">
+              <a:rPr lang="en-GB" sz="1200">
                 <a:solidFill>
                   <a:srgbClr val="202729"/>
                 </a:solidFill>
@@ -6976,7 +6976,7 @@
                 <a:cs typeface="Manrope SemiBold"/>
                 <a:sym typeface="Manrope SemiBold"/>
               </a:rPr>
-              <a:t>India mandates ~Rs.38,000 Crores annually for CSR spending. Yet 90% of</a:t>
+              <a:t>India mandates Rs.38,000 Crores/year for Corporate Social Responsibility.</a:t>
             </a:r>
             <a:endParaRPr sz="1600">
               <a:solidFill>
@@ -7002,7 +7002,7 @@
               <a:buNone/>
             </a:pPr>
             <a:r>
-              <a:rPr lang="en-GB" sz="1600">
+              <a:rPr lang="en-GB" sz="1200">
                 <a:solidFill>
                   <a:srgbClr val="202729"/>
                 </a:solidFill>
@@ -7011,7 +7011,7 @@
                 <a:cs typeface="Manrope SemiBold"/>
                 <a:sym typeface="Manrope SemiBold"/>
               </a:rPr>
-              <a:t>these funds flow to the top 50 well-resourced NGOs. Small grassroots</a:t>
+              <a:t>But 90% of this capital is captured by the top 50 well-resourced NGOs.</a:t>
             </a:r>
             <a:endParaRPr sz="1600">
               <a:solidFill>
@@ -7037,7 +7037,7 @@
               <a:buNone/>
             </a:pPr>
             <a:r>
-              <a:rPr lang="en-GB" sz="1600">
+              <a:rPr lang="en-GB" sz="1200">
                 <a:solidFill>
                   <a:srgbClr val="202729"/>
                 </a:solidFill>
@@ -7046,7 +7046,7 @@
                 <a:cs typeface="Manrope SemiBold"/>
                 <a:sym typeface="Manrope SemiBold"/>
               </a:rPr>
-              <a:t>organizations — the ones actually serving rural India — are locked out</a:t>
+              <a:t>Grassroots organizations serving rural India are locked out because</a:t>
             </a:r>
             <a:endParaRPr sz="1600">
               <a:solidFill>
@@ -7072,7 +7072,7 @@
               <a:buNone/>
             </a:pPr>
             <a:r>
-              <a:rPr lang="en-GB" sz="1600">
+              <a:rPr lang="en-GB" sz="1200">
                 <a:solidFill>
                   <a:srgbClr val="202729"/>
                 </a:solidFill>
@@ -7081,7 +7081,7 @@
                 <a:cs typeface="Manrope SemiBold"/>
                 <a:sym typeface="Manrope SemiBold"/>
               </a:rPr>
-              <a:t>because they lack the bandwidth for legal compliance paperwork (12A, 80G,</a:t>
+              <a:t>they lack the legal teams and English fluency to navigate compliance</a:t>
             </a:r>
             <a:endParaRPr sz="1600">
               <a:solidFill>
@@ -7107,7 +7107,7 @@
               <a:buNone/>
             </a:pPr>
             <a:r>
-              <a:rPr lang="en-GB" sz="1600">
+              <a:rPr lang="en-GB" sz="1200">
                 <a:solidFill>
                   <a:srgbClr val="202729"/>
                 </a:solidFill>
@@ -7116,77 +7116,7 @@
                 <a:cs typeface="Manrope SemiBold"/>
                 <a:sym typeface="Manrope SemiBold"/>
               </a:rPr>
-              <a:t>FCRA) and cannot draft corporate-standard English proposals.</a:t>
-            </a:r>
-            <a:endParaRPr sz="1600">
-              <a:solidFill>
-                <a:srgbClr val="202729"/>
-              </a:solidFill>
-              <a:latin typeface="Manrope SemiBold"/>
-              <a:ea typeface="Manrope SemiBold"/>
-              <a:cs typeface="Manrope SemiBold"/>
-              <a:sym typeface="Manrope SemiBold"/>
-            </a:endParaRPr>
-          </a:p>
-          <a:p>
-            <a:pPr indent="0" lvl="0" marL="0" rtl="0" algn="l">
-              <a:lnSpc>
-                <a:spcPct val="70000"/>
-              </a:lnSpc>
-              <a:spcBef>
-                <a:spcPts val="0"/>
-              </a:spcBef>
-              <a:spcAft>
-                <a:spcPts val="0"/>
-              </a:spcAft>
-              <a:buNone/>
-            </a:pPr>
-            <a:r>
-              <a:rPr lang="en-GB" sz="1600">
-                <a:solidFill>
-                  <a:srgbClr val="202729"/>
-                </a:solidFill>
-                <a:latin typeface="Manrope SemiBold"/>
-                <a:ea typeface="Manrope SemiBold"/>
-                <a:cs typeface="Manrope SemiBold"/>
-                <a:sym typeface="Manrope SemiBold"/>
-              </a:rPr>
-              <a:t/>
-            </a:r>
-            <a:endParaRPr sz="1600">
-              <a:solidFill>
-                <a:srgbClr val="202729"/>
-              </a:solidFill>
-              <a:latin typeface="Manrope SemiBold"/>
-              <a:ea typeface="Manrope SemiBold"/>
-              <a:cs typeface="Manrope SemiBold"/>
-              <a:sym typeface="Manrope SemiBold"/>
-            </a:endParaRPr>
-          </a:p>
-          <a:p>
-            <a:pPr indent="0" lvl="0" marL="0" rtl="0" algn="l">
-              <a:lnSpc>
-                <a:spcPct val="70000"/>
-              </a:lnSpc>
-              <a:spcBef>
-                <a:spcPts val="0"/>
-              </a:spcBef>
-              <a:spcAft>
-                <a:spcPts val="0"/>
-              </a:spcAft>
-              <a:buNone/>
-            </a:pPr>
-            <a:r>
-              <a:rPr lang="en-GB" sz="1600">
-                <a:solidFill>
-                  <a:srgbClr val="202729"/>
-                </a:solidFill>
-                <a:latin typeface="Manrope SemiBold"/>
-                <a:ea typeface="Manrope SemiBold"/>
-                <a:cs typeface="Manrope SemiBold"/>
-                <a:sym typeface="Manrope SemiBold"/>
-              </a:rPr>
-              <a:t>The capital is there. The transmission layer is broken.</a:t>
+              <a:t>paperwork and write corporate-grade proposals.</a:t>
             </a:r>
             <a:endParaRPr sz="1600">
               <a:solidFill>
@@ -7356,16 +7286,16 @@
               <a:buNone/>
             </a:pPr>
             <a:r>
-              <a:rPr b="1" lang="en-GB" sz="1700">
-                <a:solidFill>
-                  <a:srgbClr val="202729"/>
-                </a:solidFill>
-                <a:latin typeface="Manrope"/>
-                <a:ea typeface="Manrope"/>
-                <a:cs typeface="Manrope"/>
-                <a:sym typeface="Manrope"/>
-              </a:rPr>
-              <a:t>Snapshots of the working prototype:</a:t>
+              <a:rPr b="1" lang="en-GB" sz="1400">
+                <a:solidFill>
+                  <a:srgbClr val="202729"/>
+                </a:solidFill>
+                <a:latin typeface="Manrope"/>
+                <a:ea typeface="Manrope"/>
+                <a:cs typeface="Manrope"/>
+                <a:sym typeface="Manrope"/>
+              </a:rPr>
+              <a:t>More prototype screenshots:</a:t>
             </a:r>
             <a:r>
               <a:rPr b="1" lang="en-GB" sz="1700">
@@ -7393,7 +7323,7 @@
       </p:sp>
       <p:pic>
         <p:nvPicPr>
-          <p:cNvPr id="112" name="Picture 111" descr="compliance_1772968882563.png"/>
+          <p:cNvPr id="112" name="Picture 111" descr="proposals_1772969030004.png"/>
           <p:cNvPicPr>
             <a:picLocks noChangeAspect="1"/>
           </p:cNvPicPr>
@@ -7407,8 +7337,8 @@
         </p:blipFill>
         <p:spPr>
           <a:xfrm>
-            <a:off x="182880" y="1188720"/>
-            <a:ext cx="2834640" cy="1828800"/>
+            <a:off x="365760" y="1371600"/>
+            <a:ext cx="3840480" cy="1828800"/>
           </a:xfrm>
           <a:prstGeom prst="rect">
             <a:avLst/>
@@ -7417,7 +7347,7 @@
       </p:pic>
       <p:pic>
         <p:nvPicPr>
-          <p:cNvPr id="113" name="Picture 112" descr="proposals_1772969030004.png"/>
+          <p:cNvPr id="113" name="Picture 112" descr="landing_page_1772968848332.png"/>
           <p:cNvPicPr>
             <a:picLocks noChangeAspect="1"/>
           </p:cNvPicPr>
@@ -7431,8 +7361,8 @@
         </p:blipFill>
         <p:spPr>
           <a:xfrm>
-            <a:off x="3108960" y="1188720"/>
-            <a:ext cx="2834640" cy="1828800"/>
+            <a:off x="4480560" y="1371600"/>
+            <a:ext cx="3840480" cy="1828800"/>
           </a:xfrm>
           <a:prstGeom prst="rect">
             <a:avLst/>
@@ -7441,7 +7371,7 @@
       </p:pic>
       <p:pic>
         <p:nvPicPr>
-          <p:cNvPr id="114" name="Picture 113" descr="chatbot_final_1772969216606.png"/>
+          <p:cNvPr id="114" name="Picture 113" descr="upload_page_fixed_1772819311612.png"/>
           <p:cNvPicPr>
             <a:picLocks noChangeAspect="1"/>
           </p:cNvPicPr>
@@ -7455,8 +7385,32 @@
         </p:blipFill>
         <p:spPr>
           <a:xfrm>
-            <a:off x="6035040" y="1188720"/>
-            <a:ext cx="2834640" cy="1828800"/>
+            <a:off x="365760" y="3383280"/>
+            <a:ext cx="3840480" cy="1371600"/>
+          </a:xfrm>
+          <a:prstGeom prst="rect">
+            <a:avLst/>
+          </a:prstGeom>
+        </p:spPr>
+      </p:pic>
+      <p:pic>
+        <p:nvPicPr>
+          <p:cNvPr id="115" name="Picture 114" descr="chatbot_no_trace_1772969087137.png"/>
+          <p:cNvPicPr>
+            <a:picLocks noChangeAspect="1"/>
+          </p:cNvPicPr>
+          <p:nvPr/>
+        </p:nvPicPr>
+        <p:blipFill>
+          <a:blip r:embed="rId7"/>
+          <a:stretch>
+            <a:fillRect/>
+          </a:stretch>
+        </p:blipFill>
+        <p:spPr>
+          <a:xfrm>
+            <a:off x="4480560" y="3383280"/>
+            <a:ext cx="3840480" cy="1371600"/>
           </a:xfrm>
           <a:prstGeom prst="rect">
             <a:avLst/>
@@ -7558,7 +7512,7 @@
               <a:buNone/>
             </a:pPr>
             <a:r>
-              <a:rPr b="1" lang="en-GB" sz="1700">
+              <a:rPr b="1" lang="en-GB" sz="1100">
                 <a:solidFill>
                   <a:srgbClr val="202729"/>
                 </a:solidFill>
@@ -7610,7 +7564,7 @@
               <a:buNone/>
             </a:pPr>
             <a:r>
-              <a:rPr b="1" lang="en-GB" sz="1700">
+              <a:rPr b="1" lang="en-GB" sz="1100">
                 <a:solidFill>
                   <a:srgbClr val="202729"/>
                 </a:solidFill>
@@ -7662,16 +7616,16 @@
               <a:buNone/>
             </a:pPr>
             <a:r>
-              <a:rPr b="1" lang="en-GB" sz="1700">
-                <a:solidFill>
-                  <a:srgbClr val="202729"/>
-                </a:solidFill>
-                <a:latin typeface="Manrope"/>
-                <a:ea typeface="Manrope"/>
-                <a:cs typeface="Manrope"/>
-                <a:sym typeface="Manrope"/>
-              </a:rPr>
-              <a:t>End-to-End Latency (measured on live AWS infra, ap-south-1):</a:t>
+              <a:rPr b="1" lang="en-GB" sz="1100">
+                <a:solidFill>
+                  <a:srgbClr val="202729"/>
+                </a:solidFill>
+                <a:latin typeface="Manrope"/>
+                <a:ea typeface="Manrope"/>
+                <a:cs typeface="Manrope"/>
+                <a:sym typeface="Manrope"/>
+              </a:rPr>
+              <a:t>Response Latency (measured on live AWS infrastructure, ap-south-1):</a:t>
             </a:r>
             <a:r>
               <a:rPr b="1" lang="en-GB" sz="1700">
@@ -7714,7 +7668,7 @@
               <a:buNone/>
             </a:pPr>
             <a:r>
-              <a:rPr b="1" lang="en-GB" sz="1700">
+              <a:rPr b="1" lang="en-GB" sz="1100">
                 <a:solidFill>
                   <a:srgbClr val="202729"/>
                 </a:solidFill>
@@ -7766,16 +7720,16 @@
               <a:buNone/>
             </a:pPr>
             <a:r>
-              <a:rPr b="1" lang="en-GB" sz="1700">
-                <a:solidFill>
-                  <a:srgbClr val="202729"/>
-                </a:solidFill>
-                <a:latin typeface="Manrope"/>
-                <a:ea typeface="Manrope"/>
-                <a:cs typeface="Manrope"/>
-                <a:sym typeface="Manrope"/>
-              </a:rPr>
-              <a:t>  Document Upload to S3:              ~1.2 seconds</a:t>
+              <a:rPr b="1" lang="en-GB" sz="1100">
+                <a:solidFill>
+                  <a:srgbClr val="202729"/>
+                </a:solidFill>
+                <a:latin typeface="Manrope"/>
+                <a:ea typeface="Manrope"/>
+                <a:cs typeface="Manrope"/>
+                <a:sym typeface="Manrope"/>
+              </a:rPr>
+              <a:t>• Document upload to S3: ~1.2 seconds</a:t>
             </a:r>
             <a:r>
               <a:rPr b="1" lang="en-GB" sz="1700">
@@ -7818,16 +7772,16 @@
               <a:buNone/>
             </a:pPr>
             <a:r>
-              <a:rPr b="1" lang="en-GB" sz="1700">
-                <a:solidFill>
-                  <a:srgbClr val="202729"/>
-                </a:solidFill>
-                <a:latin typeface="Manrope"/>
-                <a:ea typeface="Manrope"/>
-                <a:cs typeface="Manrope"/>
-                <a:sym typeface="Manrope"/>
-              </a:rPr>
-              <a:t>  Compliance Scan (Textract + Agent):  4-6 seconds per document</a:t>
+              <a:rPr b="1" lang="en-GB" sz="1100">
+                <a:solidFill>
+                  <a:srgbClr val="202729"/>
+                </a:solidFill>
+                <a:latin typeface="Manrope"/>
+                <a:ea typeface="Manrope"/>
+                <a:cs typeface="Manrope"/>
+                <a:sym typeface="Manrope"/>
+              </a:rPr>
+              <a:t>• Compliance scan (Textract + Bedrock Agent): 4-6 seconds per document</a:t>
             </a:r>
             <a:r>
               <a:rPr b="1" lang="en-GB" sz="1700">
@@ -7870,16 +7824,16 @@
               <a:buNone/>
             </a:pPr>
             <a:r>
-              <a:rPr b="1" lang="en-GB" sz="1700">
-                <a:solidFill>
-                  <a:srgbClr val="202729"/>
-                </a:solidFill>
-                <a:latin typeface="Manrope"/>
-                <a:ea typeface="Manrope"/>
-                <a:cs typeface="Manrope"/>
-                <a:sym typeface="Manrope"/>
-              </a:rPr>
-              <a:t>  Grant Matching (Titan V2 + AOSS):    1.8 seconds</a:t>
+              <a:rPr b="1" lang="en-GB" sz="1100">
+                <a:solidFill>
+                  <a:srgbClr val="202729"/>
+                </a:solidFill>
+                <a:latin typeface="Manrope"/>
+                <a:ea typeface="Manrope"/>
+                <a:cs typeface="Manrope"/>
+                <a:sym typeface="Manrope"/>
+              </a:rPr>
+              <a:t>• Grant matching (semantic search): 1.8 seconds</a:t>
             </a:r>
             <a:r>
               <a:rPr b="1" lang="en-GB" sz="1700">
@@ -7922,16 +7876,16 @@
               <a:buNone/>
             </a:pPr>
             <a:r>
-              <a:rPr b="1" lang="en-GB" sz="1700">
-                <a:solidFill>
-                  <a:srgbClr val="202729"/>
-                </a:solidFill>
-                <a:latin typeface="Manrope"/>
-                <a:ea typeface="Manrope"/>
-                <a:cs typeface="Manrope"/>
-                <a:sym typeface="Manrope"/>
-              </a:rPr>
-              <a:t>  Proposal Generation (RAG + Claude):  15-20 seconds (streamed)</a:t>
+              <a:rPr b="1" lang="en-GB" sz="1100">
+                <a:solidFill>
+                  <a:srgbClr val="202729"/>
+                </a:solidFill>
+                <a:latin typeface="Manrope"/>
+                <a:ea typeface="Manrope"/>
+                <a:cs typeface="Manrope"/>
+                <a:sym typeface="Manrope"/>
+              </a:rPr>
+              <a:t>• Proposal generation (RAG + streaming): 15-20 seconds</a:t>
             </a:r>
             <a:r>
               <a:rPr b="1" lang="en-GB" sz="1700">
@@ -7974,16 +7928,16 @@
               <a:buNone/>
             </a:pPr>
             <a:r>
-              <a:rPr b="1" lang="en-GB" sz="1700">
-                <a:solidFill>
-                  <a:srgbClr val="202729"/>
-                </a:solidFill>
-                <a:latin typeface="Manrope"/>
-                <a:ea typeface="Manrope"/>
-                <a:cs typeface="Manrope"/>
-                <a:sym typeface="Manrope"/>
-              </a:rPr>
-              <a:t>  KB Chatbot Response:                 2-4 seconds</a:t>
+              <a:rPr b="1" lang="en-GB" sz="1100">
+                <a:solidFill>
+                  <a:srgbClr val="202729"/>
+                </a:solidFill>
+                <a:latin typeface="Manrope"/>
+                <a:ea typeface="Manrope"/>
+                <a:cs typeface="Manrope"/>
+                <a:sym typeface="Manrope"/>
+              </a:rPr>
+              <a:t>  — output is livestreamed to the user as the model writes,</a:t>
             </a:r>
             <a:r>
               <a:rPr b="1" lang="en-GB" sz="1700">
@@ -8026,16 +7980,16 @@
               <a:buNone/>
             </a:pPr>
             <a:r>
-              <a:rPr b="1" lang="en-GB" sz="1700">
-                <a:solidFill>
-                  <a:srgbClr val="202729"/>
-                </a:solidFill>
-                <a:latin typeface="Manrope"/>
-                <a:ea typeface="Manrope"/>
-                <a:cs typeface="Manrope"/>
-                <a:sym typeface="Manrope"/>
-              </a:rPr>
-              <a:t/>
+              <a:rPr b="1" lang="en-GB" sz="1100">
+                <a:solidFill>
+                  <a:srgbClr val="202729"/>
+                </a:solidFill>
+                <a:latin typeface="Manrope"/>
+                <a:ea typeface="Manrope"/>
+                <a:cs typeface="Manrope"/>
+                <a:sym typeface="Manrope"/>
+              </a:rPr>
+              <a:t>  so perceived wait time is much shorter</a:t>
             </a:r>
             <a:r>
               <a:rPr b="1" lang="en-GB" sz="1700">
@@ -8078,16 +8032,16 @@
               <a:buNone/>
             </a:pPr>
             <a:r>
-              <a:rPr b="1" lang="en-GB" sz="1700">
-                <a:solidFill>
-                  <a:srgbClr val="202729"/>
-                </a:solidFill>
-                <a:latin typeface="Manrope"/>
-                <a:ea typeface="Manrope"/>
-                <a:cs typeface="Manrope"/>
-                <a:sym typeface="Manrope"/>
-              </a:rPr>
-              <a:t>Infrastructure:</a:t>
+              <a:rPr b="1" lang="en-GB" sz="1100">
+                <a:solidFill>
+                  <a:srgbClr val="202729"/>
+                </a:solidFill>
+                <a:latin typeface="Manrope"/>
+                <a:ea typeface="Manrope"/>
+                <a:cs typeface="Manrope"/>
+                <a:sym typeface="Manrope"/>
+              </a:rPr>
+              <a:t>• CSR chatbot response: 2-4 seconds</a:t>
             </a:r>
             <a:r>
               <a:rPr b="1" lang="en-GB" sz="1700">
@@ -8130,16 +8084,16 @@
               <a:buNone/>
             </a:pPr>
             <a:r>
-              <a:rPr b="1" lang="en-GB" sz="1700">
-                <a:solidFill>
-                  <a:srgbClr val="202729"/>
-                </a:solidFill>
-                <a:latin typeface="Manrope"/>
-                <a:ea typeface="Manrope"/>
-                <a:cs typeface="Manrope"/>
-                <a:sym typeface="Manrope"/>
-              </a:rPr>
-              <a:t>  System availability:  100% (fully managed AWS services)</a:t>
+              <a:rPr b="1" lang="en-GB" sz="1100">
+                <a:solidFill>
+                  <a:srgbClr val="202729"/>
+                </a:solidFill>
+                <a:latin typeface="Manrope"/>
+                <a:ea typeface="Manrope"/>
+                <a:cs typeface="Manrope"/>
+                <a:sym typeface="Manrope"/>
+              </a:rPr>
+              <a:t/>
             </a:r>
             <a:r>
               <a:rPr b="1" lang="en-GB" sz="1700">
@@ -8182,16 +8136,16 @@
               <a:buNone/>
             </a:pPr>
             <a:r>
-              <a:rPr b="1" lang="en-GB" sz="1700">
-                <a:solidFill>
-                  <a:srgbClr val="202729"/>
-                </a:solidFill>
-                <a:latin typeface="Manrope"/>
-                <a:ea typeface="Manrope"/>
-                <a:cs typeface="Manrope"/>
-                <a:sym typeface="Manrope"/>
-              </a:rPr>
-              <a:t>  Cold start penalty:   &lt; 800ms (Lambda Python 3.12, 256MB)</a:t>
+              <a:rPr b="1" lang="en-GB" sz="1100">
+                <a:solidFill>
+                  <a:srgbClr val="202729"/>
+                </a:solidFill>
+                <a:latin typeface="Manrope"/>
+                <a:ea typeface="Manrope"/>
+                <a:cs typeface="Manrope"/>
+                <a:sym typeface="Manrope"/>
+              </a:rPr>
+              <a:t>Scalability:</a:t>
             </a:r>
             <a:r>
               <a:rPr b="1" lang="en-GB" sz="1700">
@@ -8234,16 +8188,16 @@
               <a:buNone/>
             </a:pPr>
             <a:r>
-              <a:rPr b="1" lang="en-GB" sz="1700">
-                <a:solidFill>
-                  <a:srgbClr val="202729"/>
-                </a:solidFill>
-                <a:latin typeface="Manrope"/>
-                <a:ea typeface="Manrope"/>
-                <a:cs typeface="Manrope"/>
-                <a:sym typeface="Manrope"/>
-              </a:rPr>
-              <a:t>  Concurrent capacity:  Auto-scales with Lambda provisioning</a:t>
+              <a:rPr b="1" lang="en-GB" sz="1100">
+                <a:solidFill>
+                  <a:srgbClr val="202729"/>
+                </a:solidFill>
+                <a:latin typeface="Manrope"/>
+                <a:ea typeface="Manrope"/>
+                <a:cs typeface="Manrope"/>
+                <a:sym typeface="Manrope"/>
+              </a:rPr>
+              <a:t>• 100% serverless — automatically scales with demand</a:t>
             </a:r>
             <a:r>
               <a:rPr b="1" lang="en-GB" sz="1700">
@@ -8286,16 +8240,16 @@
               <a:buNone/>
             </a:pPr>
             <a:r>
-              <a:rPr b="1" lang="en-GB" sz="1700">
-                <a:solidFill>
-                  <a:srgbClr val="202729"/>
-                </a:solidFill>
-                <a:latin typeface="Manrope"/>
-                <a:ea typeface="Manrope"/>
-                <a:cs typeface="Manrope"/>
-                <a:sym typeface="Manrope"/>
-              </a:rPr>
-              <a:t/>
+              <a:rPr b="1" lang="en-GB" sz="1100">
+                <a:solidFill>
+                  <a:srgbClr val="202729"/>
+                </a:solidFill>
+                <a:latin typeface="Manrope"/>
+                <a:ea typeface="Manrope"/>
+                <a:cs typeface="Manrope"/>
+                <a:sym typeface="Manrope"/>
+              </a:rPr>
+              <a:t>• No always-on servers, no capacity planning needed</a:t>
             </a:r>
             <a:r>
               <a:rPr b="1" lang="en-GB" sz="1700">
@@ -8338,16 +8292,16 @@
               <a:buNone/>
             </a:pPr>
             <a:r>
-              <a:rPr b="1" lang="en-GB" sz="1700">
-                <a:solidFill>
-                  <a:srgbClr val="202729"/>
-                </a:solidFill>
-                <a:latin typeface="Manrope"/>
-                <a:ea typeface="Manrope"/>
-                <a:cs typeface="Manrope"/>
-                <a:sym typeface="Manrope"/>
-              </a:rPr>
-              <a:t>Agent Orchestration:</a:t>
+              <a:rPr b="1" lang="en-GB" sz="1100">
+                <a:solidFill>
+                  <a:srgbClr val="202729"/>
+                </a:solidFill>
+                <a:latin typeface="Manrope"/>
+                <a:ea typeface="Manrope"/>
+                <a:cs typeface="Manrope"/>
+                <a:sym typeface="Manrope"/>
+              </a:rPr>
+              <a:t>• All AI models are managed by AWS (no self-hosted infra)</a:t>
             </a:r>
             <a:r>
               <a:rPr b="1" lang="en-GB" sz="1700">
@@ -8390,16 +8344,16 @@
               <a:buNone/>
             </a:pPr>
             <a:r>
-              <a:rPr b="1" lang="en-GB" sz="1700">
-                <a:solidFill>
-                  <a:srgbClr val="202729"/>
-                </a:solidFill>
-                <a:latin typeface="Manrope"/>
-                <a:ea typeface="Manrope"/>
-                <a:cs typeface="Manrope"/>
-                <a:sym typeface="Manrope"/>
-              </a:rPr>
-              <a:t>  All 5 Bedrock Agents status: PREPARED</a:t>
+              <a:rPr b="1" lang="en-GB" sz="1100">
+                <a:solidFill>
+                  <a:srgbClr val="202729"/>
+                </a:solidFill>
+                <a:latin typeface="Manrope"/>
+                <a:ea typeface="Manrope"/>
+                <a:cs typeface="Manrope"/>
+                <a:sym typeface="Manrope"/>
+              </a:rPr>
+              <a:t/>
             </a:r>
             <a:r>
               <a:rPr b="1" lang="en-GB" sz="1700">
@@ -8442,16 +8396,16 @@
               <a:buNone/>
             </a:pPr>
             <a:r>
-              <a:rPr b="1" lang="en-GB" sz="1700">
-                <a:solidFill>
-                  <a:srgbClr val="202729"/>
-                </a:solidFill>
-                <a:latin typeface="Manrope"/>
-                <a:ea typeface="Manrope"/>
-                <a:cs typeface="Manrope"/>
-                <a:sym typeface="Manrope"/>
-              </a:rPr>
-              <a:t>  All 3 Knowledge Bases status: ACTIVE</a:t>
+              <a:rPr b="1" lang="en-GB" sz="1100">
+                <a:solidFill>
+                  <a:srgbClr val="202729"/>
+                </a:solidFill>
+                <a:latin typeface="Manrope"/>
+                <a:ea typeface="Manrope"/>
+                <a:cs typeface="Manrope"/>
+                <a:sym typeface="Manrope"/>
+              </a:rPr>
+              <a:t>Reliability:</a:t>
             </a:r>
             <a:r>
               <a:rPr b="1" lang="en-GB" sz="1700">
@@ -8494,6 +8448,18 @@
               <a:buNone/>
             </a:pPr>
             <a:r>
+              <a:rPr b="1" lang="en-GB" sz="1100">
+                <a:solidFill>
+                  <a:srgbClr val="202729"/>
+                </a:solidFill>
+                <a:latin typeface="Manrope"/>
+                <a:ea typeface="Manrope"/>
+                <a:cs typeface="Manrope"/>
+                <a:sym typeface="Manrope"/>
+              </a:rPr>
+              <a:t>• Built entirely on AWS managed services</a:t>
+            </a:r>
+            <a:r>
               <a:rPr b="1" lang="en-GB" sz="1700">
                 <a:solidFill>
                   <a:srgbClr val="202729"/>
@@ -8503,7 +8469,99 @@
                 <a:cs typeface="Manrope"/>
                 <a:sym typeface="Manrope"/>
               </a:rPr>
-              <a:t>  KB sync: 18 documents indexed with 0 failures</a:t>
+              <a:t/>
+            </a:r>
+            <a:endParaRPr>
+              <a:solidFill>
+                <a:srgbClr val="434343"/>
+              </a:solidFill>
+              <a:latin typeface="Manrope"/>
+              <a:ea typeface="Manrope"/>
+              <a:cs typeface="Manrope"/>
+              <a:sym typeface="Manrope"/>
+            </a:endParaRPr>
+          </a:p>
+          <a:p>
+            <a:pPr indent="0" lvl="0" marL="0" rtl="0" algn="l">
+              <a:lnSpc>
+                <a:spcPct val="115000"/>
+              </a:lnSpc>
+              <a:spcBef>
+                <a:spcPts val="0"/>
+              </a:spcBef>
+              <a:spcAft>
+                <a:spcPts val="1200"/>
+              </a:spcAft>
+              <a:buClr>
+                <a:srgbClr val="000000"/>
+              </a:buClr>
+              <a:buSzPts val="935"/>
+              <a:buFont typeface="Arial"/>
+              <a:buNone/>
+            </a:pPr>
+            <a:r>
+              <a:rPr b="1" lang="en-GB" sz="1100">
+                <a:solidFill>
+                  <a:srgbClr val="202729"/>
+                </a:solidFill>
+                <a:latin typeface="Manrope"/>
+                <a:ea typeface="Manrope"/>
+                <a:cs typeface="Manrope"/>
+                <a:sym typeface="Manrope"/>
+              </a:rPr>
+              <a:t>• Knowledge Bases synced with 18 documents, 0 ingestion failures</a:t>
+            </a:r>
+            <a:r>
+              <a:rPr b="1" lang="en-GB" sz="1700">
+                <a:solidFill>
+                  <a:srgbClr val="202729"/>
+                </a:solidFill>
+                <a:latin typeface="Manrope"/>
+                <a:ea typeface="Manrope"/>
+                <a:cs typeface="Manrope"/>
+                <a:sym typeface="Manrope"/>
+              </a:rPr>
+              <a:t/>
+            </a:r>
+            <a:endParaRPr>
+              <a:solidFill>
+                <a:srgbClr val="434343"/>
+              </a:solidFill>
+              <a:latin typeface="Manrope"/>
+              <a:ea typeface="Manrope"/>
+              <a:cs typeface="Manrope"/>
+              <a:sym typeface="Manrope"/>
+            </a:endParaRPr>
+          </a:p>
+          <a:p>
+            <a:pPr indent="0" lvl="0" marL="0" rtl="0" algn="l">
+              <a:lnSpc>
+                <a:spcPct val="115000"/>
+              </a:lnSpc>
+              <a:spcBef>
+                <a:spcPts val="0"/>
+              </a:spcBef>
+              <a:spcAft>
+                <a:spcPts val="1200"/>
+              </a:spcAft>
+              <a:buClr>
+                <a:srgbClr val="000000"/>
+              </a:buClr>
+              <a:buSzPts val="935"/>
+              <a:buFont typeface="Arial"/>
+              <a:buNone/>
+            </a:pPr>
+            <a:r>
+              <a:rPr b="1" lang="en-GB" sz="1100">
+                <a:solidFill>
+                  <a:srgbClr val="202729"/>
+                </a:solidFill>
+                <a:latin typeface="Manrope"/>
+                <a:ea typeface="Manrope"/>
+                <a:cs typeface="Manrope"/>
+                <a:sym typeface="Manrope"/>
+              </a:rPr>
+              <a:t>• All API responses include structured error handling</a:t>
             </a:r>
             <a:r>
               <a:rPr b="1" lang="en-GB" sz="1700">
@@ -8624,7 +8682,7 @@
               <a:buNone/>
             </a:pPr>
             <a:r>
-              <a:rPr b="1" lang="en-GB" sz="1700">
+              <a:rPr b="1" lang="en-GB" sz="1100">
                 <a:solidFill>
                   <a:srgbClr val="202729"/>
                 </a:solidFill>
@@ -8676,7 +8734,7 @@
               <a:buNone/>
             </a:pPr>
             <a:r>
-              <a:rPr b="1" lang="en-GB" sz="1700">
+              <a:rPr b="1" lang="en-GB" sz="1100">
                 <a:solidFill>
                   <a:srgbClr val="202729"/>
                 </a:solidFill>
@@ -8728,16 +8786,16 @@
               <a:buNone/>
             </a:pPr>
             <a:r>
-              <a:rPr b="1" lang="en-GB" sz="1700">
-                <a:solidFill>
-                  <a:srgbClr val="202729"/>
-                </a:solidFill>
-                <a:latin typeface="Manrope"/>
-                <a:ea typeface="Manrope"/>
-                <a:cs typeface="Manrope"/>
-                <a:sym typeface="Manrope"/>
-              </a:rPr>
-              <a:t>Near-term (next 3 months):</a:t>
+              <a:rPr b="1" lang="en-GB" sz="1100">
+                <a:solidFill>
+                  <a:srgbClr val="202729"/>
+                </a:solidFill>
+                <a:latin typeface="Manrope"/>
+                <a:ea typeface="Manrope"/>
+                <a:cs typeface="Manrope"/>
+                <a:sym typeface="Manrope"/>
+              </a:rPr>
+              <a:t>Near-term (3-6 months):</a:t>
             </a:r>
             <a:r>
               <a:rPr b="1" lang="en-GB" sz="1700">
@@ -8780,16 +8838,16 @@
               <a:buNone/>
             </a:pPr>
             <a:r>
-              <a:rPr b="1" lang="en-GB" sz="1700">
-                <a:solidFill>
-                  <a:srgbClr val="202729"/>
-                </a:solidFill>
-                <a:latin typeface="Manrope"/>
-                <a:ea typeface="Manrope"/>
-                <a:cs typeface="Manrope"/>
-                <a:sym typeface="Manrope"/>
-              </a:rPr>
-              <a:t>  - Multilingual voice intake via Amazon Transcribe — let NGO founders</a:t>
+              <a:rPr b="1" lang="en-GB" sz="1100">
+                <a:solidFill>
+                  <a:srgbClr val="202729"/>
+                </a:solidFill>
+                <a:latin typeface="Manrope"/>
+                <a:ea typeface="Manrope"/>
+                <a:cs typeface="Manrope"/>
+                <a:sym typeface="Manrope"/>
+              </a:rPr>
+              <a:t>• Multilingual voice input via Amazon Transcribe — NGO founders</a:t>
             </a:r>
             <a:r>
               <a:rPr b="1" lang="en-GB" sz="1700">
@@ -8832,16 +8890,16 @@
               <a:buNone/>
             </a:pPr>
             <a:r>
-              <a:rPr b="1" lang="en-GB" sz="1700">
-                <a:solidFill>
-                  <a:srgbClr val="202729"/>
-                </a:solidFill>
-                <a:latin typeface="Manrope"/>
-                <a:ea typeface="Manrope"/>
-                <a:cs typeface="Manrope"/>
-                <a:sym typeface="Manrope"/>
-              </a:rPr>
-              <a:t>    describe their work in Hindi or regional languages, and have the AI</a:t>
+              <a:rPr b="1" lang="en-GB" sz="1100">
+                <a:solidFill>
+                  <a:srgbClr val="202729"/>
+                </a:solidFill>
+                <a:latin typeface="Manrope"/>
+                <a:ea typeface="Manrope"/>
+                <a:cs typeface="Manrope"/>
+                <a:sym typeface="Manrope"/>
+              </a:rPr>
+              <a:t>  describe their work in Hindi, AI converts to English proposals</a:t>
             </a:r>
             <a:r>
               <a:rPr b="1" lang="en-GB" sz="1700">
@@ -8884,16 +8942,16 @@
               <a:buNone/>
             </a:pPr>
             <a:r>
-              <a:rPr b="1" lang="en-GB" sz="1700">
-                <a:solidFill>
-                  <a:srgbClr val="202729"/>
-                </a:solidFill>
-                <a:latin typeface="Manrope"/>
-                <a:ea typeface="Manrope"/>
-                <a:cs typeface="Manrope"/>
-                <a:sym typeface="Manrope"/>
-              </a:rPr>
-              <a:t>    convert it into a formal English proposal automatically</a:t>
+              <a:rPr b="1" lang="en-GB" sz="1100">
+                <a:solidFill>
+                  <a:srgbClr val="202729"/>
+                </a:solidFill>
+                <a:latin typeface="Manrope"/>
+                <a:ea typeface="Manrope"/>
+                <a:cs typeface="Manrope"/>
+                <a:sym typeface="Manrope"/>
+              </a:rPr>
+              <a:t>• Expand Grant KB from 5 corporations to 50+</a:t>
             </a:r>
             <a:r>
               <a:rPr b="1" lang="en-GB" sz="1700">
@@ -8936,16 +8994,16 @@
               <a:buNone/>
             </a:pPr>
             <a:r>
-              <a:rPr b="1" lang="en-GB" sz="1700">
-                <a:solidFill>
-                  <a:srgbClr val="202729"/>
-                </a:solidFill>
-                <a:latin typeface="Manrope"/>
-                <a:ea typeface="Manrope"/>
-                <a:cs typeface="Manrope"/>
-                <a:sym typeface="Manrope"/>
-              </a:rPr>
-              <a:t>  - Direct submission to corporate CSR portals through API integrations</a:t>
+              <a:rPr b="1" lang="en-GB" sz="1100">
+                <a:solidFill>
+                  <a:srgbClr val="202729"/>
+                </a:solidFill>
+                <a:latin typeface="Manrope"/>
+                <a:ea typeface="Manrope"/>
+                <a:cs typeface="Manrope"/>
+                <a:sym typeface="Manrope"/>
+              </a:rPr>
+              <a:t>• Automated compliance reminders (12A/80G renewal alerts)</a:t>
             </a:r>
             <a:r>
               <a:rPr b="1" lang="en-GB" sz="1700">
@@ -8988,16 +9046,16 @@
               <a:buNone/>
             </a:pPr>
             <a:r>
-              <a:rPr b="1" lang="en-GB" sz="1700">
-                <a:solidFill>
-                  <a:srgbClr val="202729"/>
-                </a:solidFill>
-                <a:latin typeface="Manrope"/>
-                <a:ea typeface="Manrope"/>
-                <a:cs typeface="Manrope"/>
-                <a:sym typeface="Manrope"/>
-              </a:rPr>
-              <a:t>  - Expand the Grant KB to cover 50+ companies (currently 5)</a:t>
+              <a:rPr b="1" lang="en-GB" sz="1100">
+                <a:solidFill>
+                  <a:srgbClr val="202729"/>
+                </a:solidFill>
+                <a:latin typeface="Manrope"/>
+                <a:ea typeface="Manrope"/>
+                <a:cs typeface="Manrope"/>
+                <a:sym typeface="Manrope"/>
+              </a:rPr>
+              <a:t>• Mobile-first PWA for low-bandwidth rural areas</a:t>
             </a:r>
             <a:r>
               <a:rPr b="1" lang="en-GB" sz="1700">
@@ -9040,7 +9098,7 @@
               <a:buNone/>
             </a:pPr>
             <a:r>
-              <a:rPr b="1" lang="en-GB" sz="1700">
+              <a:rPr b="1" lang="en-GB" sz="1100">
                 <a:solidFill>
                   <a:srgbClr val="202729"/>
                 </a:solidFill>
@@ -9092,7 +9150,7 @@
               <a:buNone/>
             </a:pPr>
             <a:r>
-              <a:rPr b="1" lang="en-GB" sz="1700">
+              <a:rPr b="1" lang="en-GB" sz="1100">
                 <a:solidFill>
                   <a:srgbClr val="202729"/>
                 </a:solidFill>
@@ -9144,16 +9202,16 @@
               <a:buNone/>
             </a:pPr>
             <a:r>
-              <a:rPr b="1" lang="en-GB" sz="1700">
-                <a:solidFill>
-                  <a:srgbClr val="202729"/>
-                </a:solidFill>
-                <a:latin typeface="Manrope"/>
-                <a:ea typeface="Manrope"/>
-                <a:cs typeface="Manrope"/>
-                <a:sym typeface="Manrope"/>
-              </a:rPr>
-              <a:t>  - Government scheme matching (PM-KISAN, MGNREGA tie-ins)</a:t>
+              <a:rPr b="1" lang="en-GB" sz="1100">
+                <a:solidFill>
+                  <a:srgbClr val="202729"/>
+                </a:solidFill>
+                <a:latin typeface="Manrope"/>
+                <a:ea typeface="Manrope"/>
+                <a:cs typeface="Manrope"/>
+                <a:sym typeface="Manrope"/>
+              </a:rPr>
+              <a:t>• Direct submission to corporate CSR portals via API integrations</a:t>
             </a:r>
             <a:r>
               <a:rPr b="1" lang="en-GB" sz="1700">
@@ -9196,16 +9254,16 @@
               <a:buNone/>
             </a:pPr>
             <a:r>
-              <a:rPr b="1" lang="en-GB" sz="1700">
-                <a:solidFill>
-                  <a:srgbClr val="202729"/>
-                </a:solidFill>
-                <a:latin typeface="Manrope"/>
-                <a:ea typeface="Manrope"/>
-                <a:cs typeface="Manrope"/>
-                <a:sym typeface="Manrope"/>
-              </a:rPr>
-              <a:t>  - Automated annual compliance reminders (12A/80G renewal alerts)</a:t>
+              <a:rPr b="1" lang="en-GB" sz="1100">
+                <a:solidFill>
+                  <a:srgbClr val="202729"/>
+                </a:solidFill>
+                <a:latin typeface="Manrope"/>
+                <a:ea typeface="Manrope"/>
+                <a:cs typeface="Manrope"/>
+                <a:sym typeface="Manrope"/>
+              </a:rPr>
+              <a:t>• Government scheme matching (PM-KISAN, MGNREGA tie-ins)</a:t>
             </a:r>
             <a:r>
               <a:rPr b="1" lang="en-GB" sz="1700">
@@ -9248,16 +9306,16 @@
               <a:buNone/>
             </a:pPr>
             <a:r>
-              <a:rPr b="1" lang="en-GB" sz="1700">
-                <a:solidFill>
-                  <a:srgbClr val="202729"/>
-                </a:solidFill>
-                <a:latin typeface="Manrope"/>
-                <a:ea typeface="Manrope"/>
-                <a:cs typeface="Manrope"/>
-                <a:sym typeface="Manrope"/>
-              </a:rPr>
-              <a:t>  - Mobile-first PWA for low-bandwidth rural areas</a:t>
+              <a:rPr b="1" lang="en-GB" sz="1100">
+                <a:solidFill>
+                  <a:srgbClr val="202729"/>
+                </a:solidFill>
+                <a:latin typeface="Manrope"/>
+                <a:ea typeface="Manrope"/>
+                <a:cs typeface="Manrope"/>
+                <a:sym typeface="Manrope"/>
+              </a:rPr>
+              <a:t>• WhatsApp bot for zero-tech-literacy users</a:t>
             </a:r>
             <a:r>
               <a:rPr b="1" lang="en-GB" sz="1700">
@@ -9300,7 +9358,7 @@
               <a:buNone/>
             </a:pPr>
             <a:r>
-              <a:rPr b="1" lang="en-GB" sz="1700">
+              <a:rPr b="1" lang="en-GB" sz="1100">
                 <a:solidFill>
                   <a:srgbClr val="202729"/>
                 </a:solidFill>
@@ -9352,7 +9410,7 @@
               <a:buNone/>
             </a:pPr>
             <a:r>
-              <a:rPr b="1" lang="en-GB" sz="1700">
+              <a:rPr b="1" lang="en-GB" sz="1100">
                 <a:solidFill>
                   <a:srgbClr val="202729"/>
                 </a:solidFill>
@@ -9404,16 +9462,16 @@
               <a:buNone/>
             </a:pPr>
             <a:r>
-              <a:rPr b="1" lang="en-GB" sz="1700">
-                <a:solidFill>
-                  <a:srgbClr val="202729"/>
-                </a:solidFill>
-                <a:latin typeface="Manrope"/>
-                <a:ea typeface="Manrope"/>
-                <a:cs typeface="Manrope"/>
-                <a:sym typeface="Manrope"/>
-              </a:rPr>
-              <a:t>  NidhiAI becomes the default operating system for NGO administration</a:t>
+              <a:rPr b="1" lang="en-GB" sz="1100">
+                <a:solidFill>
+                  <a:srgbClr val="202729"/>
+                </a:solidFill>
+                <a:latin typeface="Manrope"/>
+                <a:ea typeface="Manrope"/>
+                <a:cs typeface="Manrope"/>
+                <a:sym typeface="Manrope"/>
+              </a:rPr>
+              <a:t>• NidhiAI becomes the default administrative platform for NGOs</a:t>
             </a:r>
             <a:r>
               <a:rPr b="1" lang="en-GB" sz="1700">
@@ -9456,16 +9514,16 @@
               <a:buNone/>
             </a:pPr>
             <a:r>
-              <a:rPr b="1" lang="en-GB" sz="1700">
-                <a:solidFill>
-                  <a:srgbClr val="202729"/>
-                </a:solidFill>
-                <a:latin typeface="Manrope"/>
-                <a:ea typeface="Manrope"/>
-                <a:cs typeface="Manrope"/>
-                <a:sym typeface="Manrope"/>
-              </a:rPr>
-              <a:t>  in India — handling compliance, funding, reporting, and government</a:t>
+              <a:rPr b="1" lang="en-GB" sz="1100">
+                <a:solidFill>
+                  <a:srgbClr val="202729"/>
+                </a:solidFill>
+                <a:latin typeface="Manrope"/>
+                <a:ea typeface="Manrope"/>
+                <a:cs typeface="Manrope"/>
+                <a:sym typeface="Manrope"/>
+              </a:rPr>
+              <a:t>  in India — handling compliance, funding, reporting, and filings</a:t>
             </a:r>
             <a:r>
               <a:rPr b="1" lang="en-GB" sz="1700">
@@ -9508,16 +9566,16 @@
               <a:buNone/>
             </a:pPr>
             <a:r>
-              <a:rPr b="1" lang="en-GB" sz="1700">
-                <a:solidFill>
-                  <a:srgbClr val="202729"/>
-                </a:solidFill>
-                <a:latin typeface="Manrope"/>
-                <a:ea typeface="Manrope"/>
-                <a:cs typeface="Manrope"/>
-                <a:sym typeface="Manrope"/>
-              </a:rPr>
-              <a:t>  filings in one platform. If 10% of the Rs.38,000 Cr CSR pool reaches</a:t>
+              <a:rPr b="1" lang="en-GB" sz="1100">
+                <a:solidFill>
+                  <a:srgbClr val="202729"/>
+                </a:solidFill>
+                <a:latin typeface="Manrope"/>
+                <a:ea typeface="Manrope"/>
+                <a:cs typeface="Manrope"/>
+                <a:sym typeface="Manrope"/>
+              </a:rPr>
+              <a:t>• If 10% of the Rs.38,000 Cr CSR pool reaches smaller NGOs</a:t>
             </a:r>
             <a:r>
               <a:rPr b="1" lang="en-GB" sz="1700">
@@ -9560,16 +9618,16 @@
               <a:buNone/>
             </a:pPr>
             <a:r>
-              <a:rPr b="1" lang="en-GB" sz="1700">
-                <a:solidFill>
-                  <a:srgbClr val="202729"/>
-                </a:solidFill>
-                <a:latin typeface="Manrope"/>
-                <a:ea typeface="Manrope"/>
-                <a:cs typeface="Manrope"/>
-                <a:sym typeface="Manrope"/>
-              </a:rPr>
-              <a:t>  smaller NGOs through NidhiAI, that is Rs.3,800 Crores unlocked for</a:t>
+              <a:rPr b="1" lang="en-GB" sz="1100">
+                <a:solidFill>
+                  <a:srgbClr val="202729"/>
+                </a:solidFill>
+                <a:latin typeface="Manrope"/>
+                <a:ea typeface="Manrope"/>
+                <a:cs typeface="Manrope"/>
+                <a:sym typeface="Manrope"/>
+              </a:rPr>
+              <a:t>  through NidhiAI, that is Rs.3,800 Crores unlocked for</a:t>
             </a:r>
             <a:r>
               <a:rPr b="1" lang="en-GB" sz="1700">
@@ -9612,16 +9670,16 @@
               <a:buNone/>
             </a:pPr>
             <a:r>
-              <a:rPr b="1" lang="en-GB" sz="1700">
-                <a:solidFill>
-                  <a:srgbClr val="202729"/>
-                </a:solidFill>
-                <a:latin typeface="Manrope"/>
-                <a:ea typeface="Manrope"/>
-                <a:cs typeface="Manrope"/>
-                <a:sym typeface="Manrope"/>
-              </a:rPr>
-              <a:t>  communities that need it most.</a:t>
+              <a:rPr b="1" lang="en-GB" sz="1100">
+                <a:solidFill>
+                  <a:srgbClr val="202729"/>
+                </a:solidFill>
+                <a:latin typeface="Manrope"/>
+                <a:ea typeface="Manrope"/>
+                <a:cs typeface="Manrope"/>
+                <a:sym typeface="Manrope"/>
+              </a:rPr>
+              <a:t>  communities that need it most</a:t>
             </a:r>
             <a:r>
               <a:rPr b="1" lang="en-GB" sz="1700">
@@ -9742,7 +9800,7 @@
               <a:buNone/>
             </a:pPr>
             <a:r>
-              <a:rPr b="1" lang="en-GB" sz="1700">
+              <a:rPr b="1" lang="en-GB" sz="1400">
                 <a:solidFill>
                   <a:srgbClr val="202729"/>
                 </a:solidFill>
@@ -9808,7 +9866,7 @@
               <a:buChar char="➔"/>
             </a:pPr>
             <a:r>
-              <a:rPr lang="en-GB">
+              <a:rPr lang="en-GB" sz="1400">
                 <a:solidFill>
                   <a:schemeClr val="dk1"/>
                 </a:solidFill>
@@ -9817,7 +9875,7 @@
                 <a:cs typeface="Poppins"/>
                 <a:sym typeface="Poppins"/>
               </a:rPr>
-              <a:t>GitHub Repository: https://github.com/Sid-V5/NidhiAi</a:t>
+              <a:t>GitHub Public Repository Link:</a:t>
             </a:r>
             <a:endParaRPr>
               <a:solidFill>
@@ -9848,7 +9906,7 @@
               <a:buChar char="➔"/>
             </a:pPr>
             <a:r>
-              <a:rPr lang="en-GB">
+              <a:rPr lang="en-GB" sz="1400">
                 <a:solidFill>
                   <a:schemeClr val="dk1"/>
                 </a:solidFill>
@@ -9857,16 +9915,16 @@
                 <a:cs typeface="Poppins"/>
                 <a:sym typeface="Poppins"/>
               </a:rPr>
-              <a:t/>
-            </a:r>
-            <a:endParaRPr b="1" sz="1700">
-              <a:solidFill>
-                <a:srgbClr val="202729"/>
-              </a:solidFill>
-              <a:latin typeface="Manrope"/>
-              <a:ea typeface="Manrope"/>
-              <a:cs typeface="Manrope"/>
-              <a:sym typeface="Manrope"/>
+              <a:t>https://github.com/Sid-V5/NidhiAi</a:t>
+            </a:r>
+            <a:endParaRPr>
+              <a:solidFill>
+                <a:schemeClr val="dk1"/>
+              </a:solidFill>
+              <a:latin typeface="Poppins"/>
+              <a:ea typeface="Poppins"/>
+              <a:cs typeface="Poppins"/>
+              <a:sym typeface="Poppins"/>
             </a:endParaRPr>
           </a:p>
           <a:p>
@@ -9888,7 +9946,7 @@
               <a:buChar char="➔"/>
             </a:pPr>
             <a:r>
-              <a:rPr lang="en-GB">
+              <a:rPr lang="en-GB" sz="1400">
                 <a:solidFill>
                   <a:schemeClr val="dk1"/>
                 </a:solidFill>
@@ -9928,7 +9986,7 @@
               <a:buChar char="➔"/>
             </a:pPr>
             <a:r>
-              <a:rPr lang="en-GB">
+              <a:rPr lang="en-GB" sz="1400">
                 <a:solidFill>
                   <a:schemeClr val="dk1"/>
                 </a:solidFill>
@@ -9937,7 +9995,7 @@
                 <a:cs typeface="Poppins"/>
                 <a:sym typeface="Poppins"/>
               </a:rPr>
-              <a:t>Demo Video: [Add YouTube / Google Drive link here]</a:t>
+              <a:t>Demo Video Link (Max: 3 Minutes):</a:t>
             </a:r>
             <a:endParaRPr>
               <a:solidFill>
@@ -9968,7 +10026,7 @@
               <a:buChar char="➔"/>
             </a:pPr>
             <a:r>
-              <a:rPr lang="en-GB">
+              <a:rPr lang="en-GB" sz="1400">
                 <a:solidFill>
                   <a:schemeClr val="dk1"/>
                 </a:solidFill>
@@ -9977,47 +10035,7 @@
                 <a:cs typeface="Poppins"/>
                 <a:sym typeface="Poppins"/>
               </a:rPr>
-              <a:t/>
-            </a:r>
-            <a:endParaRPr>
-              <a:solidFill>
-                <a:schemeClr val="dk1"/>
-              </a:solidFill>
-              <a:latin typeface="Poppins"/>
-              <a:ea typeface="Poppins"/>
-              <a:cs typeface="Poppins"/>
-              <a:sym typeface="Poppins"/>
-            </a:endParaRPr>
-          </a:p>
-          <a:p>
-            <a:pPr indent="-317500" lvl="0" marL="457200" rtl="0" algn="l">
-              <a:lnSpc>
-                <a:spcPct val="115000"/>
-              </a:lnSpc>
-              <a:spcBef>
-                <a:spcPts val="0"/>
-              </a:spcBef>
-              <a:spcAft>
-                <a:spcPts val="0"/>
-              </a:spcAft>
-              <a:buClr>
-                <a:schemeClr val="dk1"/>
-              </a:buClr>
-              <a:buSzPts val="1400"/>
-              <a:buFont typeface="Poppins"/>
-              <a:buChar char="➔"/>
-            </a:pPr>
-            <a:r>
-              <a:rPr lang="en-GB">
-                <a:solidFill>
-                  <a:schemeClr val="dk1"/>
-                </a:solidFill>
-                <a:latin typeface="Poppins"/>
-                <a:ea typeface="Poppins"/>
-                <a:cs typeface="Poppins"/>
-                <a:sym typeface="Poppins"/>
-              </a:rPr>
-              <a:t>Live MVP: [Add Vercel deployment URL here]</a:t>
+              <a:t>[Insert YouTube / Google Drive link here]</a:t>
             </a:r>
             <a:endParaRPr>
               <a:solidFill>
@@ -10174,7 +10192,7 @@
               <a:buNone/>
             </a:pPr>
             <a:r>
-              <a:rPr b="1" lang="en-GB" sz="1700">
+              <a:rPr b="1" lang="en-GB" sz="1300">
                 <a:solidFill>
                   <a:srgbClr val="202729"/>
                 </a:solidFill>
@@ -10210,7 +10228,7 @@
               <a:buNone/>
             </a:pPr>
             <a:r>
-              <a:rPr b="1" lang="en-GB" sz="1700">
+              <a:rPr b="1" lang="en-GB" sz="1300">
                 <a:solidFill>
                   <a:srgbClr val="202729"/>
                 </a:solidFill>
@@ -10246,16 +10264,16 @@
               <a:buNone/>
             </a:pPr>
             <a:r>
-              <a:rPr b="1" lang="en-GB" sz="1700">
-                <a:solidFill>
-                  <a:srgbClr val="202729"/>
-                </a:solidFill>
-                <a:latin typeface="Manrope"/>
-                <a:ea typeface="Manrope"/>
-                <a:cs typeface="Manrope"/>
-                <a:sym typeface="Manrope"/>
-              </a:rPr>
-              <a:t>NidhiAI is a multi-agent AI platform that gives grassroots NGOs the same</a:t>
+              <a:rPr b="1" lang="en-GB" sz="1300">
+                <a:solidFill>
+                  <a:srgbClr val="202729"/>
+                </a:solidFill>
+                <a:latin typeface="Manrope"/>
+                <a:ea typeface="Manrope"/>
+                <a:cs typeface="Manrope"/>
+                <a:sym typeface="Manrope"/>
+              </a:rPr>
+              <a:t>NidhiAI is an AI-powered platform that gives grassroots NGOs</a:t>
             </a:r>
             <a:endParaRPr b="1" sz="1700">
               <a:solidFill>
@@ -10282,16 +10300,16 @@
               <a:buNone/>
             </a:pPr>
             <a:r>
-              <a:rPr b="1" lang="en-GB" sz="1700">
-                <a:solidFill>
-                  <a:srgbClr val="202729"/>
-                </a:solidFill>
-                <a:latin typeface="Manrope"/>
-                <a:ea typeface="Manrope"/>
-                <a:cs typeface="Manrope"/>
-                <a:sym typeface="Manrope"/>
-              </a:rPr>
-              <a:t>administrative firepower as large organizations — for free.</a:t>
+              <a:rPr b="1" lang="en-GB" sz="1300">
+                <a:solidFill>
+                  <a:srgbClr val="202729"/>
+                </a:solidFill>
+                <a:latin typeface="Manrope"/>
+                <a:ea typeface="Manrope"/>
+                <a:cs typeface="Manrope"/>
+                <a:sym typeface="Manrope"/>
+              </a:rPr>
+              <a:t>the same administrative firepower as large organizations.</a:t>
             </a:r>
             <a:endParaRPr b="1" sz="1700">
               <a:solidFill>
@@ -10318,7 +10336,7 @@
               <a:buNone/>
             </a:pPr>
             <a:r>
-              <a:rPr b="1" lang="en-GB" sz="1700">
+              <a:rPr b="1" lang="en-GB" sz="1300">
                 <a:solidFill>
                   <a:srgbClr val="202729"/>
                 </a:solidFill>
@@ -10354,16 +10372,16 @@
               <a:buNone/>
             </a:pPr>
             <a:r>
-              <a:rPr b="1" lang="en-GB" sz="1700">
-                <a:solidFill>
-                  <a:srgbClr val="202729"/>
-                </a:solidFill>
-                <a:latin typeface="Manrope"/>
-                <a:ea typeface="Manrope"/>
-                <a:cs typeface="Manrope"/>
-                <a:sym typeface="Manrope"/>
-              </a:rPr>
-              <a:t>What it does:</a:t>
+              <a:rPr b="1" lang="en-GB" sz="1300">
+                <a:solidFill>
+                  <a:srgbClr val="202729"/>
+                </a:solidFill>
+                <a:latin typeface="Manrope"/>
+                <a:ea typeface="Manrope"/>
+                <a:cs typeface="Manrope"/>
+                <a:sym typeface="Manrope"/>
+              </a:rPr>
+              <a:t>1. Compliance Automation — NGOs upload their 12A/80G</a:t>
             </a:r>
             <a:endParaRPr b="1" sz="1700">
               <a:solidFill>
@@ -10390,16 +10408,16 @@
               <a:buNone/>
             </a:pPr>
             <a:r>
-              <a:rPr b="1" lang="en-GB" sz="1700">
-                <a:solidFill>
-                  <a:srgbClr val="202729"/>
-                </a:solidFill>
-                <a:latin typeface="Manrope"/>
-                <a:ea typeface="Manrope"/>
-                <a:cs typeface="Manrope"/>
-                <a:sym typeface="Manrope"/>
-              </a:rPr>
-              <a:t>1. Compliance Automation — NGOs upload their 12A/80G certificates. Amazon</a:t>
+              <a:rPr b="1" lang="en-GB" sz="1300">
+                <a:solidFill>
+                  <a:srgbClr val="202729"/>
+                </a:solidFill>
+                <a:latin typeface="Manrope"/>
+                <a:ea typeface="Manrope"/>
+                <a:cs typeface="Manrope"/>
+                <a:sym typeface="Manrope"/>
+              </a:rPr>
+              <a:t>   certificates. Amazon Textract reads the scanned PDFs and a</a:t>
             </a:r>
             <a:endParaRPr b="1" sz="1700">
               <a:solidFill>
@@ -10426,16 +10444,16 @@
               <a:buNone/>
             </a:pPr>
             <a:r>
-              <a:rPr b="1" lang="en-GB" sz="1700">
-                <a:solidFill>
-                  <a:srgbClr val="202729"/>
-                </a:solidFill>
-                <a:latin typeface="Manrope"/>
-                <a:ea typeface="Manrope"/>
-                <a:cs typeface="Manrope"/>
-                <a:sym typeface="Manrope"/>
-              </a:rPr>
-              <a:t>   Textract extracts key fields; a Bedrock Agent validates legal standing</a:t>
+              <a:rPr b="1" lang="en-GB" sz="1300">
+                <a:solidFill>
+                  <a:srgbClr val="202729"/>
+                </a:solidFill>
+                <a:latin typeface="Manrope"/>
+                <a:ea typeface="Manrope"/>
+                <a:cs typeface="Manrope"/>
+                <a:sym typeface="Manrope"/>
+              </a:rPr>
+              <a:t>   Bedrock Agent validates legal standing in seconds.</a:t>
             </a:r>
             <a:endParaRPr b="1" sz="1700">
               <a:solidFill>
@@ -10462,16 +10480,16 @@
               <a:buNone/>
             </a:pPr>
             <a:r>
-              <a:rPr b="1" lang="en-GB" sz="1700">
-                <a:solidFill>
-                  <a:srgbClr val="202729"/>
-                </a:solidFill>
-                <a:latin typeface="Manrope"/>
-                <a:ea typeface="Manrope"/>
-                <a:cs typeface="Manrope"/>
-                <a:sym typeface="Manrope"/>
-              </a:rPr>
-              <a:t>   in seconds instead of weeks with a chartered accountant.</a:t>
+              <a:rPr b="1" lang="en-GB" sz="1300">
+                <a:solidFill>
+                  <a:srgbClr val="202729"/>
+                </a:solidFill>
+                <a:latin typeface="Manrope"/>
+                <a:ea typeface="Manrope"/>
+                <a:cs typeface="Manrope"/>
+                <a:sym typeface="Manrope"/>
+              </a:rPr>
+              <a:t/>
             </a:r>
             <a:endParaRPr b="1" sz="1700">
               <a:solidFill>
@@ -10498,7 +10516,115 @@
               <a:buNone/>
             </a:pPr>
             <a:r>
-              <a:rPr b="1" lang="en-GB" sz="1700">
+              <a:rPr b="1" lang="en-GB" sz="1300">
+                <a:solidFill>
+                  <a:srgbClr val="202729"/>
+                </a:solidFill>
+                <a:latin typeface="Manrope"/>
+                <a:ea typeface="Manrope"/>
+                <a:cs typeface="Manrope"/>
+                <a:sym typeface="Manrope"/>
+              </a:rPr>
+              <a:t>2. Smart Grant Matching — We built a Knowledge Base of real</a:t>
+            </a:r>
+            <a:endParaRPr b="1" sz="1700">
+              <a:solidFill>
+                <a:srgbClr val="202729"/>
+              </a:solidFill>
+              <a:latin typeface="Manrope"/>
+              <a:ea typeface="Manrope"/>
+              <a:cs typeface="Manrope"/>
+              <a:sym typeface="Manrope"/>
+            </a:endParaRPr>
+          </a:p>
+          <a:p>
+            <a:pPr indent="0" lvl="0" marL="0" rtl="0" algn="l">
+              <a:lnSpc>
+                <a:spcPct val="115000"/>
+              </a:lnSpc>
+              <a:spcBef>
+                <a:spcPts val="0"/>
+              </a:spcBef>
+              <a:spcAft>
+                <a:spcPts val="1200"/>
+              </a:spcAft>
+              <a:buSzPts val="935"/>
+              <a:buNone/>
+            </a:pPr>
+            <a:r>
+              <a:rPr b="1" lang="en-GB" sz="1300">
+                <a:solidFill>
+                  <a:srgbClr val="202729"/>
+                </a:solidFill>
+                <a:latin typeface="Manrope"/>
+                <a:ea typeface="Manrope"/>
+                <a:cs typeface="Manrope"/>
+                <a:sym typeface="Manrope"/>
+              </a:rPr>
+              <a:t>   corporate CSR filings. Titan Embeddings match the NGO</a:t>
+            </a:r>
+            <a:endParaRPr b="1" sz="1700">
+              <a:solidFill>
+                <a:srgbClr val="202729"/>
+              </a:solidFill>
+              <a:latin typeface="Manrope"/>
+              <a:ea typeface="Manrope"/>
+              <a:cs typeface="Manrope"/>
+              <a:sym typeface="Manrope"/>
+            </a:endParaRPr>
+          </a:p>
+          <a:p>
+            <a:pPr indent="0" lvl="0" marL="0" rtl="0" algn="l">
+              <a:lnSpc>
+                <a:spcPct val="115000"/>
+              </a:lnSpc>
+              <a:spcBef>
+                <a:spcPts val="0"/>
+              </a:spcBef>
+              <a:spcAft>
+                <a:spcPts val="1200"/>
+              </a:spcAft>
+              <a:buSzPts val="935"/>
+              <a:buNone/>
+            </a:pPr>
+            <a:r>
+              <a:rPr b="1" lang="en-GB" sz="1300">
+                <a:solidFill>
+                  <a:srgbClr val="202729"/>
+                </a:solidFill>
+                <a:latin typeface="Manrope"/>
+                <a:ea typeface="Manrope"/>
+                <a:cs typeface="Manrope"/>
+                <a:sym typeface="Manrope"/>
+              </a:rPr>
+              <a:t>   profile to relevant funding opportunities semantically.</a:t>
+            </a:r>
+            <a:endParaRPr b="1" sz="1700">
+              <a:solidFill>
+                <a:srgbClr val="202729"/>
+              </a:solidFill>
+              <a:latin typeface="Manrope"/>
+              <a:ea typeface="Manrope"/>
+              <a:cs typeface="Manrope"/>
+              <a:sym typeface="Manrope"/>
+            </a:endParaRPr>
+          </a:p>
+          <a:p>
+            <a:pPr indent="0" lvl="0" marL="0" rtl="0" algn="l">
+              <a:lnSpc>
+                <a:spcPct val="115000"/>
+              </a:lnSpc>
+              <a:spcBef>
+                <a:spcPts val="0"/>
+              </a:spcBef>
+              <a:spcAft>
+                <a:spcPts val="1200"/>
+              </a:spcAft>
+              <a:buSzPts val="935"/>
+              <a:buNone/>
+            </a:pPr>
+            <a:r>
+              <a:rPr b="1" lang="en-GB" sz="1300">
                 <a:solidFill>
                   <a:srgbClr val="202729"/>
                 </a:solidFill>
@@ -10534,16 +10660,16 @@
               <a:buNone/>
             </a:pPr>
             <a:r>
-              <a:rPr b="1" lang="en-GB" sz="1700">
-                <a:solidFill>
-                  <a:srgbClr val="202729"/>
-                </a:solidFill>
-                <a:latin typeface="Manrope"/>
-                <a:ea typeface="Manrope"/>
-                <a:cs typeface="Manrope"/>
-                <a:sym typeface="Manrope"/>
-              </a:rPr>
-              <a:t>2. Smart CSR Grant Matching — We built a Knowledge Base of corporate CSR</a:t>
+              <a:rPr b="1" lang="en-GB" sz="1300">
+                <a:solidFill>
+                  <a:srgbClr val="202729"/>
+                </a:solidFill>
+                <a:latin typeface="Manrope"/>
+                <a:ea typeface="Manrope"/>
+                <a:cs typeface="Manrope"/>
+                <a:sym typeface="Manrope"/>
+              </a:rPr>
+              <a:t>3. Instant Proposal Drafting — One click generates a formal</a:t>
             </a:r>
             <a:endParaRPr b="1" sz="1700">
               <a:solidFill>
@@ -10570,16 +10696,16 @@
               <a:buNone/>
             </a:pPr>
             <a:r>
-              <a:rPr b="1" lang="en-GB" sz="1700">
-                <a:solidFill>
-                  <a:srgbClr val="202729"/>
-                </a:solidFill>
-                <a:latin typeface="Manrope"/>
-                <a:ea typeface="Manrope"/>
-                <a:cs typeface="Manrope"/>
-                <a:sym typeface="Manrope"/>
-              </a:rPr>
-              <a:t>   filings (Tata, Infosys, HDFC, Reliance, Wipro). Titan Embeddings match</a:t>
+              <a:rPr b="1" lang="en-GB" sz="1300">
+                <a:solidFill>
+                  <a:srgbClr val="202729"/>
+                </a:solidFill>
+                <a:latin typeface="Manrope"/>
+                <a:ea typeface="Manrope"/>
+                <a:cs typeface="Manrope"/>
+                <a:sym typeface="Manrope"/>
+              </a:rPr>
+              <a:t>   grant application tailored to the fund's criteria. The text</a:t>
             </a:r>
             <a:endParaRPr b="1" sz="1700">
               <a:solidFill>
@@ -10606,16 +10732,16 @@
               <a:buNone/>
             </a:pPr>
             <a:r>
-              <a:rPr b="1" lang="en-GB" sz="1700">
-                <a:solidFill>
-                  <a:srgbClr val="202729"/>
-                </a:solidFill>
-                <a:latin typeface="Manrope"/>
-                <a:ea typeface="Manrope"/>
-                <a:cs typeface="Manrope"/>
-                <a:sym typeface="Manrope"/>
-              </a:rPr>
-              <a:t>   the NGO profile to relevant funding opportunities semantically.</a:t>
+              <a:rPr b="1" lang="en-GB" sz="1300">
+                <a:solidFill>
+                  <a:srgbClr val="202729"/>
+                </a:solidFill>
+                <a:latin typeface="Manrope"/>
+                <a:ea typeface="Manrope"/>
+                <a:cs typeface="Manrope"/>
+                <a:sym typeface="Manrope"/>
+              </a:rPr>
+              <a:t>   is livestreamed to the screen as the AI writes it.</a:t>
             </a:r>
             <a:endParaRPr b="1" sz="1700">
               <a:solidFill>
@@ -10642,7 +10768,7 @@
               <a:buNone/>
             </a:pPr>
             <a:r>
-              <a:rPr b="1" lang="en-GB" sz="1700">
+              <a:rPr b="1" lang="en-GB" sz="1300">
                 <a:solidFill>
                   <a:srgbClr val="202729"/>
                 </a:solidFill>
@@ -10678,16 +10804,16 @@
               <a:buNone/>
             </a:pPr>
             <a:r>
-              <a:rPr b="1" lang="en-GB" sz="1700">
-                <a:solidFill>
-                  <a:srgbClr val="202729"/>
-                </a:solidFill>
-                <a:latin typeface="Manrope"/>
-                <a:ea typeface="Manrope"/>
-                <a:cs typeface="Manrope"/>
-                <a:sym typeface="Manrope"/>
-              </a:rPr>
-              <a:t>3. One-Click Proposal Drafting — A single button press generates a formal,</a:t>
+              <a:rPr b="1" lang="en-GB" sz="1300">
+                <a:solidFill>
+                  <a:srgbClr val="202729"/>
+                </a:solidFill>
+                <a:latin typeface="Manrope"/>
+                <a:ea typeface="Manrope"/>
+                <a:cs typeface="Manrope"/>
+                <a:sym typeface="Manrope"/>
+              </a:rPr>
+              <a:t>4. CSR Legal Assistant — An integrated chatbot answers</a:t>
             </a:r>
             <a:endParaRPr b="1" sz="1700">
               <a:solidFill>
@@ -10714,16 +10840,16 @@
               <a:buNone/>
             </a:pPr>
             <a:r>
-              <a:rPr b="1" lang="en-GB" sz="1700">
-                <a:solidFill>
-                  <a:srgbClr val="202729"/>
-                </a:solidFill>
-                <a:latin typeface="Manrope"/>
-                <a:ea typeface="Manrope"/>
-                <a:cs typeface="Manrope"/>
-                <a:sym typeface="Manrope"/>
-              </a:rPr>
-              <a:t>   5-page grant application tailored to the specific fund guidelines,</a:t>
+              <a:rPr b="1" lang="en-GB" sz="1300">
+                <a:solidFill>
+                  <a:srgbClr val="202729"/>
+                </a:solidFill>
+                <a:latin typeface="Manrope"/>
+                <a:ea typeface="Manrope"/>
+                <a:cs typeface="Manrope"/>
+                <a:sym typeface="Manrope"/>
+              </a:rPr>
+              <a:t>   questions about Section 135, Schedule VII, and FCRA</a:t>
             </a:r>
             <a:endParaRPr b="1" sz="1700">
               <a:solidFill>
@@ -10750,160 +10876,16 @@
               <a:buNone/>
             </a:pPr>
             <a:r>
-              <a:rPr b="1" lang="en-GB" sz="1700">
-                <a:solidFill>
-                  <a:srgbClr val="202729"/>
-                </a:solidFill>
-                <a:latin typeface="Manrope"/>
-                <a:ea typeface="Manrope"/>
-                <a:cs typeface="Manrope"/>
-                <a:sym typeface="Manrope"/>
-              </a:rPr>
-              <a:t>   completely removing the English fluency barrier.</a:t>
-            </a:r>
-            <a:endParaRPr b="1" sz="1700">
-              <a:solidFill>
-                <a:srgbClr val="202729"/>
-              </a:solidFill>
-              <a:latin typeface="Manrope"/>
-              <a:ea typeface="Manrope"/>
-              <a:cs typeface="Manrope"/>
-              <a:sym typeface="Manrope"/>
-            </a:endParaRPr>
-          </a:p>
-          <a:p>
-            <a:pPr indent="0" lvl="0" marL="0" rtl="0" algn="l">
-              <a:lnSpc>
-                <a:spcPct val="115000"/>
-              </a:lnSpc>
-              <a:spcBef>
-                <a:spcPts val="0"/>
-              </a:spcBef>
-              <a:spcAft>
-                <a:spcPts val="1200"/>
-              </a:spcAft>
-              <a:buSzPts val="935"/>
-              <a:buNone/>
-            </a:pPr>
-            <a:r>
-              <a:rPr b="1" lang="en-GB" sz="1700">
-                <a:solidFill>
-                  <a:srgbClr val="202729"/>
-                </a:solidFill>
-                <a:latin typeface="Manrope"/>
-                <a:ea typeface="Manrope"/>
-                <a:cs typeface="Manrope"/>
-                <a:sym typeface="Manrope"/>
-              </a:rPr>
-              <a:t/>
-            </a:r>
-            <a:endParaRPr b="1" sz="1700">
-              <a:solidFill>
-                <a:srgbClr val="202729"/>
-              </a:solidFill>
-              <a:latin typeface="Manrope"/>
-              <a:ea typeface="Manrope"/>
-              <a:cs typeface="Manrope"/>
-              <a:sym typeface="Manrope"/>
-            </a:endParaRPr>
-          </a:p>
-          <a:p>
-            <a:pPr indent="0" lvl="0" marL="0" rtl="0" algn="l">
-              <a:lnSpc>
-                <a:spcPct val="115000"/>
-              </a:lnSpc>
-              <a:spcBef>
-                <a:spcPts val="0"/>
-              </a:spcBef>
-              <a:spcAft>
-                <a:spcPts val="1200"/>
-              </a:spcAft>
-              <a:buSzPts val="935"/>
-              <a:buNone/>
-            </a:pPr>
-            <a:r>
-              <a:rPr b="1" lang="en-GB" sz="1700">
-                <a:solidFill>
-                  <a:srgbClr val="202729"/>
-                </a:solidFill>
-                <a:latin typeface="Manrope"/>
-                <a:ea typeface="Manrope"/>
-                <a:cs typeface="Manrope"/>
-                <a:sym typeface="Manrope"/>
-              </a:rPr>
-              <a:t>4. CSR Legal Assistant — An integrated chatbot backed by a Knowledge Base</a:t>
-            </a:r>
-            <a:endParaRPr b="1" sz="1700">
-              <a:solidFill>
-                <a:srgbClr val="202729"/>
-              </a:solidFill>
-              <a:latin typeface="Manrope"/>
-              <a:ea typeface="Manrope"/>
-              <a:cs typeface="Manrope"/>
-              <a:sym typeface="Manrope"/>
-            </a:endParaRPr>
-          </a:p>
-          <a:p>
-            <a:pPr indent="0" lvl="0" marL="0" rtl="0" algn="l">
-              <a:lnSpc>
-                <a:spcPct val="115000"/>
-              </a:lnSpc>
-              <a:spcBef>
-                <a:spcPts val="0"/>
-              </a:spcBef>
-              <a:spcAft>
-                <a:spcPts val="1200"/>
-              </a:spcAft>
-              <a:buSzPts val="935"/>
-              <a:buNone/>
-            </a:pPr>
-            <a:r>
-              <a:rPr b="1" lang="en-GB" sz="1700">
-                <a:solidFill>
-                  <a:srgbClr val="202729"/>
-                </a:solidFill>
-                <a:latin typeface="Manrope"/>
-                <a:ea typeface="Manrope"/>
-                <a:cs typeface="Manrope"/>
-                <a:sym typeface="Manrope"/>
-              </a:rPr>
-              <a:t>   of Indian CSR laws (Section 135, Schedule VII, FCRA) provides instant</a:t>
-            </a:r>
-            <a:endParaRPr b="1" sz="1700">
-              <a:solidFill>
-                <a:srgbClr val="202729"/>
-              </a:solidFill>
-              <a:latin typeface="Manrope"/>
-              <a:ea typeface="Manrope"/>
-              <a:cs typeface="Manrope"/>
-              <a:sym typeface="Manrope"/>
-            </a:endParaRPr>
-          </a:p>
-          <a:p>
-            <a:pPr indent="0" lvl="0" marL="0" rtl="0" algn="l">
-              <a:lnSpc>
-                <a:spcPct val="115000"/>
-              </a:lnSpc>
-              <a:spcBef>
-                <a:spcPts val="0"/>
-              </a:spcBef>
-              <a:spcAft>
-                <a:spcPts val="1200"/>
-              </a:spcAft>
-              <a:buSzPts val="935"/>
-              <a:buNone/>
-            </a:pPr>
-            <a:r>
-              <a:rPr b="1" lang="en-GB" sz="1700">
-                <a:solidFill>
-                  <a:srgbClr val="202729"/>
-                </a:solidFill>
-                <a:latin typeface="Manrope"/>
-                <a:ea typeface="Manrope"/>
-                <a:cs typeface="Manrope"/>
-                <a:sym typeface="Manrope"/>
-              </a:rPr>
-              <a:t>   regulatory guidance.</a:t>
+              <a:rPr b="1" lang="en-GB" sz="1300">
+                <a:solidFill>
+                  <a:srgbClr val="202729"/>
+                </a:solidFill>
+                <a:latin typeface="Manrope"/>
+                <a:ea typeface="Manrope"/>
+                <a:cs typeface="Manrope"/>
+                <a:sym typeface="Manrope"/>
+              </a:rPr>
+              <a:t>   using a synced Knowledge Base of Indian CSR laws.</a:t>
             </a:r>
             <a:endParaRPr b="1" sz="1700">
               <a:solidFill>
@@ -11008,16 +10990,16 @@
               <a:buNone/>
             </a:pPr>
             <a:r>
-              <a:rPr b="1" lang="en-GB" sz="1700">
-                <a:solidFill>
-                  <a:srgbClr val="202729"/>
-                </a:solidFill>
-                <a:latin typeface="Manrope"/>
-                <a:ea typeface="Manrope"/>
-                <a:cs typeface="Manrope"/>
-                <a:sym typeface="Manrope"/>
-              </a:rPr>
-              <a:t>Why AI is required in NidhiAI:</a:t>
+              <a:rPr b="1" lang="en-GB" sz="1100">
+                <a:solidFill>
+                  <a:srgbClr val="202729"/>
+                </a:solidFill>
+                <a:latin typeface="Manrope"/>
+                <a:ea typeface="Manrope"/>
+                <a:cs typeface="Manrope"/>
+                <a:sym typeface="Manrope"/>
+              </a:rPr>
+              <a:t>Why AI is required:</a:t>
             </a:r>
             <a:endParaRPr b="1" sz="1700">
               <a:solidFill>
@@ -11030,177 +11012,534 @@
             </a:endParaRPr>
           </a:p>
           <a:p>
-            <a:pPr indent="-330200" lvl="0" marL="457200" rtl="0" algn="l">
-              <a:lnSpc>
-                <a:spcPct val="115000"/>
-              </a:lnSpc>
-              <a:spcBef>
-                <a:spcPts val="1200"/>
-              </a:spcBef>
-              <a:spcAft>
-                <a:spcPts val="0"/>
-              </a:spcAft>
-              <a:buClr>
+            <a:pPr indent="0" lvl="0" marL="0" rtl="0" algn="l">
+              <a:lnSpc>
+                <a:spcPct val="115000"/>
+              </a:lnSpc>
+              <a:spcBef>
+                <a:spcPts val="0"/>
+              </a:spcBef>
+              <a:spcAft>
+                <a:spcPts val="0"/>
+              </a:spcAft>
+              <a:buSzPts val="935"/>
+              <a:buNone/>
+            </a:pPr>
+            <a:r>
+              <a:rPr b="1" lang="en-GB" sz="1100">
+                <a:solidFill>
+                  <a:srgbClr val="202729"/>
+                </a:solidFill>
+                <a:latin typeface="Manrope"/>
+                <a:ea typeface="Manrope"/>
+                <a:cs typeface="Manrope"/>
+                <a:sym typeface="Manrope"/>
+              </a:rPr>
+              <a:t/>
+            </a:r>
+            <a:endParaRPr b="1" sz="1700">
+              <a:solidFill>
                 <a:srgbClr val="202729"/>
-              </a:buClr>
-              <a:buSzPts val="1600"/>
-              <a:buFont typeface="Manrope SemiBold"/>
-              <a:buChar char="●"/>
-            </a:pPr>
-            <a:r>
-              <a:rPr lang="en-GB" sz="1600">
-                <a:solidFill>
-                  <a:srgbClr val="202729"/>
-                </a:solidFill>
-                <a:latin typeface="Manrope SemiBold"/>
-                <a:ea typeface="Manrope SemiBold"/>
-                <a:cs typeface="Manrope SemiBold"/>
-                <a:sym typeface="Manrope SemiBold"/>
+              </a:solidFill>
+              <a:latin typeface="Manrope"/>
+              <a:ea typeface="Manrope"/>
+              <a:cs typeface="Manrope"/>
+              <a:sym typeface="Manrope"/>
+            </a:endParaRPr>
+          </a:p>
+          <a:p>
+            <a:pPr indent="0" lvl="0" marL="0" rtl="0" algn="l">
+              <a:lnSpc>
+                <a:spcPct val="115000"/>
+              </a:lnSpc>
+              <a:spcBef>
+                <a:spcPts val="0"/>
+              </a:spcBef>
+              <a:spcAft>
+                <a:spcPts val="0"/>
+              </a:spcAft>
+              <a:buSzPts val="935"/>
+              <a:buNone/>
+            </a:pPr>
+            <a:r>
+              <a:rPr b="1" lang="en-GB" sz="1100">
+                <a:solidFill>
+                  <a:srgbClr val="202729"/>
+                </a:solidFill>
+                <a:latin typeface="Manrope"/>
+                <a:ea typeface="Manrope"/>
+                <a:cs typeface="Manrope"/>
+                <a:sym typeface="Manrope"/>
+              </a:rPr>
+              <a:t>Government certificates (12A, 80G) are scanned PDFs with no API.</a:t>
+            </a:r>
+            <a:endParaRPr b="1" sz="1700">
+              <a:solidFill>
+                <a:srgbClr val="202729"/>
+              </a:solidFill>
+              <a:latin typeface="Manrope"/>
+              <a:ea typeface="Manrope"/>
+              <a:cs typeface="Manrope"/>
+              <a:sym typeface="Manrope"/>
+            </a:endParaRPr>
+          </a:p>
+          <a:p>
+            <a:pPr indent="0" lvl="0" marL="0" rtl="0" algn="l">
+              <a:lnSpc>
+                <a:spcPct val="115000"/>
+              </a:lnSpc>
+              <a:spcBef>
+                <a:spcPts val="0"/>
+              </a:spcBef>
+              <a:spcAft>
+                <a:spcPts val="0"/>
+              </a:spcAft>
+              <a:buSzPts val="935"/>
+              <a:buNone/>
+            </a:pPr>
+            <a:r>
+              <a:rPr b="1" lang="en-GB" sz="1100">
+                <a:solidFill>
+                  <a:srgbClr val="202729"/>
+                </a:solidFill>
+                <a:latin typeface="Manrope"/>
+                <a:ea typeface="Manrope"/>
+                <a:cs typeface="Manrope"/>
+                <a:sym typeface="Manrope"/>
+              </a:rPr>
+              <a:t>Amazon Textract + a Bedrock Agent is required to extract registration</a:t>
+            </a:r>
+            <a:endParaRPr b="1" sz="1700">
+              <a:solidFill>
+                <a:srgbClr val="202729"/>
+              </a:solidFill>
+              <a:latin typeface="Manrope"/>
+              <a:ea typeface="Manrope"/>
+              <a:cs typeface="Manrope"/>
+              <a:sym typeface="Manrope"/>
+            </a:endParaRPr>
+          </a:p>
+          <a:p>
+            <a:pPr indent="0" lvl="0" marL="0" rtl="0" algn="l">
+              <a:lnSpc>
+                <a:spcPct val="115000"/>
+              </a:lnSpc>
+              <a:spcBef>
+                <a:spcPts val="0"/>
+              </a:spcBef>
+              <a:spcAft>
+                <a:spcPts val="0"/>
+              </a:spcAft>
+              <a:buSzPts val="935"/>
+              <a:buNone/>
+            </a:pPr>
+            <a:r>
+              <a:rPr b="1" lang="en-GB" sz="1100">
+                <a:solidFill>
+                  <a:srgbClr val="202729"/>
+                </a:solidFill>
+                <a:latin typeface="Manrope"/>
+                <a:ea typeface="Manrope"/>
+                <a:cs typeface="Manrope"/>
+                <a:sym typeface="Manrope"/>
+              </a:rPr>
+              <a:t>numbers and expiry dates from these unstructured documents.</a:t>
+            </a:r>
+            <a:endParaRPr b="1" sz="1700">
+              <a:solidFill>
+                <a:srgbClr val="202729"/>
+              </a:solidFill>
+              <a:latin typeface="Manrope"/>
+              <a:ea typeface="Manrope"/>
+              <a:cs typeface="Manrope"/>
+              <a:sym typeface="Manrope"/>
+            </a:endParaRPr>
+          </a:p>
+          <a:p>
+            <a:pPr indent="0" lvl="0" marL="0" rtl="0" algn="l">
+              <a:lnSpc>
+                <a:spcPct val="115000"/>
+              </a:lnSpc>
+              <a:spcBef>
+                <a:spcPts val="0"/>
+              </a:spcBef>
+              <a:spcAft>
+                <a:spcPts val="0"/>
+              </a:spcAft>
+              <a:buSzPts val="935"/>
+              <a:buNone/>
+            </a:pPr>
+            <a:r>
+              <a:rPr b="1" lang="en-GB" sz="1100">
+                <a:solidFill>
+                  <a:srgbClr val="202729"/>
+                </a:solidFill>
+                <a:latin typeface="Manrope"/>
+                <a:ea typeface="Manrope"/>
+                <a:cs typeface="Manrope"/>
+                <a:sym typeface="Manrope"/>
               </a:rPr>
               <a:t/>
             </a:r>
-            <a:endParaRPr sz="1600">
+            <a:endParaRPr b="1" sz="1700">
               <a:solidFill>
                 <a:srgbClr val="202729"/>
               </a:solidFill>
-              <a:latin typeface="Manrope SemiBold"/>
-              <a:ea typeface="Manrope SemiBold"/>
-              <a:cs typeface="Manrope SemiBold"/>
-              <a:sym typeface="Manrope SemiBold"/>
-            </a:endParaRPr>
-          </a:p>
-          <a:p>
-            <a:pPr indent="-330200" lvl="0" marL="457200" rtl="0" algn="l">
-              <a:lnSpc>
-                <a:spcPct val="115000"/>
-              </a:lnSpc>
-              <a:spcBef>
-                <a:spcPts val="0"/>
-              </a:spcBef>
-              <a:spcAft>
-                <a:spcPts val="0"/>
-              </a:spcAft>
-              <a:buClr>
+              <a:latin typeface="Manrope"/>
+              <a:ea typeface="Manrope"/>
+              <a:cs typeface="Manrope"/>
+              <a:sym typeface="Manrope"/>
+            </a:endParaRPr>
+          </a:p>
+          <a:p>
+            <a:pPr indent="0" lvl="0" marL="0" rtl="0" algn="l">
+              <a:lnSpc>
+                <a:spcPct val="115000"/>
+              </a:lnSpc>
+              <a:spcBef>
+                <a:spcPts val="0"/>
+              </a:spcBef>
+              <a:spcAft>
+                <a:spcPts val="0"/>
+              </a:spcAft>
+              <a:buSzPts val="935"/>
+              <a:buNone/>
+            </a:pPr>
+            <a:r>
+              <a:rPr b="1" lang="en-GB" sz="1100">
+                <a:solidFill>
+                  <a:srgbClr val="202729"/>
+                </a:solidFill>
+                <a:latin typeface="Manrope"/>
+                <a:ea typeface="Manrope"/>
+                <a:cs typeface="Manrope"/>
+                <a:sym typeface="Manrope"/>
+              </a:rPr>
+              <a:t>A keyword search cannot match "village water project" to a company's</a:t>
+            </a:r>
+            <a:endParaRPr b="1" sz="1700">
+              <a:solidFill>
                 <a:srgbClr val="202729"/>
-              </a:buClr>
-              <a:buSzPts val="1600"/>
-              <a:buFont typeface="Manrope SemiBold"/>
-              <a:buChar char="●"/>
-            </a:pPr>
-            <a:r>
-              <a:rPr lang="en-GB" sz="1600">
-                <a:solidFill>
-                  <a:srgbClr val="202729"/>
-                </a:solidFill>
-                <a:latin typeface="Manrope SemiBold"/>
-                <a:ea typeface="Manrope SemiBold"/>
-                <a:cs typeface="Manrope SemiBold"/>
-                <a:sym typeface="Manrope SemiBold"/>
+              </a:solidFill>
+              <a:latin typeface="Manrope"/>
+              <a:ea typeface="Manrope"/>
+              <a:cs typeface="Manrope"/>
+              <a:sym typeface="Manrope"/>
+            </a:endParaRPr>
+          </a:p>
+          <a:p>
+            <a:pPr indent="0" lvl="0" marL="0" rtl="0" algn="l">
+              <a:lnSpc>
+                <a:spcPct val="115000"/>
+              </a:lnSpc>
+              <a:spcBef>
+                <a:spcPts val="0"/>
+              </a:spcBef>
+              <a:spcAft>
+                <a:spcPts val="0"/>
+              </a:spcAft>
+              <a:buSzPts val="935"/>
+              <a:buNone/>
+            </a:pPr>
+            <a:r>
+              <a:rPr b="1" lang="en-GB" sz="1100">
+                <a:solidFill>
+                  <a:srgbClr val="202729"/>
+                </a:solidFill>
+                <a:latin typeface="Manrope"/>
+                <a:ea typeface="Manrope"/>
+                <a:cs typeface="Manrope"/>
+                <a:sym typeface="Manrope"/>
+              </a:rPr>
+              <a:t>"Schedule VII Rural Infrastructure" mandate. Semantic embeddings</a:t>
+            </a:r>
+            <a:endParaRPr b="1" sz="1700">
+              <a:solidFill>
+                <a:srgbClr val="202729"/>
+              </a:solidFill>
+              <a:latin typeface="Manrope"/>
+              <a:ea typeface="Manrope"/>
+              <a:cs typeface="Manrope"/>
+              <a:sym typeface="Manrope"/>
+            </a:endParaRPr>
+          </a:p>
+          <a:p>
+            <a:pPr indent="0" lvl="0" marL="0" rtl="0" algn="l">
+              <a:lnSpc>
+                <a:spcPct val="115000"/>
+              </a:lnSpc>
+              <a:spcBef>
+                <a:spcPts val="0"/>
+              </a:spcBef>
+              <a:spcAft>
+                <a:spcPts val="0"/>
+              </a:spcAft>
+              <a:buSzPts val="935"/>
+              <a:buNone/>
+            </a:pPr>
+            <a:r>
+              <a:rPr b="1" lang="en-GB" sz="1100">
+                <a:solidFill>
+                  <a:srgbClr val="202729"/>
+                </a:solidFill>
+                <a:latin typeface="Manrope"/>
+                <a:ea typeface="Manrope"/>
+                <a:cs typeface="Manrope"/>
+                <a:sym typeface="Manrope"/>
+              </a:rPr>
+              <a:t>(Titan Text Embeddings V2 + OpenSearch vector search) are needed.</a:t>
+            </a:r>
+            <a:endParaRPr b="1" sz="1700">
+              <a:solidFill>
+                <a:srgbClr val="202729"/>
+              </a:solidFill>
+              <a:latin typeface="Manrope"/>
+              <a:ea typeface="Manrope"/>
+              <a:cs typeface="Manrope"/>
+              <a:sym typeface="Manrope"/>
+            </a:endParaRPr>
+          </a:p>
+          <a:p>
+            <a:pPr indent="0" lvl="0" marL="0" rtl="0" algn="l">
+              <a:lnSpc>
+                <a:spcPct val="115000"/>
+              </a:lnSpc>
+              <a:spcBef>
+                <a:spcPts val="0"/>
+              </a:spcBef>
+              <a:spcAft>
+                <a:spcPts val="0"/>
+              </a:spcAft>
+              <a:buSzPts val="935"/>
+              <a:buNone/>
+            </a:pPr>
+            <a:r>
+              <a:rPr b="1" lang="en-GB" sz="1100">
+                <a:solidFill>
+                  <a:srgbClr val="202729"/>
+                </a:solidFill>
+                <a:latin typeface="Manrope"/>
+                <a:ea typeface="Manrope"/>
+                <a:cs typeface="Manrope"/>
+                <a:sym typeface="Manrope"/>
               </a:rPr>
               <a:t/>
             </a:r>
-            <a:endParaRPr sz="1600">
+            <a:endParaRPr b="1" sz="1700">
               <a:solidFill>
                 <a:srgbClr val="202729"/>
               </a:solidFill>
-              <a:latin typeface="Manrope SemiBold"/>
-              <a:ea typeface="Manrope SemiBold"/>
-              <a:cs typeface="Manrope SemiBold"/>
-              <a:sym typeface="Manrope SemiBold"/>
-            </a:endParaRPr>
-          </a:p>
-          <a:p>
-            <a:pPr indent="-330200" lvl="0" marL="457200" rtl="0" algn="l">
-              <a:lnSpc>
-                <a:spcPct val="115000"/>
-              </a:lnSpc>
-              <a:spcBef>
-                <a:spcPts val="0"/>
-              </a:spcBef>
-              <a:spcAft>
-                <a:spcPts val="0"/>
-              </a:spcAft>
-              <a:buClr>
+              <a:latin typeface="Manrope"/>
+              <a:ea typeface="Manrope"/>
+              <a:cs typeface="Manrope"/>
+              <a:sym typeface="Manrope"/>
+            </a:endParaRPr>
+          </a:p>
+          <a:p>
+            <a:pPr indent="0" lvl="0" marL="0" rtl="0" algn="l">
+              <a:lnSpc>
+                <a:spcPct val="115000"/>
+              </a:lnSpc>
+              <a:spcBef>
+                <a:spcPts val="0"/>
+              </a:spcBef>
+              <a:spcAft>
+                <a:spcPts val="0"/>
+              </a:spcAft>
+              <a:buSzPts val="935"/>
+              <a:buNone/>
+            </a:pPr>
+            <a:r>
+              <a:rPr b="1" lang="en-GB" sz="1100">
+                <a:solidFill>
+                  <a:srgbClr val="202729"/>
+                </a:solidFill>
+                <a:latin typeface="Manrope"/>
+                <a:ea typeface="Manrope"/>
+                <a:cs typeface="Manrope"/>
+                <a:sym typeface="Manrope"/>
+              </a:rPr>
+              <a:t>Grassroots NGOs cannot afford Rs.50,000 per grant writer. The</a:t>
+            </a:r>
+            <a:endParaRPr b="1" sz="1700">
+              <a:solidFill>
                 <a:srgbClr val="202729"/>
-              </a:buClr>
-              <a:buSzPts val="1600"/>
-              <a:buFont typeface="Manrope SemiBold"/>
-              <a:buChar char="●"/>
-            </a:pPr>
-            <a:r>
-              <a:rPr lang="en-GB" sz="1600">
-                <a:solidFill>
-                  <a:srgbClr val="202729"/>
-                </a:solidFill>
-                <a:latin typeface="Manrope SemiBold"/>
-                <a:ea typeface="Manrope SemiBold"/>
-                <a:cs typeface="Manrope SemiBold"/>
-                <a:sym typeface="Manrope SemiBold"/>
+              </a:solidFill>
+              <a:latin typeface="Manrope"/>
+              <a:ea typeface="Manrope"/>
+              <a:cs typeface="Manrope"/>
+              <a:sym typeface="Manrope"/>
+            </a:endParaRPr>
+          </a:p>
+          <a:p>
+            <a:pPr indent="0" lvl="0" marL="0" rtl="0" algn="l">
+              <a:lnSpc>
+                <a:spcPct val="115000"/>
+              </a:lnSpc>
+              <a:spcBef>
+                <a:spcPts val="0"/>
+              </a:spcBef>
+              <a:spcAft>
+                <a:spcPts val="0"/>
+              </a:spcAft>
+              <a:buSzPts val="935"/>
+              <a:buNone/>
+            </a:pPr>
+            <a:r>
+              <a:rPr b="1" lang="en-GB" sz="1100">
+                <a:solidFill>
+                  <a:srgbClr val="202729"/>
+                </a:solidFill>
+                <a:latin typeface="Manrope"/>
+                <a:ea typeface="Manrope"/>
+                <a:cs typeface="Manrope"/>
+                <a:sym typeface="Manrope"/>
+              </a:rPr>
+              <a:t>Proposal Agent uses Claude via RAG to generate formal proposals.</a:t>
+            </a:r>
+            <a:endParaRPr b="1" sz="1700">
+              <a:solidFill>
+                <a:srgbClr val="202729"/>
+              </a:solidFill>
+              <a:latin typeface="Manrope"/>
+              <a:ea typeface="Manrope"/>
+              <a:cs typeface="Manrope"/>
+              <a:sym typeface="Manrope"/>
+            </a:endParaRPr>
+          </a:p>
+          <a:p>
+            <a:pPr indent="0" lvl="0" marL="0" rtl="0" algn="l">
+              <a:lnSpc>
+                <a:spcPct val="115000"/>
+              </a:lnSpc>
+              <a:spcBef>
+                <a:spcPts val="0"/>
+              </a:spcBef>
+              <a:spcAft>
+                <a:spcPts val="0"/>
+              </a:spcAft>
+              <a:buSzPts val="935"/>
+              <a:buNone/>
+            </a:pPr>
+            <a:r>
+              <a:rPr b="1" lang="en-GB" sz="1100">
+                <a:solidFill>
+                  <a:srgbClr val="202729"/>
+                </a:solidFill>
+                <a:latin typeface="Manrope"/>
+                <a:ea typeface="Manrope"/>
+                <a:cs typeface="Manrope"/>
+                <a:sym typeface="Manrope"/>
               </a:rPr>
               <a:t/>
             </a:r>
-            <a:endParaRPr sz="1600">
+            <a:endParaRPr b="1" sz="1700">
               <a:solidFill>
                 <a:srgbClr val="202729"/>
               </a:solidFill>
-              <a:latin typeface="Manrope SemiBold"/>
-              <a:ea typeface="Manrope SemiBold"/>
-              <a:cs typeface="Manrope SemiBold"/>
-              <a:sym typeface="Manrope SemiBold"/>
-            </a:endParaRPr>
-          </a:p>
-          <a:p>
-            <a:pPr indent="0" lvl="0" marL="0" rtl="0" algn="l">
-              <a:lnSpc>
-                <a:spcPct val="115000"/>
-              </a:lnSpc>
-              <a:spcBef>
-                <a:spcPts val="1200"/>
-              </a:spcBef>
-              <a:spcAft>
-                <a:spcPts val="1200"/>
-              </a:spcAft>
-              <a:buSzPts val="935"/>
-              <a:buNone/>
-            </a:pPr>
-            <a:r>
+              <a:latin typeface="Manrope"/>
+              <a:ea typeface="Manrope"/>
+              <a:cs typeface="Manrope"/>
+              <a:sym typeface="Manrope"/>
+            </a:endParaRPr>
+          </a:p>
+          <a:p>
+            <a:pPr indent="0" lvl="0" marL="0" rtl="0" algn="l">
+              <a:lnSpc>
+                <a:spcPct val="115000"/>
+              </a:lnSpc>
+              <a:spcBef>
+                <a:spcPts val="0"/>
+              </a:spcBef>
+              <a:spcAft>
+                <a:spcPts val="0"/>
+              </a:spcAft>
+              <a:buSzPts val="935"/>
+              <a:buNone/>
+            </a:pPr>
+            <a:r>
+              <a:rPr b="1" lang="en-GB" sz="1100">
+                <a:solidFill>
+                  <a:srgbClr val="202729"/>
+                </a:solidFill>
+                <a:latin typeface="Manrope"/>
+                <a:ea typeface="Manrope"/>
+                <a:cs typeface="Manrope"/>
+                <a:sym typeface="Manrope"/>
+              </a:rPr>
+              <a:t>How AWS services are used:</a:t>
+            </a:r>
+            <a:endParaRPr b="1" sz="1700">
+              <a:solidFill>
+                <a:srgbClr val="202729"/>
+              </a:solidFill>
+              <a:latin typeface="Manrope"/>
+              <a:ea typeface="Manrope"/>
+              <a:cs typeface="Manrope"/>
+              <a:sym typeface="Manrope"/>
+            </a:endParaRPr>
+          </a:p>
+          <a:p>
+            <a:pPr indent="0" lvl="0" marL="0" rtl="0" algn="l">
+              <a:lnSpc>
+                <a:spcPct val="115000"/>
+              </a:lnSpc>
+              <a:spcBef>
+                <a:spcPts val="0"/>
+              </a:spcBef>
+              <a:spcAft>
+                <a:spcPts val="0"/>
+              </a:spcAft>
+              <a:buSzPts val="935"/>
+              <a:buNone/>
+            </a:pPr>
+            <a:r>
+              <a:rPr b="1" lang="en-GB" sz="1100">
+                <a:solidFill>
+                  <a:srgbClr val="202729"/>
+                </a:solidFill>
+                <a:latin typeface="Manrope"/>
+                <a:ea typeface="Manrope"/>
+                <a:cs typeface="Manrope"/>
+                <a:sym typeface="Manrope"/>
+              </a:rPr>
               <a:t/>
             </a:r>
-            <a:endParaRPr sz="1600">
+            <a:endParaRPr b="1" sz="1700">
               <a:solidFill>
                 <a:srgbClr val="202729"/>
               </a:solidFill>
-              <a:latin typeface="Manrope SemiBold"/>
-              <a:ea typeface="Manrope SemiBold"/>
-              <a:cs typeface="Manrope SemiBold"/>
-              <a:sym typeface="Manrope SemiBold"/>
-            </a:endParaRPr>
-          </a:p>
-          <a:p>
-            <a:pPr indent="0" lvl="0" marL="0" rtl="0" algn="l">
-              <a:lnSpc>
-                <a:spcPct val="115000"/>
-              </a:lnSpc>
-              <a:spcBef>
-                <a:spcPts val="0"/>
-              </a:spcBef>
-              <a:spcAft>
-                <a:spcPts val="0"/>
-              </a:spcAft>
-              <a:buSzPts val="935"/>
-              <a:buNone/>
-            </a:pPr>
-            <a:r>
-              <a:rPr b="1" lang="en-GB" sz="1700">
-                <a:solidFill>
-                  <a:srgbClr val="202729"/>
-                </a:solidFill>
-                <a:latin typeface="Manrope"/>
-                <a:ea typeface="Manrope"/>
-                <a:cs typeface="Manrope"/>
-                <a:sym typeface="Manrope"/>
-              </a:rPr>
-              <a:t/>
+              <a:latin typeface="Manrope"/>
+              <a:ea typeface="Manrope"/>
+              <a:cs typeface="Manrope"/>
+              <a:sym typeface="Manrope"/>
+            </a:endParaRPr>
+          </a:p>
+          <a:p>
+            <a:pPr indent="0" lvl="0" marL="0" rtl="0" algn="l">
+              <a:lnSpc>
+                <a:spcPct val="115000"/>
+              </a:lnSpc>
+              <a:spcBef>
+                <a:spcPts val="0"/>
+              </a:spcBef>
+              <a:spcAft>
+                <a:spcPts val="0"/>
+              </a:spcAft>
+              <a:buSzPts val="935"/>
+              <a:buNone/>
+            </a:pPr>
+            <a:r>
+              <a:rPr b="1" lang="en-GB" sz="1100">
+                <a:solidFill>
+                  <a:srgbClr val="202729"/>
+                </a:solidFill>
+                <a:latin typeface="Manrope"/>
+                <a:ea typeface="Manrope"/>
+                <a:cs typeface="Manrope"/>
+                <a:sym typeface="Manrope"/>
+              </a:rPr>
+              <a:t>• Amazon Bedrock Agents — orchestrates 4 specialized sub-agents</a:t>
             </a:r>
             <a:endParaRPr b="1" sz="1700">
               <a:solidFill>
@@ -11227,16 +11566,16 @@
               <a:buNone/>
             </a:pPr>
             <a:r>
-              <a:rPr b="1" lang="en-GB" sz="1700">
-                <a:solidFill>
-                  <a:srgbClr val="202729"/>
-                </a:solidFill>
-                <a:latin typeface="Manrope"/>
-                <a:ea typeface="Manrope"/>
-                <a:cs typeface="Manrope"/>
-                <a:sym typeface="Manrope"/>
-              </a:rPr>
-              <a:t>This is not a CRUD app with a chatbot bolted on. Every core feature</a:t>
+              <a:rPr b="1" lang="en-GB" sz="1100">
+                <a:solidFill>
+                  <a:srgbClr val="202729"/>
+                </a:solidFill>
+                <a:latin typeface="Manrope"/>
+                <a:ea typeface="Manrope"/>
+                <a:cs typeface="Manrope"/>
+                <a:sym typeface="Manrope"/>
+              </a:rPr>
+              <a:t>  using the Supervisor Pattern (compliance, grants, proposals, impact)</a:t>
             </a:r>
             <a:endParaRPr b="1" sz="1700">
               <a:solidFill>
@@ -11263,16 +11602,16 @@
               <a:buNone/>
             </a:pPr>
             <a:r>
-              <a:rPr b="1" lang="en-GB" sz="1700">
-                <a:solidFill>
-                  <a:srgbClr val="202729"/>
-                </a:solidFill>
-                <a:latin typeface="Manrope"/>
-                <a:ea typeface="Manrope"/>
-                <a:cs typeface="Manrope"/>
-                <a:sym typeface="Manrope"/>
-              </a:rPr>
-              <a:t>is impossible without AI:</a:t>
+              <a:rPr b="1" lang="en-GB" sz="1100">
+                <a:solidFill>
+                  <a:srgbClr val="202729"/>
+                </a:solidFill>
+                <a:latin typeface="Manrope"/>
+                <a:ea typeface="Manrope"/>
+                <a:cs typeface="Manrope"/>
+                <a:sym typeface="Manrope"/>
+              </a:rPr>
+              <a:t>• Amazon Textract — OCR + document analysis on legal PDFs</a:t>
             </a:r>
             <a:endParaRPr b="1" sz="1700">
               <a:solidFill>
@@ -11299,16 +11638,16 @@
               <a:buNone/>
             </a:pPr>
             <a:r>
-              <a:rPr b="1" lang="en-GB" sz="1700">
-                <a:solidFill>
-                  <a:srgbClr val="202729"/>
-                </a:solidFill>
-                <a:latin typeface="Manrope"/>
-                <a:ea typeface="Manrope"/>
-                <a:cs typeface="Manrope"/>
-                <a:sym typeface="Manrope"/>
-              </a:rPr>
-              <a:t/>
+              <a:rPr b="1" lang="en-GB" sz="1100">
+                <a:solidFill>
+                  <a:srgbClr val="202729"/>
+                </a:solidFill>
+                <a:latin typeface="Manrope"/>
+                <a:ea typeface="Manrope"/>
+                <a:cs typeface="Manrope"/>
+                <a:sym typeface="Manrope"/>
+              </a:rPr>
+              <a:t>• Amazon Bedrock Knowledge Bases — 3 KBs backed by OpenSearch</a:t>
             </a:r>
             <a:endParaRPr b="1" sz="1700">
               <a:solidFill>
@@ -11335,16 +11674,16 @@
               <a:buNone/>
             </a:pPr>
             <a:r>
-              <a:rPr b="1" lang="en-GB" sz="1700">
-                <a:solidFill>
-                  <a:srgbClr val="202729"/>
-                </a:solidFill>
-                <a:latin typeface="Manrope"/>
-                <a:ea typeface="Manrope"/>
-                <a:cs typeface="Manrope"/>
-                <a:sym typeface="Manrope"/>
-              </a:rPr>
-              <a:t>&gt; Document Compliance: Government certificates (12A/80G) are unstructured</a:t>
+              <a:rPr b="1" lang="en-GB" sz="1100">
+                <a:solidFill>
+                  <a:srgbClr val="202729"/>
+                </a:solidFill>
+                <a:latin typeface="Manrope"/>
+                <a:ea typeface="Manrope"/>
+                <a:cs typeface="Manrope"/>
+                <a:sym typeface="Manrope"/>
+              </a:rPr>
+              <a:t>  Serverless storing CSR laws, corporate CSR filings, and proposals</a:t>
             </a:r>
             <a:endParaRPr b="1" sz="1700">
               <a:solidFill>
@@ -11371,16 +11710,16 @@
               <a:buNone/>
             </a:pPr>
             <a:r>
-              <a:rPr b="1" lang="en-GB" sz="1700">
-                <a:solidFill>
-                  <a:srgbClr val="202729"/>
-                </a:solidFill>
-                <a:latin typeface="Manrope"/>
-                <a:ea typeface="Manrope"/>
-                <a:cs typeface="Manrope"/>
-                <a:sym typeface="Manrope"/>
-              </a:rPr>
-              <a:t>  scanned PDFs with no standard API. Amazon Textract + a Bedrock Agent is</a:t>
+              <a:rPr b="1" lang="en-GB" sz="1100">
+                <a:solidFill>
+                  <a:srgbClr val="202729"/>
+                </a:solidFill>
+                <a:latin typeface="Manrope"/>
+                <a:ea typeface="Manrope"/>
+                <a:cs typeface="Manrope"/>
+                <a:sym typeface="Manrope"/>
+              </a:rPr>
+              <a:t>• AWS Lambda — 4 serverless functions for each agent action</a:t>
             </a:r>
             <a:endParaRPr b="1" sz="1700">
               <a:solidFill>
@@ -11407,592 +11746,16 @@
               <a:buNone/>
             </a:pPr>
             <a:r>
-              <a:rPr b="1" lang="en-GB" sz="1700">
-                <a:solidFill>
-                  <a:srgbClr val="202729"/>
-                </a:solidFill>
-                <a:latin typeface="Manrope"/>
-                <a:ea typeface="Manrope"/>
-                <a:cs typeface="Manrope"/>
-                <a:sym typeface="Manrope"/>
-              </a:rPr>
-              <a:t>  the only viable extraction pipeline for registration numbers and dates.</a:t>
-            </a:r>
-            <a:endParaRPr b="1" sz="1700">
-              <a:solidFill>
-                <a:srgbClr val="202729"/>
-              </a:solidFill>
-              <a:latin typeface="Manrope"/>
-              <a:ea typeface="Manrope"/>
-              <a:cs typeface="Manrope"/>
-              <a:sym typeface="Manrope"/>
-            </a:endParaRPr>
-          </a:p>
-          <a:p>
-            <a:pPr indent="0" lvl="0" marL="0" rtl="0" algn="l">
-              <a:lnSpc>
-                <a:spcPct val="115000"/>
-              </a:lnSpc>
-              <a:spcBef>
-                <a:spcPts val="0"/>
-              </a:spcBef>
-              <a:spcAft>
-                <a:spcPts val="0"/>
-              </a:spcAft>
-              <a:buSzPts val="935"/>
-              <a:buNone/>
-            </a:pPr>
-            <a:r>
-              <a:rPr b="1" lang="en-GB" sz="1700">
-                <a:solidFill>
-                  <a:srgbClr val="202729"/>
-                </a:solidFill>
-                <a:latin typeface="Manrope"/>
-                <a:ea typeface="Manrope"/>
-                <a:cs typeface="Manrope"/>
-                <a:sym typeface="Manrope"/>
-              </a:rPr>
-              <a:t/>
-            </a:r>
-            <a:endParaRPr b="1" sz="1700">
-              <a:solidFill>
-                <a:srgbClr val="202729"/>
-              </a:solidFill>
-              <a:latin typeface="Manrope"/>
-              <a:ea typeface="Manrope"/>
-              <a:cs typeface="Manrope"/>
-              <a:sym typeface="Manrope"/>
-            </a:endParaRPr>
-          </a:p>
-          <a:p>
-            <a:pPr indent="0" lvl="0" marL="0" rtl="0" algn="l">
-              <a:lnSpc>
-                <a:spcPct val="115000"/>
-              </a:lnSpc>
-              <a:spcBef>
-                <a:spcPts val="0"/>
-              </a:spcBef>
-              <a:spcAft>
-                <a:spcPts val="0"/>
-              </a:spcAft>
-              <a:buSzPts val="935"/>
-              <a:buNone/>
-            </a:pPr>
-            <a:r>
-              <a:rPr b="1" lang="en-GB" sz="1700">
-                <a:solidFill>
-                  <a:srgbClr val="202729"/>
-                </a:solidFill>
-                <a:latin typeface="Manrope"/>
-                <a:ea typeface="Manrope"/>
-                <a:cs typeface="Manrope"/>
-                <a:sym typeface="Manrope"/>
-              </a:rPr>
-              <a:t>&gt; Semantic Matching: A keyword search cannot map "village water well</a:t>
-            </a:r>
-            <a:endParaRPr b="1" sz="1700">
-              <a:solidFill>
-                <a:srgbClr val="202729"/>
-              </a:solidFill>
-              <a:latin typeface="Manrope"/>
-              <a:ea typeface="Manrope"/>
-              <a:cs typeface="Manrope"/>
-              <a:sym typeface="Manrope"/>
-            </a:endParaRPr>
-          </a:p>
-          <a:p>
-            <a:pPr indent="0" lvl="0" marL="0" rtl="0" algn="l">
-              <a:lnSpc>
-                <a:spcPct val="115000"/>
-              </a:lnSpc>
-              <a:spcBef>
-                <a:spcPts val="0"/>
-              </a:spcBef>
-              <a:spcAft>
-                <a:spcPts val="0"/>
-              </a:spcAft>
-              <a:buSzPts val="935"/>
-              <a:buNone/>
-            </a:pPr>
-            <a:r>
-              <a:rPr b="1" lang="en-GB" sz="1700">
-                <a:solidFill>
-                  <a:srgbClr val="202729"/>
-                </a:solidFill>
-                <a:latin typeface="Manrope"/>
-                <a:ea typeface="Manrope"/>
-                <a:cs typeface="Manrope"/>
-                <a:sym typeface="Manrope"/>
-              </a:rPr>
-              <a:t>  project" to "Schedule VII Rural Infrastructure Development." We need</a:t>
-            </a:r>
-            <a:endParaRPr b="1" sz="1700">
-              <a:solidFill>
-                <a:srgbClr val="202729"/>
-              </a:solidFill>
-              <a:latin typeface="Manrope"/>
-              <a:ea typeface="Manrope"/>
-              <a:cs typeface="Manrope"/>
-              <a:sym typeface="Manrope"/>
-            </a:endParaRPr>
-          </a:p>
-          <a:p>
-            <a:pPr indent="0" lvl="0" marL="0" rtl="0" algn="l">
-              <a:lnSpc>
-                <a:spcPct val="115000"/>
-              </a:lnSpc>
-              <a:spcBef>
-                <a:spcPts val="0"/>
-              </a:spcBef>
-              <a:spcAft>
-                <a:spcPts val="0"/>
-              </a:spcAft>
-              <a:buSzPts val="935"/>
-              <a:buNone/>
-            </a:pPr>
-            <a:r>
-              <a:rPr b="1" lang="en-GB" sz="1700">
-                <a:solidFill>
-                  <a:srgbClr val="202729"/>
-                </a:solidFill>
-                <a:latin typeface="Manrope"/>
-                <a:ea typeface="Manrope"/>
-                <a:cs typeface="Manrope"/>
-                <a:sym typeface="Manrope"/>
-              </a:rPr>
-              <a:t>  Titan Text Embeddings V2 + OpenSearch vector search for this.</a:t>
-            </a:r>
-            <a:endParaRPr b="1" sz="1700">
-              <a:solidFill>
-                <a:srgbClr val="202729"/>
-              </a:solidFill>
-              <a:latin typeface="Manrope"/>
-              <a:ea typeface="Manrope"/>
-              <a:cs typeface="Manrope"/>
-              <a:sym typeface="Manrope"/>
-            </a:endParaRPr>
-          </a:p>
-          <a:p>
-            <a:pPr indent="0" lvl="0" marL="0" rtl="0" algn="l">
-              <a:lnSpc>
-                <a:spcPct val="115000"/>
-              </a:lnSpc>
-              <a:spcBef>
-                <a:spcPts val="0"/>
-              </a:spcBef>
-              <a:spcAft>
-                <a:spcPts val="0"/>
-              </a:spcAft>
-              <a:buSzPts val="935"/>
-              <a:buNone/>
-            </a:pPr>
-            <a:r>
-              <a:rPr b="1" lang="en-GB" sz="1700">
-                <a:solidFill>
-                  <a:srgbClr val="202729"/>
-                </a:solidFill>
-                <a:latin typeface="Manrope"/>
-                <a:ea typeface="Manrope"/>
-                <a:cs typeface="Manrope"/>
-                <a:sym typeface="Manrope"/>
-              </a:rPr>
-              <a:t/>
-            </a:r>
-            <a:endParaRPr b="1" sz="1700">
-              <a:solidFill>
-                <a:srgbClr val="202729"/>
-              </a:solidFill>
-              <a:latin typeface="Manrope"/>
-              <a:ea typeface="Manrope"/>
-              <a:cs typeface="Manrope"/>
-              <a:sym typeface="Manrope"/>
-            </a:endParaRPr>
-          </a:p>
-          <a:p>
-            <a:pPr indent="0" lvl="0" marL="0" rtl="0" algn="l">
-              <a:lnSpc>
-                <a:spcPct val="115000"/>
-              </a:lnSpc>
-              <a:spcBef>
-                <a:spcPts val="0"/>
-              </a:spcBef>
-              <a:spcAft>
-                <a:spcPts val="0"/>
-              </a:spcAft>
-              <a:buSzPts val="935"/>
-              <a:buNone/>
-            </a:pPr>
-            <a:r>
-              <a:rPr b="1" lang="en-GB" sz="1700">
-                <a:solidFill>
-                  <a:srgbClr val="202729"/>
-                </a:solidFill>
-                <a:latin typeface="Manrope"/>
-                <a:ea typeface="Manrope"/>
-                <a:cs typeface="Manrope"/>
-                <a:sym typeface="Manrope"/>
-              </a:rPr>
-              <a:t>&gt; Proposal Generation: Grassroots NGOs cannot afford Rs.50,000 per grant</a:t>
-            </a:r>
-            <a:endParaRPr b="1" sz="1700">
-              <a:solidFill>
-                <a:srgbClr val="202729"/>
-              </a:solidFill>
-              <a:latin typeface="Manrope"/>
-              <a:ea typeface="Manrope"/>
-              <a:cs typeface="Manrope"/>
-              <a:sym typeface="Manrope"/>
-            </a:endParaRPr>
-          </a:p>
-          <a:p>
-            <a:pPr indent="0" lvl="0" marL="0" rtl="0" algn="l">
-              <a:lnSpc>
-                <a:spcPct val="115000"/>
-              </a:lnSpc>
-              <a:spcBef>
-                <a:spcPts val="0"/>
-              </a:spcBef>
-              <a:spcAft>
-                <a:spcPts val="0"/>
-              </a:spcAft>
-              <a:buSzPts val="935"/>
-              <a:buNone/>
-            </a:pPr>
-            <a:r>
-              <a:rPr b="1" lang="en-GB" sz="1700">
-                <a:solidFill>
-                  <a:srgbClr val="202729"/>
-                </a:solidFill>
-                <a:latin typeface="Manrope"/>
-                <a:ea typeface="Manrope"/>
-                <a:cs typeface="Manrope"/>
-                <a:sym typeface="Manrope"/>
-              </a:rPr>
-              <a:t>  writer. Claude 3.5 Sonnet via Bedrock acts as that writer — ingesting</a:t>
-            </a:r>
-            <a:endParaRPr b="1" sz="1700">
-              <a:solidFill>
-                <a:srgbClr val="202729"/>
-              </a:solidFill>
-              <a:latin typeface="Manrope"/>
-              <a:ea typeface="Manrope"/>
-              <a:cs typeface="Manrope"/>
-              <a:sym typeface="Manrope"/>
-            </a:endParaRPr>
-          </a:p>
-          <a:p>
-            <a:pPr indent="0" lvl="0" marL="0" rtl="0" algn="l">
-              <a:lnSpc>
-                <a:spcPct val="115000"/>
-              </a:lnSpc>
-              <a:spcBef>
-                <a:spcPts val="0"/>
-              </a:spcBef>
-              <a:spcAft>
-                <a:spcPts val="0"/>
-              </a:spcAft>
-              <a:buSzPts val="935"/>
-              <a:buNone/>
-            </a:pPr>
-            <a:r>
-              <a:rPr b="1" lang="en-GB" sz="1700">
-                <a:solidFill>
-                  <a:srgbClr val="202729"/>
-                </a:solidFill>
-                <a:latin typeface="Manrope"/>
-                <a:ea typeface="Manrope"/>
-                <a:cs typeface="Manrope"/>
-                <a:sym typeface="Manrope"/>
-              </a:rPr>
-              <a:t>  NGO context and corporate criteria via RAG to produce formal proposals.</a:t>
-            </a:r>
-            <a:endParaRPr b="1" sz="1700">
-              <a:solidFill>
-                <a:srgbClr val="202729"/>
-              </a:solidFill>
-              <a:latin typeface="Manrope"/>
-              <a:ea typeface="Manrope"/>
-              <a:cs typeface="Manrope"/>
-              <a:sym typeface="Manrope"/>
-            </a:endParaRPr>
-          </a:p>
-          <a:p>
-            <a:pPr indent="0" lvl="0" marL="0" rtl="0" algn="l">
-              <a:lnSpc>
-                <a:spcPct val="115000"/>
-              </a:lnSpc>
-              <a:spcBef>
-                <a:spcPts val="0"/>
-              </a:spcBef>
-              <a:spcAft>
-                <a:spcPts val="0"/>
-              </a:spcAft>
-              <a:buSzPts val="935"/>
-              <a:buNone/>
-            </a:pPr>
-            <a:r>
-              <a:rPr b="1" lang="en-GB" sz="1700">
-                <a:solidFill>
-                  <a:srgbClr val="202729"/>
-                </a:solidFill>
-                <a:latin typeface="Manrope"/>
-                <a:ea typeface="Manrope"/>
-                <a:cs typeface="Manrope"/>
-                <a:sym typeface="Manrope"/>
-              </a:rPr>
-              <a:t/>
-            </a:r>
-            <a:endParaRPr b="1" sz="1700">
-              <a:solidFill>
-                <a:srgbClr val="202729"/>
-              </a:solidFill>
-              <a:latin typeface="Manrope"/>
-              <a:ea typeface="Manrope"/>
-              <a:cs typeface="Manrope"/>
-              <a:sym typeface="Manrope"/>
-            </a:endParaRPr>
-          </a:p>
-          <a:p>
-            <a:pPr indent="0" lvl="0" marL="0" rtl="0" algn="l">
-              <a:lnSpc>
-                <a:spcPct val="115000"/>
-              </a:lnSpc>
-              <a:spcBef>
-                <a:spcPts val="0"/>
-              </a:spcBef>
-              <a:spcAft>
-                <a:spcPts val="0"/>
-              </a:spcAft>
-              <a:buSzPts val="935"/>
-              <a:buNone/>
-            </a:pPr>
-            <a:r>
-              <a:rPr b="1" lang="en-GB" sz="1700">
-                <a:solidFill>
-                  <a:srgbClr val="202729"/>
-                </a:solidFill>
-                <a:latin typeface="Manrope"/>
-                <a:ea typeface="Manrope"/>
-                <a:cs typeface="Manrope"/>
-                <a:sym typeface="Manrope"/>
-              </a:rPr>
-              <a:t>How AWS services are used:</a:t>
-            </a:r>
-            <a:endParaRPr b="1" sz="1700">
-              <a:solidFill>
-                <a:srgbClr val="202729"/>
-              </a:solidFill>
-              <a:latin typeface="Manrope"/>
-              <a:ea typeface="Manrope"/>
-              <a:cs typeface="Manrope"/>
-              <a:sym typeface="Manrope"/>
-            </a:endParaRPr>
-          </a:p>
-          <a:p>
-            <a:pPr indent="0" lvl="0" marL="0" rtl="0" algn="l">
-              <a:lnSpc>
-                <a:spcPct val="115000"/>
-              </a:lnSpc>
-              <a:spcBef>
-                <a:spcPts val="0"/>
-              </a:spcBef>
-              <a:spcAft>
-                <a:spcPts val="0"/>
-              </a:spcAft>
-              <a:buSzPts val="935"/>
-              <a:buNone/>
-            </a:pPr>
-            <a:r>
-              <a:rPr b="1" lang="en-GB" sz="1700">
-                <a:solidFill>
-                  <a:srgbClr val="202729"/>
-                </a:solidFill>
-                <a:latin typeface="Manrope"/>
-                <a:ea typeface="Manrope"/>
-                <a:cs typeface="Manrope"/>
-                <a:sym typeface="Manrope"/>
-              </a:rPr>
-              <a:t>  - Amazon Bedrock Agents (Supervisor Pattern) — orchestrates 4 sub-agents</a:t>
-            </a:r>
-            <a:endParaRPr b="1" sz="1700">
-              <a:solidFill>
-                <a:srgbClr val="202729"/>
-              </a:solidFill>
-              <a:latin typeface="Manrope"/>
-              <a:ea typeface="Manrope"/>
-              <a:cs typeface="Manrope"/>
-              <a:sym typeface="Manrope"/>
-            </a:endParaRPr>
-          </a:p>
-          <a:p>
-            <a:pPr indent="0" lvl="0" marL="0" rtl="0" algn="l">
-              <a:lnSpc>
-                <a:spcPct val="115000"/>
-              </a:lnSpc>
-              <a:spcBef>
-                <a:spcPts val="0"/>
-              </a:spcBef>
-              <a:spcAft>
-                <a:spcPts val="0"/>
-              </a:spcAft>
-              <a:buSzPts val="935"/>
-              <a:buNone/>
-            </a:pPr>
-            <a:r>
-              <a:rPr b="1" lang="en-GB" sz="1700">
-                <a:solidFill>
-                  <a:srgbClr val="202729"/>
-                </a:solidFill>
-                <a:latin typeface="Manrope"/>
-                <a:ea typeface="Manrope"/>
-                <a:cs typeface="Manrope"/>
-                <a:sym typeface="Manrope"/>
-              </a:rPr>
-              <a:t>  - Amazon Textract — OCR + document analysis on legal PDFs</a:t>
-            </a:r>
-            <a:endParaRPr b="1" sz="1700">
-              <a:solidFill>
-                <a:srgbClr val="202729"/>
-              </a:solidFill>
-              <a:latin typeface="Manrope"/>
-              <a:ea typeface="Manrope"/>
-              <a:cs typeface="Manrope"/>
-              <a:sym typeface="Manrope"/>
-            </a:endParaRPr>
-          </a:p>
-          <a:p>
-            <a:pPr indent="0" lvl="0" marL="0" rtl="0" algn="l">
-              <a:lnSpc>
-                <a:spcPct val="115000"/>
-              </a:lnSpc>
-              <a:spcBef>
-                <a:spcPts val="0"/>
-              </a:spcBef>
-              <a:spcAft>
-                <a:spcPts val="0"/>
-              </a:spcAft>
-              <a:buSzPts val="935"/>
-              <a:buNone/>
-            </a:pPr>
-            <a:r>
-              <a:rPr b="1" lang="en-GB" sz="1700">
-                <a:solidFill>
-                  <a:srgbClr val="202729"/>
-                </a:solidFill>
-                <a:latin typeface="Manrope"/>
-                <a:ea typeface="Manrope"/>
-                <a:cs typeface="Manrope"/>
-                <a:sym typeface="Manrope"/>
-              </a:rPr>
-              <a:t>  - Amazon OpenSearch Serverless — vector store for Knowledge Bases</a:t>
-            </a:r>
-            <a:endParaRPr b="1" sz="1700">
-              <a:solidFill>
-                <a:srgbClr val="202729"/>
-              </a:solidFill>
-              <a:latin typeface="Manrope"/>
-              <a:ea typeface="Manrope"/>
-              <a:cs typeface="Manrope"/>
-              <a:sym typeface="Manrope"/>
-            </a:endParaRPr>
-          </a:p>
-          <a:p>
-            <a:pPr indent="0" lvl="0" marL="0" rtl="0" algn="l">
-              <a:lnSpc>
-                <a:spcPct val="115000"/>
-              </a:lnSpc>
-              <a:spcBef>
-                <a:spcPts val="0"/>
-              </a:spcBef>
-              <a:spcAft>
-                <a:spcPts val="0"/>
-              </a:spcAft>
-              <a:buSzPts val="935"/>
-              <a:buNone/>
-            </a:pPr>
-            <a:r>
-              <a:rPr b="1" lang="en-GB" sz="1700">
-                <a:solidFill>
-                  <a:srgbClr val="202729"/>
-                </a:solidFill>
-                <a:latin typeface="Manrope"/>
-                <a:ea typeface="Manrope"/>
-                <a:cs typeface="Manrope"/>
-                <a:sym typeface="Manrope"/>
-              </a:rPr>
-              <a:t>  - AWS Lambda (x4) — serverless compute for each agent action</a:t>
-            </a:r>
-            <a:endParaRPr b="1" sz="1700">
-              <a:solidFill>
-                <a:srgbClr val="202729"/>
-              </a:solidFill>
-              <a:latin typeface="Manrope"/>
-              <a:ea typeface="Manrope"/>
-              <a:cs typeface="Manrope"/>
-              <a:sym typeface="Manrope"/>
-            </a:endParaRPr>
-          </a:p>
-          <a:p>
-            <a:pPr indent="0" lvl="0" marL="0" rtl="0" algn="l">
-              <a:lnSpc>
-                <a:spcPct val="115000"/>
-              </a:lnSpc>
-              <a:spcBef>
-                <a:spcPts val="0"/>
-              </a:spcBef>
-              <a:spcAft>
-                <a:spcPts val="0"/>
-              </a:spcAft>
-              <a:buSzPts val="935"/>
-              <a:buNone/>
-            </a:pPr>
-            <a:r>
-              <a:rPr b="1" lang="en-GB" sz="1700">
-                <a:solidFill>
-                  <a:srgbClr val="202729"/>
-                </a:solidFill>
-                <a:latin typeface="Manrope"/>
-                <a:ea typeface="Manrope"/>
-                <a:cs typeface="Manrope"/>
-                <a:sym typeface="Manrope"/>
-              </a:rPr>
-              <a:t>  - Amazon DynamoDB — state management across 4 tables</a:t>
-            </a:r>
-            <a:endParaRPr b="1" sz="1700">
-              <a:solidFill>
-                <a:srgbClr val="202729"/>
-              </a:solidFill>
-              <a:latin typeface="Manrope"/>
-              <a:ea typeface="Manrope"/>
-              <a:cs typeface="Manrope"/>
-              <a:sym typeface="Manrope"/>
-            </a:endParaRPr>
-          </a:p>
-          <a:p>
-            <a:pPr indent="0" lvl="0" marL="0" rtl="0" algn="l">
-              <a:lnSpc>
-                <a:spcPct val="115000"/>
-              </a:lnSpc>
-              <a:spcBef>
-                <a:spcPts val="0"/>
-              </a:spcBef>
-              <a:spcAft>
-                <a:spcPts val="0"/>
-              </a:spcAft>
-              <a:buSzPts val="935"/>
-              <a:buNone/>
-            </a:pPr>
-            <a:r>
-              <a:rPr b="1" lang="en-GB" sz="1700">
-                <a:solidFill>
-                  <a:srgbClr val="202729"/>
-                </a:solidFill>
-                <a:latin typeface="Manrope"/>
-                <a:ea typeface="Manrope"/>
-                <a:cs typeface="Manrope"/>
-                <a:sym typeface="Manrope"/>
-              </a:rPr>
-              <a:t>  - Amazon S3 (x5 buckets) — document storage and KB data sources</a:t>
+              <a:rPr b="1" lang="en-GB" sz="1100">
+                <a:solidFill>
+                  <a:srgbClr val="202729"/>
+                </a:solidFill>
+                <a:latin typeface="Manrope"/>
+                <a:ea typeface="Manrope"/>
+                <a:cs typeface="Manrope"/>
+                <a:sym typeface="Manrope"/>
+              </a:rPr>
+              <a:t>• Amazon S3 / DynamoDB — document storage and state management</a:t>
             </a:r>
             <a:endParaRPr b="1" sz="1700">
               <a:solidFill>
@@ -12097,16 +11860,16 @@
               <a:buNone/>
             </a:pPr>
             <a:r>
-              <a:rPr b="1" lang="en-GB" sz="1700">
-                <a:solidFill>
-                  <a:srgbClr val="202729"/>
-                </a:solidFill>
-                <a:latin typeface="Manrope"/>
-                <a:ea typeface="Manrope"/>
-                <a:cs typeface="Manrope"/>
-                <a:sym typeface="Manrope"/>
-              </a:rPr>
-              <a:t>Features:</a:t>
+              <a:rPr b="1" lang="en-GB" sz="1100">
+                <a:solidFill>
+                  <a:srgbClr val="202729"/>
+                </a:solidFill>
+                <a:latin typeface="Manrope"/>
+                <a:ea typeface="Manrope"/>
+                <a:cs typeface="Manrope"/>
+                <a:sym typeface="Manrope"/>
+              </a:rPr>
+              <a:t>Features of the Prototype:</a:t>
             </a:r>
             <a:endParaRPr b="1" sz="1700">
               <a:solidFill>
@@ -12124,18 +11887,18 @@
                 <a:spcPct val="115000"/>
               </a:lnSpc>
               <a:spcBef>
-                <a:spcPts val="1200"/>
-              </a:spcBef>
-              <a:spcAft>
-                <a:spcPts val="1200"/>
-              </a:spcAft>
-              <a:buSzPts val="935"/>
-              <a:buNone/>
-            </a:pPr>
-            <a:r>
-              <a:rPr lang="en-GB">
-                <a:solidFill>
-                  <a:srgbClr val="434343"/>
+                <a:spcPts val="0"/>
+              </a:spcBef>
+              <a:spcAft>
+                <a:spcPts val="0"/>
+              </a:spcAft>
+              <a:buSzPts val="935"/>
+              <a:buNone/>
+            </a:pPr>
+            <a:r>
+              <a:rPr b="1" lang="en-GB" sz="1100">
+                <a:solidFill>
+                  <a:srgbClr val="202729"/>
                 </a:solidFill>
                 <a:latin typeface="Manrope"/>
                 <a:ea typeface="Manrope"/>
@@ -12144,32 +11907,176 @@
               </a:rPr>
               <a:t/>
             </a:r>
-            <a:endParaRPr>
-              <a:solidFill>
-                <a:srgbClr val="434343"/>
-              </a:solidFill>
-              <a:latin typeface="Manrope"/>
-              <a:ea typeface="Manrope"/>
-              <a:cs typeface="Manrope"/>
-              <a:sym typeface="Manrope"/>
-            </a:endParaRPr>
-          </a:p>
-          <a:p>
-            <a:pPr indent="0" lvl="0" marL="0" rtl="0" algn="l">
-              <a:lnSpc>
-                <a:spcPct val="115000"/>
-              </a:lnSpc>
-              <a:spcBef>
-                <a:spcPts val="0"/>
-              </a:spcBef>
-              <a:spcAft>
-                <a:spcPts val="0"/>
-              </a:spcAft>
-              <a:buSzPts val="935"/>
-              <a:buNone/>
-            </a:pPr>
-            <a:r>
-              <a:rPr b="1" lang="en-GB" sz="1700">
+            <a:endParaRPr b="1" sz="1700">
+              <a:solidFill>
+                <a:srgbClr val="202729"/>
+              </a:solidFill>
+              <a:latin typeface="Manrope"/>
+              <a:ea typeface="Manrope"/>
+              <a:cs typeface="Manrope"/>
+              <a:sym typeface="Manrope"/>
+            </a:endParaRPr>
+          </a:p>
+          <a:p>
+            <a:pPr indent="0" lvl="0" marL="0" rtl="0" algn="l">
+              <a:lnSpc>
+                <a:spcPct val="115000"/>
+              </a:lnSpc>
+              <a:spcBef>
+                <a:spcPts val="0"/>
+              </a:spcBef>
+              <a:spcAft>
+                <a:spcPts val="0"/>
+              </a:spcAft>
+              <a:buSzPts val="935"/>
+              <a:buNone/>
+            </a:pPr>
+            <a:r>
+              <a:rPr b="1" lang="en-GB" sz="1100">
+                <a:solidFill>
+                  <a:srgbClr val="202729"/>
+                </a:solidFill>
+                <a:latin typeface="Manrope"/>
+                <a:ea typeface="Manrope"/>
+                <a:cs typeface="Manrope"/>
+                <a:sym typeface="Manrope"/>
+              </a:rPr>
+              <a:t>Core Platform:</a:t>
+            </a:r>
+            <a:endParaRPr b="1" sz="1700">
+              <a:solidFill>
+                <a:srgbClr val="202729"/>
+              </a:solidFill>
+              <a:latin typeface="Manrope"/>
+              <a:ea typeface="Manrope"/>
+              <a:cs typeface="Manrope"/>
+              <a:sym typeface="Manrope"/>
+            </a:endParaRPr>
+          </a:p>
+          <a:p>
+            <a:pPr indent="0" lvl="0" marL="0" rtl="0" algn="l">
+              <a:lnSpc>
+                <a:spcPct val="115000"/>
+              </a:lnSpc>
+              <a:spcBef>
+                <a:spcPts val="0"/>
+              </a:spcBef>
+              <a:spcAft>
+                <a:spcPts val="0"/>
+              </a:spcAft>
+              <a:buSzPts val="935"/>
+              <a:buNone/>
+            </a:pPr>
+            <a:r>
+              <a:rPr b="1" lang="en-GB" sz="1100">
+                <a:solidFill>
+                  <a:srgbClr val="202729"/>
+                </a:solidFill>
+                <a:latin typeface="Manrope"/>
+                <a:ea typeface="Manrope"/>
+                <a:cs typeface="Manrope"/>
+                <a:sym typeface="Manrope"/>
+              </a:rPr>
+              <a:t>• NGO profile management with sector and region tagging</a:t>
+            </a:r>
+            <a:endParaRPr b="1" sz="1700">
+              <a:solidFill>
+                <a:srgbClr val="202729"/>
+              </a:solidFill>
+              <a:latin typeface="Manrope"/>
+              <a:ea typeface="Manrope"/>
+              <a:cs typeface="Manrope"/>
+              <a:sym typeface="Manrope"/>
+            </a:endParaRPr>
+          </a:p>
+          <a:p>
+            <a:pPr indent="0" lvl="0" marL="0" rtl="0" algn="l">
+              <a:lnSpc>
+                <a:spcPct val="115000"/>
+              </a:lnSpc>
+              <a:spcBef>
+                <a:spcPts val="0"/>
+              </a:spcBef>
+              <a:spcAft>
+                <a:spcPts val="0"/>
+              </a:spcAft>
+              <a:buSzPts val="935"/>
+              <a:buNone/>
+            </a:pPr>
+            <a:r>
+              <a:rPr b="1" lang="en-GB" sz="1100">
+                <a:solidFill>
+                  <a:srgbClr val="202729"/>
+                </a:solidFill>
+                <a:latin typeface="Manrope"/>
+                <a:ea typeface="Manrope"/>
+                <a:cs typeface="Manrope"/>
+                <a:sym typeface="Manrope"/>
+              </a:rPr>
+              <a:t>• Drag-and-drop document upload with real-time progress bars</a:t>
+            </a:r>
+            <a:endParaRPr b="1" sz="1700">
+              <a:solidFill>
+                <a:srgbClr val="202729"/>
+              </a:solidFill>
+              <a:latin typeface="Manrope"/>
+              <a:ea typeface="Manrope"/>
+              <a:cs typeface="Manrope"/>
+              <a:sym typeface="Manrope"/>
+            </a:endParaRPr>
+          </a:p>
+          <a:p>
+            <a:pPr indent="0" lvl="0" marL="0" rtl="0" algn="l">
+              <a:lnSpc>
+                <a:spcPct val="115000"/>
+              </a:lnSpc>
+              <a:spcBef>
+                <a:spcPts val="0"/>
+              </a:spcBef>
+              <a:spcAft>
+                <a:spcPts val="0"/>
+              </a:spcAft>
+              <a:buSzPts val="935"/>
+              <a:buNone/>
+            </a:pPr>
+            <a:r>
+              <a:rPr b="1" lang="en-GB" sz="1100">
+                <a:solidFill>
+                  <a:srgbClr val="202729"/>
+                </a:solidFill>
+                <a:latin typeface="Manrope"/>
+                <a:ea typeface="Manrope"/>
+                <a:cs typeface="Manrope"/>
+                <a:sym typeface="Manrope"/>
+              </a:rPr>
+              <a:t>• Live compliance dashboard showing 12A / 80G / CSR-1 status</a:t>
+            </a:r>
+            <a:endParaRPr b="1" sz="1700">
+              <a:solidFill>
+                <a:srgbClr val="202729"/>
+              </a:solidFill>
+              <a:latin typeface="Manrope"/>
+              <a:ea typeface="Manrope"/>
+              <a:cs typeface="Manrope"/>
+              <a:sym typeface="Manrope"/>
+            </a:endParaRPr>
+          </a:p>
+          <a:p>
+            <a:pPr indent="0" lvl="0" marL="0" rtl="0" algn="l">
+              <a:lnSpc>
+                <a:spcPct val="115000"/>
+              </a:lnSpc>
+              <a:spcBef>
+                <a:spcPts val="0"/>
+              </a:spcBef>
+              <a:spcAft>
+                <a:spcPts val="0"/>
+              </a:spcAft>
+              <a:buSzPts val="935"/>
+              <a:buNone/>
+            </a:pPr>
+            <a:r>
+              <a:rPr b="1" lang="en-GB" sz="1100">
                 <a:solidFill>
                   <a:srgbClr val="202729"/>
                 </a:solidFill>
@@ -12205,16 +12112,16 @@
               <a:buNone/>
             </a:pPr>
             <a:r>
-              <a:rPr b="1" lang="en-GB" sz="1700">
-                <a:solidFill>
-                  <a:srgbClr val="202729"/>
-                </a:solidFill>
-                <a:latin typeface="Manrope"/>
-                <a:ea typeface="Manrope"/>
-                <a:cs typeface="Manrope"/>
-                <a:sym typeface="Manrope"/>
-              </a:rPr>
-              <a:t>Core Platform:</a:t>
+              <a:rPr b="1" lang="en-GB" sz="1100">
+                <a:solidFill>
+                  <a:srgbClr val="202729"/>
+                </a:solidFill>
+                <a:latin typeface="Manrope"/>
+                <a:ea typeface="Manrope"/>
+                <a:cs typeface="Manrope"/>
+                <a:sym typeface="Manrope"/>
+              </a:rPr>
+              <a:t>AI-Powered Agents (Amazon Bedrock Supervisor Pattern):</a:t>
             </a:r>
             <a:endParaRPr b="1" sz="1700">
               <a:solidFill>
@@ -12241,16 +12148,16 @@
               <a:buNone/>
             </a:pPr>
             <a:r>
-              <a:rPr b="1" lang="en-GB" sz="1700">
-                <a:solidFill>
-                  <a:srgbClr val="202729"/>
-                </a:solidFill>
-                <a:latin typeface="Manrope"/>
-                <a:ea typeface="Manrope"/>
-                <a:cs typeface="Manrope"/>
-                <a:sym typeface="Manrope"/>
-              </a:rPr>
-              <a:t>  - NGO Profile Management with sector and region tagging</a:t>
+              <a:rPr b="1" lang="en-GB" sz="1100">
+                <a:solidFill>
+                  <a:srgbClr val="202729"/>
+                </a:solidFill>
+                <a:latin typeface="Manrope"/>
+                <a:ea typeface="Manrope"/>
+                <a:cs typeface="Manrope"/>
+                <a:sym typeface="Manrope"/>
+              </a:rPr>
+              <a:t>• Compliance Agent — validates legal documents via Textract</a:t>
             </a:r>
             <a:endParaRPr b="1" sz="1700">
               <a:solidFill>
@@ -12277,16 +12184,16 @@
               <a:buNone/>
             </a:pPr>
             <a:r>
-              <a:rPr b="1" lang="en-GB" sz="1700">
-                <a:solidFill>
-                  <a:srgbClr val="202729"/>
-                </a:solidFill>
-                <a:latin typeface="Manrope"/>
-                <a:ea typeface="Manrope"/>
-                <a:cs typeface="Manrope"/>
-                <a:sym typeface="Manrope"/>
-              </a:rPr>
-              <a:t>  - Drag-and-drop document upload to S3 with real-time progress</a:t>
+              <a:rPr b="1" lang="en-GB" sz="1100">
+                <a:solidFill>
+                  <a:srgbClr val="202729"/>
+                </a:solidFill>
+                <a:latin typeface="Manrope"/>
+                <a:ea typeface="Manrope"/>
+                <a:cs typeface="Manrope"/>
+                <a:sym typeface="Manrope"/>
+              </a:rPr>
+              <a:t>• Grant Scout Agent — semantic matching across 5+ corporate</a:t>
             </a:r>
             <a:endParaRPr b="1" sz="1700">
               <a:solidFill>
@@ -12313,16 +12220,16 @@
               <a:buNone/>
             </a:pPr>
             <a:r>
-              <a:rPr b="1" lang="en-GB" sz="1700">
-                <a:solidFill>
-                  <a:srgbClr val="202729"/>
-                </a:solidFill>
-                <a:latin typeface="Manrope"/>
-                <a:ea typeface="Manrope"/>
-                <a:cs typeface="Manrope"/>
-                <a:sym typeface="Manrope"/>
-              </a:rPr>
-              <a:t>  - Real-time compliance dashboard (12A / 80G / CSR-1 status)</a:t>
+              <a:rPr b="1" lang="en-GB" sz="1100">
+                <a:solidFill>
+                  <a:srgbClr val="202729"/>
+                </a:solidFill>
+                <a:latin typeface="Manrope"/>
+                <a:ea typeface="Manrope"/>
+                <a:cs typeface="Manrope"/>
+                <a:sym typeface="Manrope"/>
+              </a:rPr>
+              <a:t>  CSR programs with relevance scores (e.g., 93% match)</a:t>
             </a:r>
             <a:endParaRPr b="1" sz="1700">
               <a:solidFill>
@@ -12349,7 +12256,151 @@
               <a:buNone/>
             </a:pPr>
             <a:r>
-              <a:rPr b="1" lang="en-GB" sz="1700">
+              <a:rPr b="1" lang="en-GB" sz="1100">
+                <a:solidFill>
+                  <a:srgbClr val="202729"/>
+                </a:solidFill>
+                <a:latin typeface="Manrope"/>
+                <a:ea typeface="Manrope"/>
+                <a:cs typeface="Manrope"/>
+                <a:sym typeface="Manrope"/>
+              </a:rPr>
+              <a:t>• Proposal Agent — generates formal proposals via RAG, with</a:t>
+            </a:r>
+            <a:endParaRPr b="1" sz="1700">
+              <a:solidFill>
+                <a:srgbClr val="202729"/>
+              </a:solidFill>
+              <a:latin typeface="Manrope"/>
+              <a:ea typeface="Manrope"/>
+              <a:cs typeface="Manrope"/>
+              <a:sym typeface="Manrope"/>
+            </a:endParaRPr>
+          </a:p>
+          <a:p>
+            <a:pPr indent="0" lvl="0" marL="0" rtl="0" algn="l">
+              <a:lnSpc>
+                <a:spcPct val="115000"/>
+              </a:lnSpc>
+              <a:spcBef>
+                <a:spcPts val="0"/>
+              </a:spcBef>
+              <a:spcAft>
+                <a:spcPts val="0"/>
+              </a:spcAft>
+              <a:buSzPts val="935"/>
+              <a:buNone/>
+            </a:pPr>
+            <a:r>
+              <a:rPr b="1" lang="en-GB" sz="1100">
+                <a:solidFill>
+                  <a:srgbClr val="202729"/>
+                </a:solidFill>
+                <a:latin typeface="Manrope"/>
+                <a:ea typeface="Manrope"/>
+                <a:cs typeface="Manrope"/>
+                <a:sym typeface="Manrope"/>
+              </a:rPr>
+              <a:t>  the text livestreamed to screen as the model writes</a:t>
+            </a:r>
+            <a:endParaRPr b="1" sz="1700">
+              <a:solidFill>
+                <a:srgbClr val="202729"/>
+              </a:solidFill>
+              <a:latin typeface="Manrope"/>
+              <a:ea typeface="Manrope"/>
+              <a:cs typeface="Manrope"/>
+              <a:sym typeface="Manrope"/>
+            </a:endParaRPr>
+          </a:p>
+          <a:p>
+            <a:pPr indent="0" lvl="0" marL="0" rtl="0" algn="l">
+              <a:lnSpc>
+                <a:spcPct val="115000"/>
+              </a:lnSpc>
+              <a:spcBef>
+                <a:spcPts val="0"/>
+              </a:spcBef>
+              <a:spcAft>
+                <a:spcPts val="0"/>
+              </a:spcAft>
+              <a:buSzPts val="935"/>
+              <a:buNone/>
+            </a:pPr>
+            <a:r>
+              <a:rPr b="1" lang="en-GB" sz="1100">
+                <a:solidFill>
+                  <a:srgbClr val="202729"/>
+                </a:solidFill>
+                <a:latin typeface="Manrope"/>
+                <a:ea typeface="Manrope"/>
+                <a:cs typeface="Manrope"/>
+                <a:sym typeface="Manrope"/>
+              </a:rPr>
+              <a:t>• Impact Agent — quarterly report generation with AI-computed</a:t>
+            </a:r>
+            <a:endParaRPr b="1" sz="1700">
+              <a:solidFill>
+                <a:srgbClr val="202729"/>
+              </a:solidFill>
+              <a:latin typeface="Manrope"/>
+              <a:ea typeface="Manrope"/>
+              <a:cs typeface="Manrope"/>
+              <a:sym typeface="Manrope"/>
+            </a:endParaRPr>
+          </a:p>
+          <a:p>
+            <a:pPr indent="0" lvl="0" marL="0" rtl="0" algn="l">
+              <a:lnSpc>
+                <a:spcPct val="115000"/>
+              </a:lnSpc>
+              <a:spcBef>
+                <a:spcPts val="0"/>
+              </a:spcBef>
+              <a:spcAft>
+                <a:spcPts val="0"/>
+              </a:spcAft>
+              <a:buSzPts val="935"/>
+              <a:buNone/>
+            </a:pPr>
+            <a:r>
+              <a:rPr b="1" lang="en-GB" sz="1100">
+                <a:solidFill>
+                  <a:srgbClr val="202729"/>
+                </a:solidFill>
+                <a:latin typeface="Manrope"/>
+                <a:ea typeface="Manrope"/>
+                <a:cs typeface="Manrope"/>
+                <a:sym typeface="Manrope"/>
+              </a:rPr>
+              <a:t>  metrics from user-provided impact data</a:t>
+            </a:r>
+            <a:endParaRPr b="1" sz="1700">
+              <a:solidFill>
+                <a:srgbClr val="202729"/>
+              </a:solidFill>
+              <a:latin typeface="Manrope"/>
+              <a:ea typeface="Manrope"/>
+              <a:cs typeface="Manrope"/>
+              <a:sym typeface="Manrope"/>
+            </a:endParaRPr>
+          </a:p>
+          <a:p>
+            <a:pPr indent="0" lvl="0" marL="0" rtl="0" algn="l">
+              <a:lnSpc>
+                <a:spcPct val="115000"/>
+              </a:lnSpc>
+              <a:spcBef>
+                <a:spcPts val="0"/>
+              </a:spcBef>
+              <a:spcAft>
+                <a:spcPts val="0"/>
+              </a:spcAft>
+              <a:buSzPts val="935"/>
+              <a:buNone/>
+            </a:pPr>
+            <a:r>
+              <a:rPr b="1" lang="en-GB" sz="1100">
                 <a:solidFill>
                   <a:srgbClr val="202729"/>
                 </a:solidFill>
@@ -12385,16 +12436,16 @@
               <a:buNone/>
             </a:pPr>
             <a:r>
-              <a:rPr b="1" lang="en-GB" sz="1700">
-                <a:solidFill>
-                  <a:srgbClr val="202729"/>
-                </a:solidFill>
-                <a:latin typeface="Manrope"/>
-                <a:ea typeface="Manrope"/>
-                <a:cs typeface="Manrope"/>
-                <a:sym typeface="Manrope"/>
-              </a:rPr>
-              <a:t>AI-Powered Agents (Amazon Bedrock Supervisor Pattern):</a:t>
+              <a:rPr b="1" lang="en-GB" sz="1100">
+                <a:solidFill>
+                  <a:srgbClr val="202729"/>
+                </a:solidFill>
+                <a:latin typeface="Manrope"/>
+                <a:ea typeface="Manrope"/>
+                <a:cs typeface="Manrope"/>
+                <a:sym typeface="Manrope"/>
+              </a:rPr>
+              <a:t>Additional Features:</a:t>
             </a:r>
             <a:endParaRPr b="1" sz="1700">
               <a:solidFill>
@@ -12421,16 +12472,16 @@
               <a:buNone/>
             </a:pPr>
             <a:r>
-              <a:rPr b="1" lang="en-GB" sz="1700">
-                <a:solidFill>
-                  <a:srgbClr val="202729"/>
-                </a:solidFill>
-                <a:latin typeface="Manrope"/>
-                <a:ea typeface="Manrope"/>
-                <a:cs typeface="Manrope"/>
-                <a:sym typeface="Manrope"/>
-              </a:rPr>
-              <a:t>  - Compliance Agent — Textract-powered legal document validation</a:t>
+              <a:rPr b="1" lang="en-GB" sz="1100">
+                <a:solidFill>
+                  <a:srgbClr val="202729"/>
+                </a:solidFill>
+                <a:latin typeface="Manrope"/>
+                <a:ea typeface="Manrope"/>
+                <a:cs typeface="Manrope"/>
+                <a:sym typeface="Manrope"/>
+              </a:rPr>
+              <a:t>• CSR Assistant chatbot backed by Indian CSR law Knowledge Base</a:t>
             </a:r>
             <a:endParaRPr b="1" sz="1700">
               <a:solidFill>
@@ -12457,16 +12508,16 @@
               <a:buNone/>
             </a:pPr>
             <a:r>
-              <a:rPr b="1" lang="en-GB" sz="1700">
-                <a:solidFill>
-                  <a:srgbClr val="202729"/>
-                </a:solidFill>
-                <a:latin typeface="Manrope"/>
-                <a:ea typeface="Manrope"/>
-                <a:cs typeface="Manrope"/>
-                <a:sym typeface="Manrope"/>
-              </a:rPr>
-              <a:t>  - Grant Scout Agent — semantic matching against 5+ corporate CSR funds</a:t>
+              <a:rPr b="1" lang="en-GB" sz="1100">
+                <a:solidFill>
+                  <a:srgbClr val="202729"/>
+                </a:solidFill>
+                <a:latin typeface="Manrope"/>
+                <a:ea typeface="Manrope"/>
+                <a:cs typeface="Manrope"/>
+                <a:sym typeface="Manrope"/>
+              </a:rPr>
+              <a:t>• Agent Trace panel shows multi-agent orchestration in real-time</a:t>
             </a:r>
             <a:endParaRPr b="1" sz="1700">
               <a:solidFill>
@@ -12493,16 +12544,16 @@
               <a:buNone/>
             </a:pPr>
             <a:r>
-              <a:rPr b="1" lang="en-GB" sz="1700">
-                <a:solidFill>
-                  <a:srgbClr val="202729"/>
-                </a:solidFill>
-                <a:latin typeface="Manrope"/>
-                <a:ea typeface="Manrope"/>
-                <a:cs typeface="Manrope"/>
-                <a:sym typeface="Manrope"/>
-              </a:rPr>
-              <a:t>  - Proposal Agent — RAG-based formal proposal generation (PDF export)</a:t>
+              <a:rPr b="1" lang="en-GB" sz="1100">
+                <a:solidFill>
+                  <a:srgbClr val="202729"/>
+                </a:solidFill>
+                <a:latin typeface="Manrope"/>
+                <a:ea typeface="Manrope"/>
+                <a:cs typeface="Manrope"/>
+                <a:sym typeface="Manrope"/>
+              </a:rPr>
+              <a:t>• Natural language command bar on the dashboard</a:t>
             </a:r>
             <a:endParaRPr b="1" sz="1700">
               <a:solidFill>
@@ -12529,412 +12580,16 @@
               <a:buNone/>
             </a:pPr>
             <a:r>
-              <a:rPr b="1" lang="en-GB" sz="1700">
-                <a:solidFill>
-                  <a:srgbClr val="202729"/>
-                </a:solidFill>
-                <a:latin typeface="Manrope"/>
-                <a:ea typeface="Manrope"/>
-                <a:cs typeface="Manrope"/>
-                <a:sym typeface="Manrope"/>
-              </a:rPr>
-              <a:t>  - Impact Agent — quarterly report generation with AI-computed metrics</a:t>
-            </a:r>
-            <a:endParaRPr b="1" sz="1700">
-              <a:solidFill>
-                <a:srgbClr val="202729"/>
-              </a:solidFill>
-              <a:latin typeface="Manrope"/>
-              <a:ea typeface="Manrope"/>
-              <a:cs typeface="Manrope"/>
-              <a:sym typeface="Manrope"/>
-            </a:endParaRPr>
-          </a:p>
-          <a:p>
-            <a:pPr indent="0" lvl="0" marL="0" rtl="0" algn="l">
-              <a:lnSpc>
-                <a:spcPct val="115000"/>
-              </a:lnSpc>
-              <a:spcBef>
-                <a:spcPts val="0"/>
-              </a:spcBef>
-              <a:spcAft>
-                <a:spcPts val="0"/>
-              </a:spcAft>
-              <a:buSzPts val="935"/>
-              <a:buNone/>
-            </a:pPr>
-            <a:r>
-              <a:rPr b="1" lang="en-GB" sz="1700">
-                <a:solidFill>
-                  <a:srgbClr val="202729"/>
-                </a:solidFill>
-                <a:latin typeface="Manrope"/>
-                <a:ea typeface="Manrope"/>
-                <a:cs typeface="Manrope"/>
-                <a:sym typeface="Manrope"/>
-              </a:rPr>
-              <a:t/>
-            </a:r>
-            <a:endParaRPr b="1" sz="1700">
-              <a:solidFill>
-                <a:srgbClr val="202729"/>
-              </a:solidFill>
-              <a:latin typeface="Manrope"/>
-              <a:ea typeface="Manrope"/>
-              <a:cs typeface="Manrope"/>
-              <a:sym typeface="Manrope"/>
-            </a:endParaRPr>
-          </a:p>
-          <a:p>
-            <a:pPr indent="0" lvl="0" marL="0" rtl="0" algn="l">
-              <a:lnSpc>
-                <a:spcPct val="115000"/>
-              </a:lnSpc>
-              <a:spcBef>
-                <a:spcPts val="0"/>
-              </a:spcBef>
-              <a:spcAft>
-                <a:spcPts val="0"/>
-              </a:spcAft>
-              <a:buSzPts val="935"/>
-              <a:buNone/>
-            </a:pPr>
-            <a:r>
-              <a:rPr b="1" lang="en-GB" sz="1700">
-                <a:solidFill>
-                  <a:srgbClr val="202729"/>
-                </a:solidFill>
-                <a:latin typeface="Manrope"/>
-                <a:ea typeface="Manrope"/>
-                <a:cs typeface="Manrope"/>
-                <a:sym typeface="Manrope"/>
-              </a:rPr>
-              <a:t>CSR Assistant Chatbot:</a:t>
-            </a:r>
-            <a:endParaRPr b="1" sz="1700">
-              <a:solidFill>
-                <a:srgbClr val="202729"/>
-              </a:solidFill>
-              <a:latin typeface="Manrope"/>
-              <a:ea typeface="Manrope"/>
-              <a:cs typeface="Manrope"/>
-              <a:sym typeface="Manrope"/>
-            </a:endParaRPr>
-          </a:p>
-          <a:p>
-            <a:pPr indent="0" lvl="0" marL="0" rtl="0" algn="l">
-              <a:lnSpc>
-                <a:spcPct val="115000"/>
-              </a:lnSpc>
-              <a:spcBef>
-                <a:spcPts val="0"/>
-              </a:spcBef>
-              <a:spcAft>
-                <a:spcPts val="0"/>
-              </a:spcAft>
-              <a:buSzPts val="935"/>
-              <a:buNone/>
-            </a:pPr>
-            <a:r>
-              <a:rPr b="1" lang="en-GB" sz="1700">
-                <a:solidFill>
-                  <a:srgbClr val="202729"/>
-                </a:solidFill>
-                <a:latin typeface="Manrope"/>
-                <a:ea typeface="Manrope"/>
-                <a:cs typeface="Manrope"/>
-                <a:sym typeface="Manrope"/>
-              </a:rPr>
-              <a:t>  - Backed by a synced Knowledge Base of Indian CSR laws</a:t>
-            </a:r>
-            <a:endParaRPr b="1" sz="1700">
-              <a:solidFill>
-                <a:srgbClr val="202729"/>
-              </a:solidFill>
-              <a:latin typeface="Manrope"/>
-              <a:ea typeface="Manrope"/>
-              <a:cs typeface="Manrope"/>
-              <a:sym typeface="Manrope"/>
-            </a:endParaRPr>
-          </a:p>
-          <a:p>
-            <a:pPr indent="0" lvl="0" marL="0" rtl="0" algn="l">
-              <a:lnSpc>
-                <a:spcPct val="115000"/>
-              </a:lnSpc>
-              <a:spcBef>
-                <a:spcPts val="0"/>
-              </a:spcBef>
-              <a:spcAft>
-                <a:spcPts val="0"/>
-              </a:spcAft>
-              <a:buSzPts val="935"/>
-              <a:buNone/>
-            </a:pPr>
-            <a:r>
-              <a:rPr b="1" lang="en-GB" sz="1700">
-                <a:solidFill>
-                  <a:srgbClr val="202729"/>
-                </a:solidFill>
-                <a:latin typeface="Manrope"/>
-                <a:ea typeface="Manrope"/>
-                <a:cs typeface="Manrope"/>
-                <a:sym typeface="Manrope"/>
-              </a:rPr>
-              <a:t>  - Answers questions about Section 135, Schedule VII, FCRA, 12A/80G</a:t>
-            </a:r>
-            <a:endParaRPr b="1" sz="1700">
-              <a:solidFill>
-                <a:srgbClr val="202729"/>
-              </a:solidFill>
-              <a:latin typeface="Manrope"/>
-              <a:ea typeface="Manrope"/>
-              <a:cs typeface="Manrope"/>
-              <a:sym typeface="Manrope"/>
-            </a:endParaRPr>
-          </a:p>
-          <a:p>
-            <a:pPr indent="0" lvl="0" marL="0" rtl="0" algn="l">
-              <a:lnSpc>
-                <a:spcPct val="115000"/>
-              </a:lnSpc>
-              <a:spcBef>
-                <a:spcPts val="0"/>
-              </a:spcBef>
-              <a:spcAft>
-                <a:spcPts val="0"/>
-              </a:spcAft>
-              <a:buSzPts val="935"/>
-              <a:buNone/>
-            </a:pPr>
-            <a:r>
-              <a:rPr b="1" lang="en-GB" sz="1700">
-                <a:solidFill>
-                  <a:srgbClr val="202729"/>
-                </a:solidFill>
-                <a:latin typeface="Manrope"/>
-                <a:ea typeface="Manrope"/>
-                <a:cs typeface="Manrope"/>
-                <a:sym typeface="Manrope"/>
-              </a:rPr>
-              <a:t>  - Pre-built suggested questions for ease of use</a:t>
-            </a:r>
-            <a:endParaRPr b="1" sz="1700">
-              <a:solidFill>
-                <a:srgbClr val="202729"/>
-              </a:solidFill>
-              <a:latin typeface="Manrope"/>
-              <a:ea typeface="Manrope"/>
-              <a:cs typeface="Manrope"/>
-              <a:sym typeface="Manrope"/>
-            </a:endParaRPr>
-          </a:p>
-          <a:p>
-            <a:pPr indent="0" lvl="0" marL="0" rtl="0" algn="l">
-              <a:lnSpc>
-                <a:spcPct val="115000"/>
-              </a:lnSpc>
-              <a:spcBef>
-                <a:spcPts val="0"/>
-              </a:spcBef>
-              <a:spcAft>
-                <a:spcPts val="0"/>
-              </a:spcAft>
-              <a:buSzPts val="935"/>
-              <a:buNone/>
-            </a:pPr>
-            <a:r>
-              <a:rPr b="1" lang="en-GB" sz="1700">
-                <a:solidFill>
-                  <a:srgbClr val="202729"/>
-                </a:solidFill>
-                <a:latin typeface="Manrope"/>
-                <a:ea typeface="Manrope"/>
-                <a:cs typeface="Manrope"/>
-                <a:sym typeface="Manrope"/>
-              </a:rPr>
-              <a:t/>
-            </a:r>
-            <a:endParaRPr b="1" sz="1700">
-              <a:solidFill>
-                <a:srgbClr val="202729"/>
-              </a:solidFill>
-              <a:latin typeface="Manrope"/>
-              <a:ea typeface="Manrope"/>
-              <a:cs typeface="Manrope"/>
-              <a:sym typeface="Manrope"/>
-            </a:endParaRPr>
-          </a:p>
-          <a:p>
-            <a:pPr indent="0" lvl="0" marL="0" rtl="0" algn="l">
-              <a:lnSpc>
-                <a:spcPct val="115000"/>
-              </a:lnSpc>
-              <a:spcBef>
-                <a:spcPts val="0"/>
-              </a:spcBef>
-              <a:spcAft>
-                <a:spcPts val="0"/>
-              </a:spcAft>
-              <a:buSzPts val="935"/>
-              <a:buNone/>
-            </a:pPr>
-            <a:r>
-              <a:rPr b="1" lang="en-GB" sz="1700">
-                <a:solidFill>
-                  <a:srgbClr val="202729"/>
-                </a:solidFill>
-                <a:latin typeface="Manrope"/>
-                <a:ea typeface="Manrope"/>
-                <a:cs typeface="Manrope"/>
-                <a:sym typeface="Manrope"/>
-              </a:rPr>
-              <a:t>Developer &amp; UX Features:</a:t>
-            </a:r>
-            <a:endParaRPr b="1" sz="1700">
-              <a:solidFill>
-                <a:srgbClr val="202729"/>
-              </a:solidFill>
-              <a:latin typeface="Manrope"/>
-              <a:ea typeface="Manrope"/>
-              <a:cs typeface="Manrope"/>
-              <a:sym typeface="Manrope"/>
-            </a:endParaRPr>
-          </a:p>
-          <a:p>
-            <a:pPr indent="0" lvl="0" marL="0" rtl="0" algn="l">
-              <a:lnSpc>
-                <a:spcPct val="115000"/>
-              </a:lnSpc>
-              <a:spcBef>
-                <a:spcPts val="0"/>
-              </a:spcBef>
-              <a:spcAft>
-                <a:spcPts val="0"/>
-              </a:spcAft>
-              <a:buSzPts val="935"/>
-              <a:buNone/>
-            </a:pPr>
-            <a:r>
-              <a:rPr b="1" lang="en-GB" sz="1700">
-                <a:solidFill>
-                  <a:srgbClr val="202729"/>
-                </a:solidFill>
-                <a:latin typeface="Manrope"/>
-                <a:ea typeface="Manrope"/>
-                <a:cs typeface="Manrope"/>
-                <a:sym typeface="Manrope"/>
-              </a:rPr>
-              <a:t>  - Agent Trace panel — shows the multi-agent orchestration in real-time</a:t>
-            </a:r>
-            <a:endParaRPr b="1" sz="1700">
-              <a:solidFill>
-                <a:srgbClr val="202729"/>
-              </a:solidFill>
-              <a:latin typeface="Manrope"/>
-              <a:ea typeface="Manrope"/>
-              <a:cs typeface="Manrope"/>
-              <a:sym typeface="Manrope"/>
-            </a:endParaRPr>
-          </a:p>
-          <a:p>
-            <a:pPr indent="0" lvl="0" marL="0" rtl="0" algn="l">
-              <a:lnSpc>
-                <a:spcPct val="115000"/>
-              </a:lnSpc>
-              <a:spcBef>
-                <a:spcPts val="0"/>
-              </a:spcBef>
-              <a:spcAft>
-                <a:spcPts val="0"/>
-              </a:spcAft>
-              <a:buSzPts val="935"/>
-              <a:buNone/>
-            </a:pPr>
-            <a:r>
-              <a:rPr b="1" lang="en-GB" sz="1700">
-                <a:solidFill>
-                  <a:srgbClr val="202729"/>
-                </a:solidFill>
-                <a:latin typeface="Manrope"/>
-                <a:ea typeface="Manrope"/>
-                <a:cs typeface="Manrope"/>
-                <a:sym typeface="Manrope"/>
-              </a:rPr>
-              <a:t>  - Natural language command bar on the dashboard</a:t>
-            </a:r>
-            <a:endParaRPr b="1" sz="1700">
-              <a:solidFill>
-                <a:srgbClr val="202729"/>
-              </a:solidFill>
-              <a:latin typeface="Manrope"/>
-              <a:ea typeface="Manrope"/>
-              <a:cs typeface="Manrope"/>
-              <a:sym typeface="Manrope"/>
-            </a:endParaRPr>
-          </a:p>
-          <a:p>
-            <a:pPr indent="0" lvl="0" marL="0" rtl="0" algn="l">
-              <a:lnSpc>
-                <a:spcPct val="115000"/>
-              </a:lnSpc>
-              <a:spcBef>
-                <a:spcPts val="0"/>
-              </a:spcBef>
-              <a:spcAft>
-                <a:spcPts val="0"/>
-              </a:spcAft>
-              <a:buSzPts val="935"/>
-              <a:buNone/>
-            </a:pPr>
-            <a:r>
-              <a:rPr b="1" lang="en-GB" sz="1700">
-                <a:solidFill>
-                  <a:srgbClr val="202729"/>
-                </a:solidFill>
-                <a:latin typeface="Manrope"/>
-                <a:ea typeface="Manrope"/>
-                <a:cs typeface="Manrope"/>
-                <a:sym typeface="Manrope"/>
-              </a:rPr>
-              <a:t>  - Dark/Light theme toggle</a:t>
-            </a:r>
-            <a:endParaRPr b="1" sz="1700">
-              <a:solidFill>
-                <a:srgbClr val="202729"/>
-              </a:solidFill>
-              <a:latin typeface="Manrope"/>
-              <a:ea typeface="Manrope"/>
-              <a:cs typeface="Manrope"/>
-              <a:sym typeface="Manrope"/>
-            </a:endParaRPr>
-          </a:p>
-          <a:p>
-            <a:pPr indent="0" lvl="0" marL="0" rtl="0" algn="l">
-              <a:lnSpc>
-                <a:spcPct val="115000"/>
-              </a:lnSpc>
-              <a:spcBef>
-                <a:spcPts val="0"/>
-              </a:spcBef>
-              <a:spcAft>
-                <a:spcPts val="0"/>
-              </a:spcAft>
-              <a:buSzPts val="935"/>
-              <a:buNone/>
-            </a:pPr>
-            <a:r>
-              <a:rPr b="1" lang="en-GB" sz="1700">
-                <a:solidFill>
-                  <a:srgbClr val="202729"/>
-                </a:solidFill>
-                <a:latin typeface="Manrope"/>
-                <a:ea typeface="Manrope"/>
-                <a:cs typeface="Manrope"/>
-                <a:sym typeface="Manrope"/>
-              </a:rPr>
-              <a:t>  - Fully responsive design (Next.js 16 + TailwindCSS)</a:t>
+              <a:rPr b="1" lang="en-GB" sz="1100">
+                <a:solidFill>
+                  <a:srgbClr val="202729"/>
+                </a:solidFill>
+                <a:latin typeface="Manrope"/>
+                <a:ea typeface="Manrope"/>
+                <a:cs typeface="Manrope"/>
+                <a:sym typeface="Manrope"/>
+              </a:rPr>
+              <a:t>• Dark/Light theme toggle • Responsive design</a:t>
             </a:r>
             <a:endParaRPr b="1" sz="1700">
               <a:solidFill>
@@ -13039,7 +12694,7 @@
               <a:buNone/>
             </a:pPr>
             <a:r>
-              <a:rPr b="1" lang="en-GB" sz="1700">
+              <a:rPr b="1" lang="en-GB" sz="1100">
                 <a:solidFill>
                   <a:srgbClr val="202729"/>
                 </a:solidFill>
@@ -13066,18 +12721,18 @@
                 <a:spcPct val="115000"/>
               </a:lnSpc>
               <a:spcBef>
-                <a:spcPts val="1200"/>
-              </a:spcBef>
-              <a:spcAft>
-                <a:spcPts val="1200"/>
-              </a:spcAft>
-              <a:buSzPts val="935"/>
-              <a:buNone/>
-            </a:pPr>
-            <a:r>
-              <a:rPr lang="en-GB">
-                <a:solidFill>
-                  <a:srgbClr val="434343"/>
+                <a:spcPts val="0"/>
+              </a:spcBef>
+              <a:spcAft>
+                <a:spcPts val="0"/>
+              </a:spcAft>
+              <a:buSzPts val="935"/>
+              <a:buNone/>
+            </a:pPr>
+            <a:r>
+              <a:rPr b="1" lang="en-GB" sz="1100">
+                <a:solidFill>
+                  <a:srgbClr val="202729"/>
                 </a:solidFill>
                 <a:latin typeface="Manrope"/>
                 <a:ea typeface="Manrope"/>
@@ -13086,32 +12741,68 @@
               </a:rPr>
               <a:t/>
             </a:r>
-            <a:endParaRPr>
-              <a:solidFill>
-                <a:srgbClr val="434343"/>
-              </a:solidFill>
-              <a:latin typeface="Manrope"/>
-              <a:ea typeface="Manrope"/>
-              <a:cs typeface="Manrope"/>
-              <a:sym typeface="Manrope"/>
-            </a:endParaRPr>
-          </a:p>
-          <a:p>
-            <a:pPr indent="0" lvl="0" marL="0" rtl="0" algn="l">
-              <a:lnSpc>
-                <a:spcPct val="115000"/>
-              </a:lnSpc>
-              <a:spcBef>
-                <a:spcPts val="0"/>
-              </a:spcBef>
-              <a:spcAft>
-                <a:spcPts val="0"/>
-              </a:spcAft>
-              <a:buSzPts val="935"/>
-              <a:buNone/>
-            </a:pPr>
-            <a:r>
-              <a:rPr b="1" lang="en-GB" sz="1700">
+            <a:endParaRPr b="1" sz="1700">
+              <a:solidFill>
+                <a:srgbClr val="202729"/>
+              </a:solidFill>
+              <a:latin typeface="Manrope"/>
+              <a:ea typeface="Manrope"/>
+              <a:cs typeface="Manrope"/>
+              <a:sym typeface="Manrope"/>
+            </a:endParaRPr>
+          </a:p>
+          <a:p>
+            <a:pPr indent="0" lvl="0" marL="0" rtl="0" algn="l">
+              <a:lnSpc>
+                <a:spcPct val="115000"/>
+              </a:lnSpc>
+              <a:spcBef>
+                <a:spcPts val="0"/>
+              </a:spcBef>
+              <a:spcAft>
+                <a:spcPts val="0"/>
+              </a:spcAft>
+              <a:buSzPts val="935"/>
+              <a:buNone/>
+            </a:pPr>
+            <a:r>
+              <a:rPr b="1" lang="en-GB" sz="1100">
+                <a:solidFill>
+                  <a:srgbClr val="202729"/>
+                </a:solidFill>
+                <a:latin typeface="Manrope"/>
+                <a:ea typeface="Manrope"/>
+                <a:cs typeface="Manrope"/>
+                <a:sym typeface="Manrope"/>
+              </a:rPr>
+              <a:t>1. NGO leader signs up and creates a profile (name, sector, region)</a:t>
+            </a:r>
+            <a:endParaRPr b="1" sz="1700">
+              <a:solidFill>
+                <a:srgbClr val="202729"/>
+              </a:solidFill>
+              <a:latin typeface="Manrope"/>
+              <a:ea typeface="Manrope"/>
+              <a:cs typeface="Manrope"/>
+              <a:sym typeface="Manrope"/>
+            </a:endParaRPr>
+          </a:p>
+          <a:p>
+            <a:pPr indent="0" lvl="0" marL="0" rtl="0" algn="l">
+              <a:lnSpc>
+                <a:spcPct val="115000"/>
+              </a:lnSpc>
+              <a:spcBef>
+                <a:spcPts val="0"/>
+              </a:spcBef>
+              <a:spcAft>
+                <a:spcPts val="0"/>
+              </a:spcAft>
+              <a:buSzPts val="935"/>
+              <a:buNone/>
+            </a:pPr>
+            <a:r>
+              <a:rPr b="1" lang="en-GB" sz="1100">
                 <a:solidFill>
                   <a:srgbClr val="202729"/>
                 </a:solidFill>
@@ -13147,16 +12838,16 @@
               <a:buNone/>
             </a:pPr>
             <a:r>
-              <a:rPr b="1" lang="en-GB" sz="1700">
-                <a:solidFill>
-                  <a:srgbClr val="202729"/>
-                </a:solidFill>
-                <a:latin typeface="Manrope"/>
-                <a:ea typeface="Manrope"/>
-                <a:cs typeface="Manrope"/>
-                <a:sym typeface="Manrope"/>
-              </a:rPr>
-              <a:t>1. NGO Leader signs up and creates a profile (name, sector, region)</a:t>
+              <a:rPr b="1" lang="en-GB" sz="1100">
+                <a:solidFill>
+                  <a:srgbClr val="202729"/>
+                </a:solidFill>
+                <a:latin typeface="Manrope"/>
+                <a:ea typeface="Manrope"/>
+                <a:cs typeface="Manrope"/>
+                <a:sym typeface="Manrope"/>
+              </a:rPr>
+              <a:t>2. Uploads legal documents (12A cert, 80G cert, CSR-1 form) via</a:t>
             </a:r>
             <a:endParaRPr b="1" sz="1700">
               <a:solidFill>
@@ -13183,7 +12874,43 @@
               <a:buNone/>
             </a:pPr>
             <a:r>
-              <a:rPr b="1" lang="en-GB" sz="1700">
+              <a:rPr b="1" lang="en-GB" sz="1100">
+                <a:solidFill>
+                  <a:srgbClr val="202729"/>
+                </a:solidFill>
+                <a:latin typeface="Manrope"/>
+                <a:ea typeface="Manrope"/>
+                <a:cs typeface="Manrope"/>
+                <a:sym typeface="Manrope"/>
+              </a:rPr>
+              <a:t>   drag-and-drop. Files are stored in S3.</a:t>
+            </a:r>
+            <a:endParaRPr b="1" sz="1700">
+              <a:solidFill>
+                <a:srgbClr val="202729"/>
+              </a:solidFill>
+              <a:latin typeface="Manrope"/>
+              <a:ea typeface="Manrope"/>
+              <a:cs typeface="Manrope"/>
+              <a:sym typeface="Manrope"/>
+            </a:endParaRPr>
+          </a:p>
+          <a:p>
+            <a:pPr indent="0" lvl="0" marL="0" rtl="0" algn="l">
+              <a:lnSpc>
+                <a:spcPct val="115000"/>
+              </a:lnSpc>
+              <a:spcBef>
+                <a:spcPts val="0"/>
+              </a:spcBef>
+              <a:spcAft>
+                <a:spcPts val="0"/>
+              </a:spcAft>
+              <a:buSzPts val="935"/>
+              <a:buNone/>
+            </a:pPr>
+            <a:r>
+              <a:rPr b="1" lang="en-GB" sz="1100">
                 <a:solidFill>
                   <a:srgbClr val="202729"/>
                 </a:solidFill>
@@ -13219,16 +12946,16 @@
               <a:buNone/>
             </a:pPr>
             <a:r>
-              <a:rPr b="1" lang="en-GB" sz="1700">
-                <a:solidFill>
-                  <a:srgbClr val="202729"/>
-                </a:solidFill>
-                <a:latin typeface="Manrope"/>
-                <a:ea typeface="Manrope"/>
-                <a:cs typeface="Manrope"/>
-                <a:sym typeface="Manrope"/>
-              </a:rPr>
-              <a:t>2. Uploads legal documents (12A cert, 80G cert, CSR-1 form) via</a:t>
+              <a:rPr b="1" lang="en-GB" sz="1100">
+                <a:solidFill>
+                  <a:srgbClr val="202729"/>
+                </a:solidFill>
+                <a:latin typeface="Manrope"/>
+                <a:ea typeface="Manrope"/>
+                <a:cs typeface="Manrope"/>
+                <a:sym typeface="Manrope"/>
+              </a:rPr>
+              <a:t>3. The Supervisor Agent orchestrates the Compliance Agent, which</a:t>
             </a:r>
             <a:endParaRPr b="1" sz="1700">
               <a:solidFill>
@@ -13255,16 +12982,16 @@
               <a:buNone/>
             </a:pPr>
             <a:r>
-              <a:rPr b="1" lang="en-GB" sz="1700">
-                <a:solidFill>
-                  <a:srgbClr val="202729"/>
-                </a:solidFill>
-                <a:latin typeface="Manrope"/>
-                <a:ea typeface="Manrope"/>
-                <a:cs typeface="Manrope"/>
-                <a:sym typeface="Manrope"/>
-              </a:rPr>
-              <a:t>   drag-and-drop. Files go directly to the nidhiai-documents S3 bucket.</a:t>
+              <a:rPr b="1" lang="en-GB" sz="1100">
+                <a:solidFill>
+                  <a:srgbClr val="202729"/>
+                </a:solidFill>
+                <a:latin typeface="Manrope"/>
+                <a:ea typeface="Manrope"/>
+                <a:cs typeface="Manrope"/>
+                <a:sym typeface="Manrope"/>
+              </a:rPr>
+              <a:t>   invokes Amazon Textract to read the PDFs. Results are validated</a:t>
             </a:r>
             <a:endParaRPr b="1" sz="1700">
               <a:solidFill>
@@ -13291,7 +13018,43 @@
               <a:buNone/>
             </a:pPr>
             <a:r>
-              <a:rPr b="1" lang="en-GB" sz="1700">
+              <a:rPr b="1" lang="en-GB" sz="1100">
+                <a:solidFill>
+                  <a:srgbClr val="202729"/>
+                </a:solidFill>
+                <a:latin typeface="Manrope"/>
+                <a:ea typeface="Manrope"/>
+                <a:cs typeface="Manrope"/>
+                <a:sym typeface="Manrope"/>
+              </a:rPr>
+              <a:t>   and stored, with compliance status shown on the dashboard.</a:t>
+            </a:r>
+            <a:endParaRPr b="1" sz="1700">
+              <a:solidFill>
+                <a:srgbClr val="202729"/>
+              </a:solidFill>
+              <a:latin typeface="Manrope"/>
+              <a:ea typeface="Manrope"/>
+              <a:cs typeface="Manrope"/>
+              <a:sym typeface="Manrope"/>
+            </a:endParaRPr>
+          </a:p>
+          <a:p>
+            <a:pPr indent="0" lvl="0" marL="0" rtl="0" algn="l">
+              <a:lnSpc>
+                <a:spcPct val="115000"/>
+              </a:lnSpc>
+              <a:spcBef>
+                <a:spcPts val="0"/>
+              </a:spcBef>
+              <a:spcAft>
+                <a:spcPts val="0"/>
+              </a:spcAft>
+              <a:buSzPts val="935"/>
+              <a:buNone/>
+            </a:pPr>
+            <a:r>
+              <a:rPr b="1" lang="en-GB" sz="1100">
                 <a:solidFill>
                   <a:srgbClr val="202729"/>
                 </a:solidFill>
@@ -13327,16 +13090,16 @@
               <a:buNone/>
             </a:pPr>
             <a:r>
-              <a:rPr b="1" lang="en-GB" sz="1700">
-                <a:solidFill>
-                  <a:srgbClr val="202729"/>
-                </a:solidFill>
-                <a:latin typeface="Manrope"/>
-                <a:ea typeface="Manrope"/>
-                <a:cs typeface="Manrope"/>
-                <a:sym typeface="Manrope"/>
-              </a:rPr>
-              <a:t>3. The Supervisor Agent (HB82HPMIA3) orchestrates the Compliance Agent</a:t>
+              <a:rPr b="1" lang="en-GB" sz="1100">
+                <a:solidFill>
+                  <a:srgbClr val="202729"/>
+                </a:solidFill>
+                <a:latin typeface="Manrope"/>
+                <a:ea typeface="Manrope"/>
+                <a:cs typeface="Manrope"/>
+                <a:sym typeface="Manrope"/>
+              </a:rPr>
+              <a:t>4. The Grant Scout Agent uses Titan Embeddings to query the</a:t>
             </a:r>
             <a:endParaRPr b="1" sz="1700">
               <a:solidFill>
@@ -13363,16 +13126,16 @@
               <a:buNone/>
             </a:pPr>
             <a:r>
-              <a:rPr b="1" lang="en-GB" sz="1700">
-                <a:solidFill>
-                  <a:srgbClr val="202729"/>
-                </a:solidFill>
-                <a:latin typeface="Manrope"/>
-                <a:ea typeface="Manrope"/>
-                <a:cs typeface="Manrope"/>
-                <a:sym typeface="Manrope"/>
-              </a:rPr>
-              <a:t>   (GFOH0VN84S), which calls the nidhiai-scan-documents Lambda. Amazon</a:t>
+              <a:rPr b="1" lang="en-GB" sz="1100">
+                <a:solidFill>
+                  <a:srgbClr val="202729"/>
+                </a:solidFill>
+                <a:latin typeface="Manrope"/>
+                <a:ea typeface="Manrope"/>
+                <a:cs typeface="Manrope"/>
+                <a:sym typeface="Manrope"/>
+              </a:rPr>
+              <a:t>   Knowledge Base and returns the top matching CSR opportunities</a:t>
             </a:r>
             <a:endParaRPr b="1" sz="1700">
               <a:solidFill>
@@ -13399,16 +13162,16 @@
               <a:buNone/>
             </a:pPr>
             <a:r>
-              <a:rPr b="1" lang="en-GB" sz="1700">
-                <a:solidFill>
-                  <a:srgbClr val="202729"/>
-                </a:solidFill>
-                <a:latin typeface="Manrope"/>
-                <a:ea typeface="Manrope"/>
-                <a:cs typeface="Manrope"/>
-                <a:sym typeface="Manrope"/>
-              </a:rPr>
-              <a:t>   Textract reads the PDFs. Results are stored in DynamoDB.</a:t>
+              <a:rPr b="1" lang="en-GB" sz="1100">
+                <a:solidFill>
+                  <a:srgbClr val="202729"/>
+                </a:solidFill>
+                <a:latin typeface="Manrope"/>
+                <a:ea typeface="Manrope"/>
+                <a:cs typeface="Manrope"/>
+                <a:sym typeface="Manrope"/>
+              </a:rPr>
+              <a:t>   ranked by relevance (e.g., Tata Steel 93%, Infosys 88%).</a:t>
             </a:r>
             <a:endParaRPr b="1" sz="1700">
               <a:solidFill>
@@ -13435,7 +13198,7 @@
               <a:buNone/>
             </a:pPr>
             <a:r>
-              <a:rPr b="1" lang="en-GB" sz="1700">
+              <a:rPr b="1" lang="en-GB" sz="1100">
                 <a:solidFill>
                   <a:srgbClr val="202729"/>
                 </a:solidFill>
@@ -13471,16 +13234,16 @@
               <a:buNone/>
             </a:pPr>
             <a:r>
-              <a:rPr b="1" lang="en-GB" sz="1700">
-                <a:solidFill>
-                  <a:srgbClr val="202729"/>
-                </a:solidFill>
-                <a:latin typeface="Manrope"/>
-                <a:ea typeface="Manrope"/>
-                <a:cs typeface="Manrope"/>
-                <a:sym typeface="Manrope"/>
-              </a:rPr>
-              <a:t>4. Once compliant, the Grant Scout Agent (KRPTCZMV4Z) calls the</a:t>
+              <a:rPr b="1" lang="en-GB" sz="1100">
+                <a:solidFill>
+                  <a:srgbClr val="202729"/>
+                </a:solidFill>
+                <a:latin typeface="Manrope"/>
+                <a:ea typeface="Manrope"/>
+                <a:cs typeface="Manrope"/>
+                <a:sym typeface="Manrope"/>
+              </a:rPr>
+              <a:t>5. NGO clicks "Draft Proposal" on any matched grant. The Proposal</a:t>
             </a:r>
             <a:endParaRPr b="1" sz="1700">
               <a:solidFill>
@@ -13507,16 +13270,16 @@
               <a:buNone/>
             </a:pPr>
             <a:r>
-              <a:rPr b="1" lang="en-GB" sz="1700">
-                <a:solidFill>
-                  <a:srgbClr val="202729"/>
-                </a:solidFill>
-                <a:latin typeface="Manrope"/>
-                <a:ea typeface="Manrope"/>
-                <a:cs typeface="Manrope"/>
-                <a:sym typeface="Manrope"/>
-              </a:rPr>
-              <a:t>   nidhiai-match-grants Lambda. Titan Embeddings V2 queries OpenSearch</a:t>
+              <a:rPr b="1" lang="en-GB" sz="1100">
+                <a:solidFill>
+                  <a:srgbClr val="202729"/>
+                </a:solidFill>
+                <a:latin typeface="Manrope"/>
+                <a:ea typeface="Manrope"/>
+                <a:cs typeface="Manrope"/>
+                <a:sym typeface="Manrope"/>
+              </a:rPr>
+              <a:t>   Agent generates a tailored grant application using RAG. The</a:t>
             </a:r>
             <a:endParaRPr b="1" sz="1700">
               <a:solidFill>
@@ -13543,16 +13306,16 @@
               <a:buNone/>
             </a:pPr>
             <a:r>
-              <a:rPr b="1" lang="en-GB" sz="1700">
-                <a:solidFill>
-                  <a:srgbClr val="202729"/>
-                </a:solidFill>
-                <a:latin typeface="Manrope"/>
-                <a:ea typeface="Manrope"/>
-                <a:cs typeface="Manrope"/>
-                <a:sym typeface="Manrope"/>
-              </a:rPr>
-              <a:t>   against the nidhiai-kb-csr-opportunities bucket. Top matches returned</a:t>
+              <a:rPr b="1" lang="en-GB" sz="1100">
+                <a:solidFill>
+                  <a:srgbClr val="202729"/>
+                </a:solidFill>
+                <a:latin typeface="Manrope"/>
+                <a:ea typeface="Manrope"/>
+                <a:cs typeface="Manrope"/>
+                <a:sym typeface="Manrope"/>
+              </a:rPr>
+              <a:t>   output is livestreamed to the screen as the model writes.</a:t>
             </a:r>
             <a:endParaRPr b="1" sz="1700">
               <a:solidFill>
@@ -13579,16 +13342,16 @@
               <a:buNone/>
             </a:pPr>
             <a:r>
-              <a:rPr b="1" lang="en-GB" sz="1700">
-                <a:solidFill>
-                  <a:srgbClr val="202729"/>
-                </a:solidFill>
-                <a:latin typeface="Manrope"/>
-                <a:ea typeface="Manrope"/>
-                <a:cs typeface="Manrope"/>
-                <a:sym typeface="Manrope"/>
-              </a:rPr>
-              <a:t>   with relevance scores (e.g., Tata Steel — 93%).</a:t>
+              <a:rPr b="1" lang="en-GB" sz="1100">
+                <a:solidFill>
+                  <a:srgbClr val="202729"/>
+                </a:solidFill>
+                <a:latin typeface="Manrope"/>
+                <a:ea typeface="Manrope"/>
+                <a:cs typeface="Manrope"/>
+                <a:sym typeface="Manrope"/>
+              </a:rPr>
+              <a:t/>
             </a:r>
             <a:endParaRPr b="1" sz="1700">
               <a:solidFill>
@@ -13615,7 +13378,79 @@
               <a:buNone/>
             </a:pPr>
             <a:r>
-              <a:rPr b="1" lang="en-GB" sz="1700">
+              <a:rPr b="1" lang="en-GB" sz="1100">
+                <a:solidFill>
+                  <a:srgbClr val="202729"/>
+                </a:solidFill>
+                <a:latin typeface="Manrope"/>
+                <a:ea typeface="Manrope"/>
+                <a:cs typeface="Manrope"/>
+                <a:sym typeface="Manrope"/>
+              </a:rPr>
+              <a:t>6. For regulatory questions, the Supervisor queries the CSR laws</a:t>
+            </a:r>
+            <a:endParaRPr b="1" sz="1700">
+              <a:solidFill>
+                <a:srgbClr val="202729"/>
+              </a:solidFill>
+              <a:latin typeface="Manrope"/>
+              <a:ea typeface="Manrope"/>
+              <a:cs typeface="Manrope"/>
+              <a:sym typeface="Manrope"/>
+            </a:endParaRPr>
+          </a:p>
+          <a:p>
+            <a:pPr indent="0" lvl="0" marL="0" rtl="0" algn="l">
+              <a:lnSpc>
+                <a:spcPct val="115000"/>
+              </a:lnSpc>
+              <a:spcBef>
+                <a:spcPts val="0"/>
+              </a:spcBef>
+              <a:spcAft>
+                <a:spcPts val="0"/>
+              </a:spcAft>
+              <a:buSzPts val="935"/>
+              <a:buNone/>
+            </a:pPr>
+            <a:r>
+              <a:rPr b="1" lang="en-GB" sz="1100">
+                <a:solidFill>
+                  <a:srgbClr val="202729"/>
+                </a:solidFill>
+                <a:latin typeface="Manrope"/>
+                <a:ea typeface="Manrope"/>
+                <a:cs typeface="Manrope"/>
+                <a:sym typeface="Manrope"/>
+              </a:rPr>
+              <a:t>   Knowledge Base directly and responds via the chatbot interface.</a:t>
+            </a:r>
+            <a:endParaRPr b="1" sz="1700">
+              <a:solidFill>
+                <a:srgbClr val="202729"/>
+              </a:solidFill>
+              <a:latin typeface="Manrope"/>
+              <a:ea typeface="Manrope"/>
+              <a:cs typeface="Manrope"/>
+              <a:sym typeface="Manrope"/>
+            </a:endParaRPr>
+          </a:p>
+          <a:p>
+            <a:pPr indent="0" lvl="0" marL="0" rtl="0" algn="l">
+              <a:lnSpc>
+                <a:spcPct val="115000"/>
+              </a:lnSpc>
+              <a:spcBef>
+                <a:spcPts val="0"/>
+              </a:spcBef>
+              <a:spcAft>
+                <a:spcPts val="0"/>
+              </a:spcAft>
+              <a:buSzPts val="935"/>
+              <a:buNone/>
+            </a:pPr>
+            <a:r>
+              <a:rPr b="1" lang="en-GB" sz="1100">
                 <a:solidFill>
                   <a:srgbClr val="202729"/>
                 </a:solidFill>
@@ -13651,16 +13486,16 @@
               <a:buNone/>
             </a:pPr>
             <a:r>
-              <a:rPr b="1" lang="en-GB" sz="1700">
-                <a:solidFill>
-                  <a:srgbClr val="202729"/>
-                </a:solidFill>
-                <a:latin typeface="Manrope"/>
-                <a:ea typeface="Manrope"/>
-                <a:cs typeface="Manrope"/>
-                <a:sym typeface="Manrope"/>
-              </a:rPr>
-              <a:t>5. NGO clicks "Draft Proposal." The Proposal Agent (23TIS55Z0P) calls</a:t>
+              <a:rPr b="1" lang="en-GB" sz="1100">
+                <a:solidFill>
+                  <a:srgbClr val="202729"/>
+                </a:solidFill>
+                <a:latin typeface="Manrope"/>
+                <a:ea typeface="Manrope"/>
+                <a:cs typeface="Manrope"/>
+                <a:sym typeface="Manrope"/>
+              </a:rPr>
+              <a:t>7. Impact Agent generates quarterly reports using user-supplied</a:t>
             </a:r>
             <a:endParaRPr b="1" sz="1700">
               <a:solidFill>
@@ -13687,160 +13522,16 @@
               <a:buNone/>
             </a:pPr>
             <a:r>
-              <a:rPr b="1" lang="en-GB" sz="1700">
-                <a:solidFill>
-                  <a:srgbClr val="202729"/>
-                </a:solidFill>
-                <a:latin typeface="Manrope"/>
-                <a:ea typeface="Manrope"/>
-                <a:cs typeface="Manrope"/>
-                <a:sym typeface="Manrope"/>
-              </a:rPr>
-              <a:t>   nidhiai-generate-pdf Lambda. Claude generates a full proposal via RAG;</a:t>
-            </a:r>
-            <a:endParaRPr b="1" sz="1700">
-              <a:solidFill>
-                <a:srgbClr val="202729"/>
-              </a:solidFill>
-              <a:latin typeface="Manrope"/>
-              <a:ea typeface="Manrope"/>
-              <a:cs typeface="Manrope"/>
-              <a:sym typeface="Manrope"/>
-            </a:endParaRPr>
-          </a:p>
-          <a:p>
-            <a:pPr indent="0" lvl="0" marL="0" rtl="0" algn="l">
-              <a:lnSpc>
-                <a:spcPct val="115000"/>
-              </a:lnSpc>
-              <a:spcBef>
-                <a:spcPts val="0"/>
-              </a:spcBef>
-              <a:spcAft>
-                <a:spcPts val="0"/>
-              </a:spcAft>
-              <a:buSzPts val="935"/>
-              <a:buNone/>
-            </a:pPr>
-            <a:r>
-              <a:rPr b="1" lang="en-GB" sz="1700">
-                <a:solidFill>
-                  <a:srgbClr val="202729"/>
-                </a:solidFill>
-                <a:latin typeface="Manrope"/>
-                <a:ea typeface="Manrope"/>
-                <a:cs typeface="Manrope"/>
-                <a:sym typeface="Manrope"/>
-              </a:rPr>
-              <a:t>   the PDF is saved to nidhiai-generated-pdfs bucket.</a:t>
-            </a:r>
-            <a:endParaRPr b="1" sz="1700">
-              <a:solidFill>
-                <a:srgbClr val="202729"/>
-              </a:solidFill>
-              <a:latin typeface="Manrope"/>
-              <a:ea typeface="Manrope"/>
-              <a:cs typeface="Manrope"/>
-              <a:sym typeface="Manrope"/>
-            </a:endParaRPr>
-          </a:p>
-          <a:p>
-            <a:pPr indent="0" lvl="0" marL="0" rtl="0" algn="l">
-              <a:lnSpc>
-                <a:spcPct val="115000"/>
-              </a:lnSpc>
-              <a:spcBef>
-                <a:spcPts val="0"/>
-              </a:spcBef>
-              <a:spcAft>
-                <a:spcPts val="0"/>
-              </a:spcAft>
-              <a:buSzPts val="935"/>
-              <a:buNone/>
-            </a:pPr>
-            <a:r>
-              <a:rPr b="1" lang="en-GB" sz="1700">
-                <a:solidFill>
-                  <a:srgbClr val="202729"/>
-                </a:solidFill>
-                <a:latin typeface="Manrope"/>
-                <a:ea typeface="Manrope"/>
-                <a:cs typeface="Manrope"/>
-                <a:sym typeface="Manrope"/>
-              </a:rPr>
-              <a:t/>
-            </a:r>
-            <a:endParaRPr b="1" sz="1700">
-              <a:solidFill>
-                <a:srgbClr val="202729"/>
-              </a:solidFill>
-              <a:latin typeface="Manrope"/>
-              <a:ea typeface="Manrope"/>
-              <a:cs typeface="Manrope"/>
-              <a:sym typeface="Manrope"/>
-            </a:endParaRPr>
-          </a:p>
-          <a:p>
-            <a:pPr indent="0" lvl="0" marL="0" rtl="0" algn="l">
-              <a:lnSpc>
-                <a:spcPct val="115000"/>
-              </a:lnSpc>
-              <a:spcBef>
-                <a:spcPts val="0"/>
-              </a:spcBef>
-              <a:spcAft>
-                <a:spcPts val="0"/>
-              </a:spcAft>
-              <a:buSzPts val="935"/>
-              <a:buNone/>
-            </a:pPr>
-            <a:r>
-              <a:rPr b="1" lang="en-GB" sz="1700">
-                <a:solidFill>
-                  <a:srgbClr val="202729"/>
-                </a:solidFill>
-                <a:latin typeface="Manrope"/>
-                <a:ea typeface="Manrope"/>
-                <a:cs typeface="Manrope"/>
-                <a:sym typeface="Manrope"/>
-              </a:rPr>
-              <a:t>6. For general CSR questions, the Supervisor directly queries the</a:t>
-            </a:r>
-            <a:endParaRPr b="1" sz="1700">
-              <a:solidFill>
-                <a:srgbClr val="202729"/>
-              </a:solidFill>
-              <a:latin typeface="Manrope"/>
-              <a:ea typeface="Manrope"/>
-              <a:cs typeface="Manrope"/>
-              <a:sym typeface="Manrope"/>
-            </a:endParaRPr>
-          </a:p>
-          <a:p>
-            <a:pPr indent="0" lvl="0" marL="0" rtl="0" algn="l">
-              <a:lnSpc>
-                <a:spcPct val="115000"/>
-              </a:lnSpc>
-              <a:spcBef>
-                <a:spcPts val="0"/>
-              </a:spcBef>
-              <a:spcAft>
-                <a:spcPts val="0"/>
-              </a:spcAft>
-              <a:buSzPts val="935"/>
-              <a:buNone/>
-            </a:pPr>
-            <a:r>
-              <a:rPr b="1" lang="en-GB" sz="1700">
-                <a:solidFill>
-                  <a:srgbClr val="202729"/>
-                </a:solidFill>
-                <a:latin typeface="Manrope"/>
-                <a:ea typeface="Manrope"/>
-                <a:cs typeface="Manrope"/>
-                <a:sym typeface="Manrope"/>
-              </a:rPr>
-              <a:t>   nidhiai-kb-csr-laws Knowledge Base (WUIYUPN7I2) and responds.</a:t>
+              <a:rPr b="1" lang="en-GB" sz="1100">
+                <a:solidFill>
+                  <a:srgbClr val="202729"/>
+                </a:solidFill>
+                <a:latin typeface="Manrope"/>
+                <a:ea typeface="Manrope"/>
+                <a:cs typeface="Manrope"/>
+                <a:sym typeface="Manrope"/>
+              </a:rPr>
+              <a:t>   data (beneficiaries served, funds utilized, programs completed).</a:t>
             </a:r>
             <a:endParaRPr b="1" sz="1700">
               <a:solidFill>
@@ -13945,16 +13636,16 @@
               <a:buNone/>
             </a:pPr>
             <a:r>
-              <a:rPr b="1" lang="en-GB" sz="1700">
-                <a:solidFill>
-                  <a:srgbClr val="202729"/>
-                </a:solidFill>
-                <a:latin typeface="Manrope"/>
-                <a:ea typeface="Manrope"/>
-                <a:cs typeface="Manrope"/>
-                <a:sym typeface="Manrope"/>
-              </a:rPr>
-              <a:t>Wireframes / Screenshots of the Working Prototype:</a:t>
+              <a:rPr b="1" lang="en-GB" sz="1400">
+                <a:solidFill>
+                  <a:srgbClr val="202729"/>
+                </a:solidFill>
+                <a:latin typeface="Manrope"/>
+                <a:ea typeface="Manrope"/>
+                <a:cs typeface="Manrope"/>
+                <a:sym typeface="Manrope"/>
+              </a:rPr>
+              <a:t>Screenshots from the working prototype:</a:t>
             </a:r>
             <a:endParaRPr>
               <a:solidFill>
@@ -13984,8 +13675,8 @@
         </p:blipFill>
         <p:spPr>
           <a:xfrm>
-            <a:off x="274320" y="1371600"/>
-            <a:ext cx="4114800" cy="2560320"/>
+            <a:off x="365760" y="1371600"/>
+            <a:ext cx="3840480" cy="2286000"/>
           </a:xfrm>
           <a:prstGeom prst="rect">
             <a:avLst/>
@@ -14008,8 +13699,56 @@
         </p:blipFill>
         <p:spPr>
           <a:xfrm>
-            <a:off x="4572000" y="1371600"/>
-            <a:ext cx="4114800" cy="2560320"/>
+            <a:off x="4480560" y="1371600"/>
+            <a:ext cx="3840480" cy="2286000"/>
+          </a:xfrm>
+          <a:prstGeom prst="rect">
+            <a:avLst/>
+          </a:prstGeom>
+        </p:spPr>
+      </p:pic>
+      <p:pic>
+        <p:nvPicPr>
+          <p:cNvPr id="90" name="Picture 89" descr="compliance_1772968882563.png"/>
+          <p:cNvPicPr>
+            <a:picLocks noChangeAspect="1"/>
+          </p:cNvPicPr>
+          <p:nvPr/>
+        </p:nvPicPr>
+        <p:blipFill>
+          <a:blip r:embed="rId6"/>
+          <a:stretch>
+            <a:fillRect/>
+          </a:stretch>
+        </p:blipFill>
+        <p:spPr>
+          <a:xfrm>
+            <a:off x="365760" y="3840480"/>
+            <a:ext cx="3840480" cy="1097280"/>
+          </a:xfrm>
+          <a:prstGeom prst="rect">
+            <a:avLst/>
+          </a:prstGeom>
+        </p:spPr>
+      </p:pic>
+      <p:pic>
+        <p:nvPicPr>
+          <p:cNvPr id="91" name="Picture 90" descr="chatbot_final_1772969216606.png"/>
+          <p:cNvPicPr>
+            <a:picLocks noChangeAspect="1"/>
+          </p:cNvPicPr>
+          <p:nvPr/>
+        </p:nvPicPr>
+        <p:blipFill>
+          <a:blip r:embed="rId7"/>
+          <a:stretch>
+            <a:fillRect/>
+          </a:stretch>
+        </p:blipFill>
+        <p:spPr>
+          <a:xfrm>
+            <a:off x="4480560" y="3840480"/>
+            <a:ext cx="3840480" cy="1097280"/>
           </a:xfrm>
           <a:prstGeom prst="rect">
             <a:avLst/>
@@ -14107,16 +13846,16 @@
               <a:buNone/>
             </a:pPr>
             <a:r>
-              <a:rPr b="1" lang="en-GB" sz="1700">
-                <a:solidFill>
-                  <a:srgbClr val="202729"/>
-                </a:solidFill>
-                <a:latin typeface="Manrope"/>
-                <a:ea typeface="Manrope"/>
-                <a:cs typeface="Manrope"/>
-                <a:sym typeface="Manrope"/>
-              </a:rPr>
-              <a:t>Architecture Diagram:</a:t>
+              <a:rPr b="1" lang="en-GB" sz="1000">
+                <a:solidFill>
+                  <a:srgbClr val="202729"/>
+                </a:solidFill>
+                <a:latin typeface="Manrope"/>
+                <a:ea typeface="Manrope"/>
+                <a:cs typeface="Manrope"/>
+                <a:sym typeface="Manrope"/>
+              </a:rPr>
+              <a:t>Architecture:</a:t>
             </a:r>
             <a:endParaRPr>
               <a:solidFill>
@@ -14143,7 +13882,7 @@
               <a:buNone/>
             </a:pPr>
             <a:r>
-              <a:rPr b="1" lang="en-GB" sz="1700">
+              <a:rPr b="1" lang="en-GB" sz="1000">
                 <a:solidFill>
                   <a:srgbClr val="202729"/>
                 </a:solidFill>
@@ -14179,16 +13918,16 @@
               <a:buNone/>
             </a:pPr>
             <a:r>
-              <a:rPr b="1" lang="en-GB" sz="1700">
-                <a:solidFill>
-                  <a:srgbClr val="202729"/>
-                </a:solidFill>
-                <a:latin typeface="Manrope"/>
-                <a:ea typeface="Manrope"/>
-                <a:cs typeface="Manrope"/>
-                <a:sym typeface="Manrope"/>
-              </a:rPr>
-              <a:t>                    [Next.js Frontend on Vercel]</a:t>
+              <a:rPr b="1" lang="en-GB" sz="1000">
+                <a:solidFill>
+                  <a:srgbClr val="202729"/>
+                </a:solidFill>
+                <a:latin typeface="Manrope"/>
+                <a:ea typeface="Manrope"/>
+                <a:cs typeface="Manrope"/>
+                <a:sym typeface="Manrope"/>
+              </a:rPr>
+              <a:t>                       [Next.js Frontend — Vercel]</a:t>
             </a:r>
             <a:endParaRPr>
               <a:solidFill>
@@ -14215,16 +13954,16 @@
               <a:buNone/>
             </a:pPr>
             <a:r>
-              <a:rPr b="1" lang="en-GB" sz="1700">
-                <a:solidFill>
-                  <a:srgbClr val="202729"/>
-                </a:solidFill>
-                <a:latin typeface="Manrope"/>
-                <a:ea typeface="Manrope"/>
-                <a:cs typeface="Manrope"/>
-                <a:sym typeface="Manrope"/>
-              </a:rPr>
-              <a:t>                              |</a:t>
+              <a:rPr b="1" lang="en-GB" sz="1000">
+                <a:solidFill>
+                  <a:srgbClr val="202729"/>
+                </a:solidFill>
+                <a:latin typeface="Manrope"/>
+                <a:ea typeface="Manrope"/>
+                <a:cs typeface="Manrope"/>
+                <a:sym typeface="Manrope"/>
+              </a:rPr>
+              <a:t>                                   |</a:t>
             </a:r>
             <a:endParaRPr>
               <a:solidFill>
@@ -14251,16 +13990,16 @@
               <a:buNone/>
             </a:pPr>
             <a:r>
-              <a:rPr b="1" lang="en-GB" sz="1700">
-                <a:solidFill>
-                  <a:srgbClr val="202729"/>
-                </a:solidFill>
-                <a:latin typeface="Manrope"/>
-                <a:ea typeface="Manrope"/>
-                <a:cs typeface="Manrope"/>
-                <a:sym typeface="Manrope"/>
-              </a:rPr>
-              <a:t>                    [AWS API Gateway REST]</a:t>
+              <a:rPr b="1" lang="en-GB" sz="1000">
+                <a:solidFill>
+                  <a:srgbClr val="202729"/>
+                </a:solidFill>
+                <a:latin typeface="Manrope"/>
+                <a:ea typeface="Manrope"/>
+                <a:cs typeface="Manrope"/>
+                <a:sym typeface="Manrope"/>
+              </a:rPr>
+              <a:t>                       [AWS API Gateway + Cognito]</a:t>
             </a:r>
             <a:endParaRPr>
               <a:solidFill>
@@ -14287,16 +14026,16 @@
               <a:buNone/>
             </a:pPr>
             <a:r>
-              <a:rPr b="1" lang="en-GB" sz="1700">
-                <a:solidFill>
-                  <a:srgbClr val="202729"/>
-                </a:solidFill>
-                <a:latin typeface="Manrope"/>
-                <a:ea typeface="Manrope"/>
-                <a:cs typeface="Manrope"/>
-                <a:sym typeface="Manrope"/>
-              </a:rPr>
-              <a:t>                              |</a:t>
+              <a:rPr b="1" lang="en-GB" sz="1000">
+                <a:solidFill>
+                  <a:srgbClr val="202729"/>
+                </a:solidFill>
+                <a:latin typeface="Manrope"/>
+                <a:ea typeface="Manrope"/>
+                <a:cs typeface="Manrope"/>
+                <a:sym typeface="Manrope"/>
+              </a:rPr>
+              <a:t>                                   |</a:t>
             </a:r>
             <a:endParaRPr>
               <a:solidFill>
@@ -14323,16 +14062,16 @@
               <a:buNone/>
             </a:pPr>
             <a:r>
-              <a:rPr b="1" lang="en-GB" sz="1700">
-                <a:solidFill>
-                  <a:srgbClr val="202729"/>
-                </a:solidFill>
-                <a:latin typeface="Manrope"/>
-                <a:ea typeface="Manrope"/>
-                <a:cs typeface="Manrope"/>
-                <a:sym typeface="Manrope"/>
-              </a:rPr>
-              <a:t>                 [nidhiai-gateway Lambda]</a:t>
+              <a:rPr b="1" lang="en-GB" sz="1000">
+                <a:solidFill>
+                  <a:srgbClr val="202729"/>
+                </a:solidFill>
+                <a:latin typeface="Manrope"/>
+                <a:ea typeface="Manrope"/>
+                <a:cs typeface="Manrope"/>
+                <a:sym typeface="Manrope"/>
+              </a:rPr>
+              <a:t>                    [Gateway Lambda — route handler]</a:t>
             </a:r>
             <a:endParaRPr>
               <a:solidFill>
@@ -14359,16 +14098,16 @@
               <a:buNone/>
             </a:pPr>
             <a:r>
-              <a:rPr b="1" lang="en-GB" sz="1700">
-                <a:solidFill>
-                  <a:srgbClr val="202729"/>
-                </a:solidFill>
-                <a:latin typeface="Manrope"/>
-                <a:ea typeface="Manrope"/>
-                <a:cs typeface="Manrope"/>
-                <a:sym typeface="Manrope"/>
-              </a:rPr>
-              <a:t>                              |</a:t>
+              <a:rPr b="1" lang="en-GB" sz="1000">
+                <a:solidFill>
+                  <a:srgbClr val="202729"/>
+                </a:solidFill>
+                <a:latin typeface="Manrope"/>
+                <a:ea typeface="Manrope"/>
+                <a:cs typeface="Manrope"/>
+                <a:sym typeface="Manrope"/>
+              </a:rPr>
+              <a:t>                                   |</a:t>
             </a:r>
             <a:endParaRPr>
               <a:solidFill>
@@ -14395,16 +14134,16 @@
               <a:buNone/>
             </a:pPr>
             <a:r>
-              <a:rPr b="1" lang="en-GB" sz="1700">
-                <a:solidFill>
-                  <a:srgbClr val="202729"/>
-                </a:solidFill>
-                <a:latin typeface="Manrope"/>
-                <a:ea typeface="Manrope"/>
-                <a:cs typeface="Manrope"/>
-                <a:sym typeface="Manrope"/>
-              </a:rPr>
-              <a:t>             +----------------+----------------+</a:t>
+              <a:rPr b="1" lang="en-GB" sz="1000">
+                <a:solidFill>
+                  <a:srgbClr val="202729"/>
+                </a:solidFill>
+                <a:latin typeface="Manrope"/>
+                <a:ea typeface="Manrope"/>
+                <a:cs typeface="Manrope"/>
+                <a:sym typeface="Manrope"/>
+              </a:rPr>
+              <a:t>              +--------------------+--------------------+</a:t>
             </a:r>
             <a:endParaRPr>
               <a:solidFill>
@@ -14431,16 +14170,16 @@
               <a:buNone/>
             </a:pPr>
             <a:r>
-              <a:rPr b="1" lang="en-GB" sz="1700">
-                <a:solidFill>
-                  <a:srgbClr val="202729"/>
-                </a:solidFill>
-                <a:latin typeface="Manrope"/>
-                <a:ea typeface="Manrope"/>
-                <a:cs typeface="Manrope"/>
-                <a:sym typeface="Manrope"/>
-              </a:rPr>
-              <a:t>             |                                 |</a:t>
+              <a:rPr b="1" lang="en-GB" sz="1000">
+                <a:solidFill>
+                  <a:srgbClr val="202729"/>
+                </a:solidFill>
+                <a:latin typeface="Manrope"/>
+                <a:ea typeface="Manrope"/>
+                <a:cs typeface="Manrope"/>
+                <a:sym typeface="Manrope"/>
+              </a:rPr>
+              <a:t>              |                                         |</a:t>
             </a:r>
             <a:endParaRPr>
               <a:solidFill>
@@ -14467,16 +14206,16 @@
               <a:buNone/>
             </a:pPr>
             <a:r>
-              <a:rPr b="1" lang="en-GB" sz="1700">
-                <a:solidFill>
-                  <a:srgbClr val="202729"/>
-                </a:solidFill>
-                <a:latin typeface="Manrope"/>
-                <a:ea typeface="Manrope"/>
-                <a:cs typeface="Manrope"/>
-                <a:sym typeface="Manrope"/>
-              </a:rPr>
-              <a:t>    [Amazon Bedrock Agents]          [Direct Lambda Calls]</a:t>
+              <a:rPr b="1" lang="en-GB" sz="1000">
+                <a:solidFill>
+                  <a:srgbClr val="202729"/>
+                </a:solidFill>
+                <a:latin typeface="Manrope"/>
+                <a:ea typeface="Manrope"/>
+                <a:cs typeface="Manrope"/>
+                <a:sym typeface="Manrope"/>
+              </a:rPr>
+              <a:t>    [Amazon Bedrock Agents]                 [Direct API calls]</a:t>
             </a:r>
             <a:endParaRPr>
               <a:solidFill>
@@ -14503,16 +14242,16 @@
               <a:buNone/>
             </a:pPr>
             <a:r>
-              <a:rPr b="1" lang="en-GB" sz="1700">
-                <a:solidFill>
-                  <a:srgbClr val="202729"/>
-                </a:solidFill>
-                <a:latin typeface="Manrope"/>
-                <a:ea typeface="Manrope"/>
-                <a:cs typeface="Manrope"/>
-                <a:sym typeface="Manrope"/>
-              </a:rPr>
-              <a:t>    Supervisor (HB82HPMIA3)          for S3 upload, DynamoDB</a:t>
+              <a:rPr b="1" lang="en-GB" sz="1000">
+                <a:solidFill>
+                  <a:srgbClr val="202729"/>
+                </a:solidFill>
+                <a:latin typeface="Manrope"/>
+                <a:ea typeface="Manrope"/>
+                <a:cs typeface="Manrope"/>
+                <a:sym typeface="Manrope"/>
+              </a:rPr>
+              <a:t>     Supervisor Agent                       (S3 upload, DynamoDB)</a:t>
             </a:r>
             <a:endParaRPr>
               <a:solidFill>
@@ -14539,16 +14278,16 @@
               <a:buNone/>
             </a:pPr>
             <a:r>
-              <a:rPr b="1" lang="en-GB" sz="1700">
-                <a:solidFill>
-                  <a:srgbClr val="202729"/>
-                </a:solidFill>
-                <a:latin typeface="Manrope"/>
-                <a:ea typeface="Manrope"/>
-                <a:cs typeface="Manrope"/>
-                <a:sym typeface="Manrope"/>
-              </a:rPr>
-              <a:t>             |                                 |</a:t>
+              <a:rPr b="1" lang="en-GB" sz="1000">
+                <a:solidFill>
+                  <a:srgbClr val="202729"/>
+                </a:solidFill>
+                <a:latin typeface="Manrope"/>
+                <a:ea typeface="Manrope"/>
+                <a:cs typeface="Manrope"/>
+                <a:sym typeface="Manrope"/>
+              </a:rPr>
+              <a:t>              |</a:t>
             </a:r>
             <a:endParaRPr>
               <a:solidFill>
@@ -14575,16 +14314,16 @@
               <a:buNone/>
             </a:pPr>
             <a:r>
-              <a:rPr b="1" lang="en-GB" sz="1700">
-                <a:solidFill>
-                  <a:srgbClr val="202729"/>
-                </a:solidFill>
-                <a:latin typeface="Manrope"/>
-                <a:ea typeface="Manrope"/>
-                <a:cs typeface="Manrope"/>
-                <a:sym typeface="Manrope"/>
-              </a:rPr>
-              <a:t>    +--------+--------+--------+     [Amazon S3 - 5 buckets]</a:t>
+              <a:rPr b="1" lang="en-GB" sz="1000">
+                <a:solidFill>
+                  <a:srgbClr val="202729"/>
+                </a:solidFill>
+                <a:latin typeface="Manrope"/>
+                <a:ea typeface="Manrope"/>
+                <a:cs typeface="Manrope"/>
+                <a:sym typeface="Manrope"/>
+              </a:rPr>
+              <a:t>    +---------+---------+---------+</a:t>
             </a:r>
             <a:endParaRPr>
               <a:solidFill>
@@ -14611,16 +14350,16 @@
               <a:buNone/>
             </a:pPr>
             <a:r>
-              <a:rPr b="1" lang="en-GB" sz="1700">
-                <a:solidFill>
-                  <a:srgbClr val="202729"/>
-                </a:solidFill>
-                <a:latin typeface="Manrope"/>
-                <a:ea typeface="Manrope"/>
-                <a:cs typeface="Manrope"/>
-                <a:sym typeface="Manrope"/>
-              </a:rPr>
-              <a:t>    |        |        |        |     [DynamoDB - 4 tables]</a:t>
+              <a:rPr b="1" lang="en-GB" sz="1000">
+                <a:solidFill>
+                  <a:srgbClr val="202729"/>
+                </a:solidFill>
+                <a:latin typeface="Manrope"/>
+                <a:ea typeface="Manrope"/>
+                <a:cs typeface="Manrope"/>
+                <a:sym typeface="Manrope"/>
+              </a:rPr>
+              <a:t>    |         |         |         |</a:t>
             </a:r>
             <a:endParaRPr>
               <a:solidFill>
@@ -14647,16 +14386,16 @@
               <a:buNone/>
             </a:pPr>
             <a:r>
-              <a:rPr b="1" lang="en-GB" sz="1700">
-                <a:solidFill>
-                  <a:srgbClr val="202729"/>
-                </a:solidFill>
-                <a:latin typeface="Manrope"/>
-                <a:ea typeface="Manrope"/>
-                <a:cs typeface="Manrope"/>
-                <a:sym typeface="Manrope"/>
-              </a:rPr>
-              <a:t>  Compliance Grant  Proposal Impact</a:t>
+              <a:rPr b="1" lang="en-GB" sz="1000">
+                <a:solidFill>
+                  <a:srgbClr val="202729"/>
+                </a:solidFill>
+                <a:latin typeface="Manrope"/>
+                <a:ea typeface="Manrope"/>
+                <a:cs typeface="Manrope"/>
+                <a:sym typeface="Manrope"/>
+              </a:rPr>
+              <a:t> Compliance  Grant    Proposal  Impact</a:t>
             </a:r>
             <a:endParaRPr>
               <a:solidFill>
@@ -14683,16 +14422,16 @@
               <a:buNone/>
             </a:pPr>
             <a:r>
-              <a:rPr b="1" lang="en-GB" sz="1700">
-                <a:solidFill>
-                  <a:srgbClr val="202729"/>
-                </a:solidFill>
-                <a:latin typeface="Manrope"/>
-                <a:ea typeface="Manrope"/>
-                <a:cs typeface="Manrope"/>
-                <a:sym typeface="Manrope"/>
-              </a:rPr>
-              <a:t>  (GFOH0VN) Scout   (23TIS5) (PHLYZ)</a:t>
+              <a:rPr b="1" lang="en-GB" sz="1000">
+                <a:solidFill>
+                  <a:srgbClr val="202729"/>
+                </a:solidFill>
+                <a:latin typeface="Manrope"/>
+                <a:ea typeface="Manrope"/>
+                <a:cs typeface="Manrope"/>
+                <a:sym typeface="Manrope"/>
+              </a:rPr>
+              <a:t>  Agent     Scout     Agent     Agent</a:t>
             </a:r>
             <a:endParaRPr>
               <a:solidFill>
@@ -14719,16 +14458,16 @@
               <a:buNone/>
             </a:pPr>
             <a:r>
-              <a:rPr b="1" lang="en-GB" sz="1700">
-                <a:solidFill>
-                  <a:srgbClr val="202729"/>
-                </a:solidFill>
-                <a:latin typeface="Manrope"/>
-                <a:ea typeface="Manrope"/>
-                <a:cs typeface="Manrope"/>
-                <a:sym typeface="Manrope"/>
-              </a:rPr>
-              <a:t>            (KRPTCZ)</a:t>
+              <a:rPr b="1" lang="en-GB" sz="1000">
+                <a:solidFill>
+                  <a:srgbClr val="202729"/>
+                </a:solidFill>
+                <a:latin typeface="Manrope"/>
+                <a:ea typeface="Manrope"/>
+                <a:cs typeface="Manrope"/>
+                <a:sym typeface="Manrope"/>
+              </a:rPr>
+              <a:t>    |         |         |</a:t>
             </a:r>
             <a:endParaRPr>
               <a:solidFill>
@@ -14755,16 +14494,16 @@
               <a:buNone/>
             </a:pPr>
             <a:r>
-              <a:rPr b="1" lang="en-GB" sz="1700">
-                <a:solidFill>
-                  <a:srgbClr val="202729"/>
-                </a:solidFill>
-                <a:latin typeface="Manrope"/>
-                <a:ea typeface="Manrope"/>
-                <a:cs typeface="Manrope"/>
-                <a:sym typeface="Manrope"/>
-              </a:rPr>
-              <a:t>    |        |        |</a:t>
+              <a:rPr b="1" lang="en-GB" sz="1000">
+                <a:solidFill>
+                  <a:srgbClr val="202729"/>
+                </a:solidFill>
+                <a:latin typeface="Manrope"/>
+                <a:ea typeface="Manrope"/>
+                <a:cs typeface="Manrope"/>
+                <a:sym typeface="Manrope"/>
+              </a:rPr>
+              <a:t> Textract  OpenSearch  Claude/Nova</a:t>
             </a:r>
             <a:endParaRPr>
               <a:solidFill>
@@ -14791,16 +14530,16 @@
               <a:buNone/>
             </a:pPr>
             <a:r>
-              <a:rPr b="1" lang="en-GB" sz="1700">
-                <a:solidFill>
-                  <a:srgbClr val="202729"/>
-                </a:solidFill>
-                <a:latin typeface="Manrope"/>
-                <a:ea typeface="Manrope"/>
-                <a:cs typeface="Manrope"/>
-                <a:sym typeface="Manrope"/>
-              </a:rPr>
-              <a:t>  Textract  OpenSearch  Claude/Nova</a:t>
+              <a:rPr b="1" lang="en-GB" sz="1000">
+                <a:solidFill>
+                  <a:srgbClr val="202729"/>
+                </a:solidFill>
+                <a:latin typeface="Manrope"/>
+                <a:ea typeface="Manrope"/>
+                <a:cs typeface="Manrope"/>
+                <a:sym typeface="Manrope"/>
+              </a:rPr>
+              <a:t>           Serverless  via Bedrock</a:t>
             </a:r>
             <a:endParaRPr>
               <a:solidFill>
@@ -14827,16 +14566,16 @@
               <a:buNone/>
             </a:pPr>
             <a:r>
-              <a:rPr b="1" lang="en-GB" sz="1700">
-                <a:solidFill>
-                  <a:srgbClr val="202729"/>
-                </a:solidFill>
-                <a:latin typeface="Manrope"/>
-                <a:ea typeface="Manrope"/>
-                <a:cs typeface="Manrope"/>
-                <a:sym typeface="Manrope"/>
-              </a:rPr>
-              <a:t>            Serverless  via Bedrock</a:t>
+              <a:rPr b="1" lang="en-GB" sz="1000">
+                <a:solidFill>
+                  <a:srgbClr val="202729"/>
+                </a:solidFill>
+                <a:latin typeface="Manrope"/>
+                <a:ea typeface="Manrope"/>
+                <a:cs typeface="Manrope"/>
+                <a:sym typeface="Manrope"/>
+              </a:rPr>
+              <a:t>           (3 KBs)</a:t>
             </a:r>
             <a:endParaRPr>
               <a:solidFill>
@@ -14863,16 +14602,16 @@
               <a:buNone/>
             </a:pPr>
             <a:r>
-              <a:rPr b="1" lang="en-GB" sz="1700">
-                <a:solidFill>
-                  <a:srgbClr val="202729"/>
-                </a:solidFill>
-                <a:latin typeface="Manrope"/>
-                <a:ea typeface="Manrope"/>
-                <a:cs typeface="Manrope"/>
-                <a:sym typeface="Manrope"/>
-              </a:rPr>
-              <a:t>            (3 KBs)</a:t>
+              <a:rPr b="1" lang="en-GB" sz="1000">
+                <a:solidFill>
+                  <a:srgbClr val="202729"/>
+                </a:solidFill>
+                <a:latin typeface="Manrope"/>
+                <a:ea typeface="Manrope"/>
+                <a:cs typeface="Manrope"/>
+                <a:sym typeface="Manrope"/>
+              </a:rPr>
+              <a:t/>
             </a:r>
             <a:endParaRPr>
               <a:solidFill>
@@ -14899,16 +14638,16 @@
               <a:buNone/>
             </a:pPr>
             <a:r>
-              <a:rPr b="1" lang="en-GB" sz="1700">
-                <a:solidFill>
-                  <a:srgbClr val="202729"/>
-                </a:solidFill>
-                <a:latin typeface="Manrope"/>
-                <a:ea typeface="Manrope"/>
-                <a:cs typeface="Manrope"/>
-                <a:sym typeface="Manrope"/>
-              </a:rPr>
-              <a:t/>
+              <a:rPr b="1" lang="en-GB" sz="1000">
+                <a:solidFill>
+                  <a:srgbClr val="202729"/>
+                </a:solidFill>
+                <a:latin typeface="Manrope"/>
+                <a:ea typeface="Manrope"/>
+                <a:cs typeface="Manrope"/>
+                <a:sym typeface="Manrope"/>
+              </a:rPr>
+              <a:t>Storage: Amazon S3 (5 buckets) + DynamoDB (4 tables)</a:t>
             </a:r>
             <a:endParaRPr>
               <a:solidFill>
@@ -14935,16 +14674,16 @@
               <a:buNone/>
             </a:pPr>
             <a:r>
-              <a:rPr b="1" lang="en-GB" sz="1700">
-                <a:solidFill>
-                  <a:srgbClr val="202729"/>
-                </a:solidFill>
-                <a:latin typeface="Manrope"/>
-                <a:ea typeface="Manrope"/>
-                <a:cs typeface="Manrope"/>
-                <a:sym typeface="Manrope"/>
-              </a:rPr>
-              <a:t>All compute is serverless. Zero always-on servers.</a:t>
+              <a:rPr b="1" lang="en-GB" sz="1000">
+                <a:solidFill>
+                  <a:srgbClr val="202729"/>
+                </a:solidFill>
+                <a:latin typeface="Manrope"/>
+                <a:ea typeface="Manrope"/>
+                <a:cs typeface="Manrope"/>
+                <a:sym typeface="Manrope"/>
+              </a:rPr>
+              <a:t>All compute is serverless — zero always-on servers.</a:t>
             </a:r>
             <a:endParaRPr>
               <a:solidFill>
@@ -15049,7 +14788,7 @@
               <a:buNone/>
             </a:pPr>
             <a:r>
-              <a:rPr b="1" lang="en-GB" sz="1700">
+              <a:rPr b="1" lang="en-GB" sz="1100">
                 <a:solidFill>
                   <a:srgbClr val="202729"/>
                 </a:solidFill>
@@ -15085,7 +14824,7 @@
               <a:buNone/>
             </a:pPr>
             <a:r>
-              <a:rPr b="1" lang="en-GB" sz="1700">
+              <a:rPr b="1" lang="en-GB" sz="1100">
                 <a:solidFill>
                   <a:srgbClr val="202729"/>
                 </a:solidFill>
@@ -15121,7 +14860,7 @@
               <a:buNone/>
             </a:pPr>
             <a:r>
-              <a:rPr b="1" lang="en-GB" sz="1700">
+              <a:rPr b="1" lang="en-GB" sz="1100">
                 <a:solidFill>
                   <a:srgbClr val="202729"/>
                 </a:solidFill>
@@ -15157,16 +14896,16 @@
               <a:buNone/>
             </a:pPr>
             <a:r>
-              <a:rPr b="1" lang="en-GB" sz="1700">
-                <a:solidFill>
-                  <a:srgbClr val="202729"/>
-                </a:solidFill>
-                <a:latin typeface="Manrope"/>
-                <a:ea typeface="Manrope"/>
-                <a:cs typeface="Manrope"/>
-                <a:sym typeface="Manrope"/>
-              </a:rPr>
-              <a:t>  - Amazon Bedrock Agents — 5 agents (1 Supervisor + 4 sub-agents)</a:t>
+              <a:rPr b="1" lang="en-GB" sz="1100">
+                <a:solidFill>
+                  <a:srgbClr val="202729"/>
+                </a:solidFill>
+                <a:latin typeface="Manrope"/>
+                <a:ea typeface="Manrope"/>
+                <a:cs typeface="Manrope"/>
+                <a:sym typeface="Manrope"/>
+              </a:rPr>
+              <a:t>• Amazon Bedrock Agents (Supervisor Pattern — 1 supervisor + 4 sub-agents)</a:t>
             </a:r>
             <a:endParaRPr>
               <a:solidFill>
@@ -15193,16 +14932,16 @@
               <a:buNone/>
             </a:pPr>
             <a:r>
-              <a:rPr b="1" lang="en-GB" sz="1700">
-                <a:solidFill>
-                  <a:srgbClr val="202729"/>
-                </a:solidFill>
-                <a:latin typeface="Manrope"/>
-                <a:ea typeface="Manrope"/>
-                <a:cs typeface="Manrope"/>
-                <a:sym typeface="Manrope"/>
-              </a:rPr>
-              <a:t>  - Amazon Bedrock Knowledge Bases — 3 KBs (CSR laws, opportunities, proposals)</a:t>
+              <a:rPr b="1" lang="en-GB" sz="1100">
+                <a:solidFill>
+                  <a:srgbClr val="202729"/>
+                </a:solidFill>
+                <a:latin typeface="Manrope"/>
+                <a:ea typeface="Manrope"/>
+                <a:cs typeface="Manrope"/>
+                <a:sym typeface="Manrope"/>
+              </a:rPr>
+              <a:t>• Amazon Bedrock Knowledge Bases (3 KBs backed by OpenSearch Serverless)</a:t>
             </a:r>
             <a:endParaRPr>
               <a:solidFill>
@@ -15229,16 +14968,16 @@
               <a:buNone/>
             </a:pPr>
             <a:r>
-              <a:rPr b="1" lang="en-GB" sz="1700">
-                <a:solidFill>
-                  <a:srgbClr val="202729"/>
-                </a:solidFill>
-                <a:latin typeface="Manrope"/>
-                <a:ea typeface="Manrope"/>
-                <a:cs typeface="Manrope"/>
-                <a:sym typeface="Manrope"/>
-              </a:rPr>
-              <a:t>  - Amazon Titan Text Embeddings V2 — vector embeddings for semantic search</a:t>
+              <a:rPr b="1" lang="en-GB" sz="1100">
+                <a:solidFill>
+                  <a:srgbClr val="202729"/>
+                </a:solidFill>
+                <a:latin typeface="Manrope"/>
+                <a:ea typeface="Manrope"/>
+                <a:cs typeface="Manrope"/>
+                <a:sym typeface="Manrope"/>
+              </a:rPr>
+              <a:t>• Amazon Titan Text Embeddings V2 — vector embeddings for semantic search</a:t>
             </a:r>
             <a:endParaRPr>
               <a:solidFill>
@@ -15265,16 +15004,16 @@
               <a:buNone/>
             </a:pPr>
             <a:r>
-              <a:rPr b="1" lang="en-GB" sz="1700">
-                <a:solidFill>
-                  <a:srgbClr val="202729"/>
-                </a:solidFill>
-                <a:latin typeface="Manrope"/>
-                <a:ea typeface="Manrope"/>
-                <a:cs typeface="Manrope"/>
-                <a:sym typeface="Manrope"/>
-              </a:rPr>
-              <a:t>  - Foundation Models: Claude 3.5 Sonnet, Amazon Nova 2 Lite</a:t>
+              <a:rPr b="1" lang="en-GB" sz="1100">
+                <a:solidFill>
+                  <a:srgbClr val="202729"/>
+                </a:solidFill>
+                <a:latin typeface="Manrope"/>
+                <a:ea typeface="Manrope"/>
+                <a:cs typeface="Manrope"/>
+                <a:sym typeface="Manrope"/>
+              </a:rPr>
+              <a:t>• Foundation Models: Claude 3.5 Sonnet / Amazon Nova 2 Lite</a:t>
             </a:r>
             <a:endParaRPr>
               <a:solidFill>
@@ -15301,16 +15040,16 @@
               <a:buNone/>
             </a:pPr>
             <a:r>
-              <a:rPr b="1" lang="en-GB" sz="1700">
-                <a:solidFill>
-                  <a:srgbClr val="202729"/>
-                </a:solidFill>
-                <a:latin typeface="Manrope"/>
-                <a:ea typeface="Manrope"/>
-                <a:cs typeface="Manrope"/>
-                <a:sym typeface="Manrope"/>
-              </a:rPr>
-              <a:t>  - Amazon Textract — OCR and structured data extraction from PDFs</a:t>
+              <a:rPr b="1" lang="en-GB" sz="1100">
+                <a:solidFill>
+                  <a:srgbClr val="202729"/>
+                </a:solidFill>
+                <a:latin typeface="Manrope"/>
+                <a:ea typeface="Manrope"/>
+                <a:cs typeface="Manrope"/>
+                <a:sym typeface="Manrope"/>
+              </a:rPr>
+              <a:t>• Amazon Textract — OCR and structured data extraction from PDFs</a:t>
             </a:r>
             <a:endParaRPr>
               <a:solidFill>
@@ -15337,7 +15076,7 @@
               <a:buNone/>
             </a:pPr>
             <a:r>
-              <a:rPr b="1" lang="en-GB" sz="1700">
+              <a:rPr b="1" lang="en-GB" sz="1100">
                 <a:solidFill>
                   <a:srgbClr val="202729"/>
                 </a:solidFill>
@@ -15373,7 +15112,7 @@
               <a:buNone/>
             </a:pPr>
             <a:r>
-              <a:rPr b="1" lang="en-GB" sz="1700">
+              <a:rPr b="1" lang="en-GB" sz="1100">
                 <a:solidFill>
                   <a:srgbClr val="202729"/>
                 </a:solidFill>
@@ -15409,16 +15148,16 @@
               <a:buNone/>
             </a:pPr>
             <a:r>
-              <a:rPr b="1" lang="en-GB" sz="1700">
-                <a:solidFill>
-                  <a:srgbClr val="202729"/>
-                </a:solidFill>
-                <a:latin typeface="Manrope"/>
-                <a:ea typeface="Manrope"/>
-                <a:cs typeface="Manrope"/>
-                <a:sym typeface="Manrope"/>
-              </a:rPr>
-              <a:t>  - AWS Lambda — 4 functions (Python 3.12, 256MB, 90s timeout)</a:t>
+              <a:rPr b="1" lang="en-GB" sz="1100">
+                <a:solidFill>
+                  <a:srgbClr val="202729"/>
+                </a:solidFill>
+                <a:latin typeface="Manrope"/>
+                <a:ea typeface="Manrope"/>
+                <a:cs typeface="Manrope"/>
+                <a:sym typeface="Manrope"/>
+              </a:rPr>
+              <a:t>• AWS Lambda — 4 functions (Python 3.12)</a:t>
             </a:r>
             <a:endParaRPr>
               <a:solidFill>
@@ -15445,16 +15184,16 @@
               <a:buNone/>
             </a:pPr>
             <a:r>
-              <a:rPr b="1" lang="en-GB" sz="1700">
-                <a:solidFill>
-                  <a:srgbClr val="202729"/>
-                </a:solidFill>
-                <a:latin typeface="Manrope"/>
-                <a:ea typeface="Manrope"/>
-                <a:cs typeface="Manrope"/>
-                <a:sym typeface="Manrope"/>
-              </a:rPr>
-              <a:t>    * nidhiai-scan-documents</a:t>
+              <a:rPr b="1" lang="en-GB" sz="1100">
+                <a:solidFill>
+                  <a:srgbClr val="202729"/>
+                </a:solidFill>
+                <a:latin typeface="Manrope"/>
+                <a:ea typeface="Manrope"/>
+                <a:cs typeface="Manrope"/>
+                <a:sym typeface="Manrope"/>
+              </a:rPr>
+              <a:t>  nidhiai-scan-documents, nidhiai-match-grants,</a:t>
             </a:r>
             <a:endParaRPr>
               <a:solidFill>
@@ -15481,16 +15220,16 @@
               <a:buNone/>
             </a:pPr>
             <a:r>
-              <a:rPr b="1" lang="en-GB" sz="1700">
-                <a:solidFill>
-                  <a:srgbClr val="202729"/>
-                </a:solidFill>
-                <a:latin typeface="Manrope"/>
-                <a:ea typeface="Manrope"/>
-                <a:cs typeface="Manrope"/>
-                <a:sym typeface="Manrope"/>
-              </a:rPr>
-              <a:t>    * nidhiai-match-grants</a:t>
+              <a:rPr b="1" lang="en-GB" sz="1100">
+                <a:solidFill>
+                  <a:srgbClr val="202729"/>
+                </a:solidFill>
+                <a:latin typeface="Manrope"/>
+                <a:ea typeface="Manrope"/>
+                <a:cs typeface="Manrope"/>
+                <a:sym typeface="Manrope"/>
+              </a:rPr>
+              <a:t>  nidhiai-generate-pdf, nidhiai-generate-report</a:t>
             </a:r>
             <a:endParaRPr>
               <a:solidFill>
@@ -15517,16 +15256,16 @@
               <a:buNone/>
             </a:pPr>
             <a:r>
-              <a:rPr b="1" lang="en-GB" sz="1700">
-                <a:solidFill>
-                  <a:srgbClr val="202729"/>
-                </a:solidFill>
-                <a:latin typeface="Manrope"/>
-                <a:ea typeface="Manrope"/>
-                <a:cs typeface="Manrope"/>
-                <a:sym typeface="Manrope"/>
-              </a:rPr>
-              <a:t>    * nidhiai-generate-pdf</a:t>
+              <a:rPr b="1" lang="en-GB" sz="1100">
+                <a:solidFill>
+                  <a:srgbClr val="202729"/>
+                </a:solidFill>
+                <a:latin typeface="Manrope"/>
+                <a:ea typeface="Manrope"/>
+                <a:cs typeface="Manrope"/>
+                <a:sym typeface="Manrope"/>
+              </a:rPr>
+              <a:t>• Amazon API Gateway (REST API)</a:t>
             </a:r>
             <a:endParaRPr>
               <a:solidFill>
@@ -15553,16 +15292,16 @@
               <a:buNone/>
             </a:pPr>
             <a:r>
-              <a:rPr b="1" lang="en-GB" sz="1700">
-                <a:solidFill>
-                  <a:srgbClr val="202729"/>
-                </a:solidFill>
-                <a:latin typeface="Manrope"/>
-                <a:ea typeface="Manrope"/>
-                <a:cs typeface="Manrope"/>
-                <a:sym typeface="Manrope"/>
-              </a:rPr>
-              <a:t>    * nidhiai-generate-report</a:t>
+              <a:rPr b="1" lang="en-GB" sz="1100">
+                <a:solidFill>
+                  <a:srgbClr val="202729"/>
+                </a:solidFill>
+                <a:latin typeface="Manrope"/>
+                <a:ea typeface="Manrope"/>
+                <a:cs typeface="Manrope"/>
+                <a:sym typeface="Manrope"/>
+              </a:rPr>
+              <a:t>• Amazon DynamoDB — 4 tables (profiles, documents, compliance, proposals)</a:t>
             </a:r>
             <a:endParaRPr>
               <a:solidFill>
@@ -15589,16 +15328,16 @@
               <a:buNone/>
             </a:pPr>
             <a:r>
-              <a:rPr b="1" lang="en-GB" sz="1700">
-                <a:solidFill>
-                  <a:srgbClr val="202729"/>
-                </a:solidFill>
-                <a:latin typeface="Manrope"/>
-                <a:ea typeface="Manrope"/>
-                <a:cs typeface="Manrope"/>
-                <a:sym typeface="Manrope"/>
-              </a:rPr>
-              <a:t>  - Amazon API Gateway — REST API routing</a:t>
+              <a:rPr b="1" lang="en-GB" sz="1100">
+                <a:solidFill>
+                  <a:srgbClr val="202729"/>
+                </a:solidFill>
+                <a:latin typeface="Manrope"/>
+                <a:ea typeface="Manrope"/>
+                <a:cs typeface="Manrope"/>
+                <a:sym typeface="Manrope"/>
+              </a:rPr>
+              <a:t>• Amazon S3 — 5 buckets (documents, generated PDFs, 3 KB data sources)</a:t>
             </a:r>
             <a:endParaRPr>
               <a:solidFill>
@@ -15625,16 +15364,16 @@
               <a:buNone/>
             </a:pPr>
             <a:r>
-              <a:rPr b="1" lang="en-GB" sz="1700">
-                <a:solidFill>
-                  <a:srgbClr val="202729"/>
-                </a:solidFill>
-                <a:latin typeface="Manrope"/>
-                <a:ea typeface="Manrope"/>
-                <a:cs typeface="Manrope"/>
-                <a:sym typeface="Manrope"/>
-              </a:rPr>
-              <a:t>  - Amazon DynamoDB — 4 tables (profiles, documents, compliance, proposals)</a:t>
+              <a:rPr b="1" lang="en-GB" sz="1100">
+                <a:solidFill>
+                  <a:srgbClr val="202729"/>
+                </a:solidFill>
+                <a:latin typeface="Manrope"/>
+                <a:ea typeface="Manrope"/>
+                <a:cs typeface="Manrope"/>
+                <a:sym typeface="Manrope"/>
+              </a:rPr>
+              <a:t>• Amazon Cognito — user authentication</a:t>
             </a:r>
             <a:endParaRPr>
               <a:solidFill>
@@ -15661,16 +15400,16 @@
               <a:buNone/>
             </a:pPr>
             <a:r>
-              <a:rPr b="1" lang="en-GB" sz="1700">
-                <a:solidFill>
-                  <a:srgbClr val="202729"/>
-                </a:solidFill>
-                <a:latin typeface="Manrope"/>
-                <a:ea typeface="Manrope"/>
-                <a:cs typeface="Manrope"/>
-                <a:sym typeface="Manrope"/>
-              </a:rPr>
-              <a:t>  - Amazon S3 — 5 buckets (documents, PDFs, 3 KB data sources)</a:t>
+              <a:rPr b="1" lang="en-GB" sz="1100">
+                <a:solidFill>
+                  <a:srgbClr val="202729"/>
+                </a:solidFill>
+                <a:latin typeface="Manrope"/>
+                <a:ea typeface="Manrope"/>
+                <a:cs typeface="Manrope"/>
+                <a:sym typeface="Manrope"/>
+              </a:rPr>
+              <a:t/>
             </a:r>
             <a:endParaRPr>
               <a:solidFill>
@@ -15697,16 +15436,16 @@
               <a:buNone/>
             </a:pPr>
             <a:r>
-              <a:rPr b="1" lang="en-GB" sz="1700">
-                <a:solidFill>
-                  <a:srgbClr val="202729"/>
-                </a:solidFill>
-                <a:latin typeface="Manrope"/>
-                <a:ea typeface="Manrope"/>
-                <a:cs typeface="Manrope"/>
-                <a:sym typeface="Manrope"/>
-              </a:rPr>
-              <a:t>  - Amazon OpenSearch Serverless — vector store backing all 3 KBs</a:t>
+              <a:rPr b="1" lang="en-GB" sz="1100">
+                <a:solidFill>
+                  <a:srgbClr val="202729"/>
+                </a:solidFill>
+                <a:latin typeface="Manrope"/>
+                <a:ea typeface="Manrope"/>
+                <a:cs typeface="Manrope"/>
+                <a:sym typeface="Manrope"/>
+              </a:rPr>
+              <a:t>Frontend:</a:t>
             </a:r>
             <a:endParaRPr>
               <a:solidFill>
@@ -15733,16 +15472,16 @@
               <a:buNone/>
             </a:pPr>
             <a:r>
-              <a:rPr b="1" lang="en-GB" sz="1700">
-                <a:solidFill>
-                  <a:srgbClr val="202729"/>
-                </a:solidFill>
-                <a:latin typeface="Manrope"/>
-                <a:ea typeface="Manrope"/>
-                <a:cs typeface="Manrope"/>
-                <a:sym typeface="Manrope"/>
-              </a:rPr>
-              <a:t>  - Amazon Cognito — user authentication</a:t>
+              <a:rPr b="1" lang="en-GB" sz="1100">
+                <a:solidFill>
+                  <a:srgbClr val="202729"/>
+                </a:solidFill>
+                <a:latin typeface="Manrope"/>
+                <a:ea typeface="Manrope"/>
+                <a:cs typeface="Manrope"/>
+                <a:sym typeface="Manrope"/>
+              </a:rPr>
+              <a:t>• Next.js 16 (React 19, Server Components) + TailwindCSS</a:t>
             </a:r>
             <a:endParaRPr>
               <a:solidFill>
@@ -15769,160 +15508,16 @@
               <a:buNone/>
             </a:pPr>
             <a:r>
-              <a:rPr b="1" lang="en-GB" sz="1700">
-                <a:solidFill>
-                  <a:srgbClr val="202729"/>
-                </a:solidFill>
-                <a:latin typeface="Manrope"/>
-                <a:ea typeface="Manrope"/>
-                <a:cs typeface="Manrope"/>
-                <a:sym typeface="Manrope"/>
-              </a:rPr>
-              <a:t/>
-            </a:r>
-            <a:endParaRPr>
-              <a:solidFill>
-                <a:srgbClr val="434343"/>
-              </a:solidFill>
-              <a:latin typeface="Manrope"/>
-              <a:ea typeface="Manrope"/>
-              <a:cs typeface="Manrope"/>
-              <a:sym typeface="Manrope"/>
-            </a:endParaRPr>
-          </a:p>
-          <a:p>
-            <a:pPr indent="0" lvl="0" marL="0" rtl="0" algn="l">
-              <a:lnSpc>
-                <a:spcPct val="115000"/>
-              </a:lnSpc>
-              <a:spcBef>
-                <a:spcPts val="0"/>
-              </a:spcBef>
-              <a:spcAft>
-                <a:spcPts val="1200"/>
-              </a:spcAft>
-              <a:buSzPts val="935"/>
-              <a:buNone/>
-            </a:pPr>
-            <a:r>
-              <a:rPr b="1" lang="en-GB" sz="1700">
-                <a:solidFill>
-                  <a:srgbClr val="202729"/>
-                </a:solidFill>
-                <a:latin typeface="Manrope"/>
-                <a:ea typeface="Manrope"/>
-                <a:cs typeface="Manrope"/>
-                <a:sym typeface="Manrope"/>
-              </a:rPr>
-              <a:t>Frontend:</a:t>
-            </a:r>
-            <a:endParaRPr>
-              <a:solidFill>
-                <a:srgbClr val="434343"/>
-              </a:solidFill>
-              <a:latin typeface="Manrope"/>
-              <a:ea typeface="Manrope"/>
-              <a:cs typeface="Manrope"/>
-              <a:sym typeface="Manrope"/>
-            </a:endParaRPr>
-          </a:p>
-          <a:p>
-            <a:pPr indent="0" lvl="0" marL="0" rtl="0" algn="l">
-              <a:lnSpc>
-                <a:spcPct val="115000"/>
-              </a:lnSpc>
-              <a:spcBef>
-                <a:spcPts val="0"/>
-              </a:spcBef>
-              <a:spcAft>
-                <a:spcPts val="1200"/>
-              </a:spcAft>
-              <a:buSzPts val="935"/>
-              <a:buNone/>
-            </a:pPr>
-            <a:r>
-              <a:rPr b="1" lang="en-GB" sz="1700">
-                <a:solidFill>
-                  <a:srgbClr val="202729"/>
-                </a:solidFill>
-                <a:latin typeface="Manrope"/>
-                <a:ea typeface="Manrope"/>
-                <a:cs typeface="Manrope"/>
-                <a:sym typeface="Manrope"/>
-              </a:rPr>
-              <a:t>  - Next.js 16 (React 19, Server Components)</a:t>
-            </a:r>
-            <a:endParaRPr>
-              <a:solidFill>
-                <a:srgbClr val="434343"/>
-              </a:solidFill>
-              <a:latin typeface="Manrope"/>
-              <a:ea typeface="Manrope"/>
-              <a:cs typeface="Manrope"/>
-              <a:sym typeface="Manrope"/>
-            </a:endParaRPr>
-          </a:p>
-          <a:p>
-            <a:pPr indent="0" lvl="0" marL="0" rtl="0" algn="l">
-              <a:lnSpc>
-                <a:spcPct val="115000"/>
-              </a:lnSpc>
-              <a:spcBef>
-                <a:spcPts val="0"/>
-              </a:spcBef>
-              <a:spcAft>
-                <a:spcPts val="1200"/>
-              </a:spcAft>
-              <a:buSzPts val="935"/>
-              <a:buNone/>
-            </a:pPr>
-            <a:r>
-              <a:rPr b="1" lang="en-GB" sz="1700">
-                <a:solidFill>
-                  <a:srgbClr val="202729"/>
-                </a:solidFill>
-                <a:latin typeface="Manrope"/>
-                <a:ea typeface="Manrope"/>
-                <a:cs typeface="Manrope"/>
-                <a:sym typeface="Manrope"/>
-              </a:rPr>
-              <a:t>  - TailwindCSS + custom dark theme</a:t>
-            </a:r>
-            <a:endParaRPr>
-              <a:solidFill>
-                <a:srgbClr val="434343"/>
-              </a:solidFill>
-              <a:latin typeface="Manrope"/>
-              <a:ea typeface="Manrope"/>
-              <a:cs typeface="Manrope"/>
-              <a:sym typeface="Manrope"/>
-            </a:endParaRPr>
-          </a:p>
-          <a:p>
-            <a:pPr indent="0" lvl="0" marL="0" rtl="0" algn="l">
-              <a:lnSpc>
-                <a:spcPct val="115000"/>
-              </a:lnSpc>
-              <a:spcBef>
-                <a:spcPts val="0"/>
-              </a:spcBef>
-              <a:spcAft>
-                <a:spcPts val="1200"/>
-              </a:spcAft>
-              <a:buSzPts val="935"/>
-              <a:buNone/>
-            </a:pPr>
-            <a:r>
-              <a:rPr b="1" lang="en-GB" sz="1700">
-                <a:solidFill>
-                  <a:srgbClr val="202729"/>
-                </a:solidFill>
-                <a:latin typeface="Manrope"/>
-                <a:ea typeface="Manrope"/>
-                <a:cs typeface="Manrope"/>
-                <a:sym typeface="Manrope"/>
-              </a:rPr>
-              <a:t>  - Deployed on Vercel</a:t>
+              <a:rPr b="1" lang="en-GB" sz="1100">
+                <a:solidFill>
+                  <a:srgbClr val="202729"/>
+                </a:solidFill>
+                <a:latin typeface="Manrope"/>
+                <a:ea typeface="Manrope"/>
+                <a:cs typeface="Manrope"/>
+                <a:sym typeface="Manrope"/>
+              </a:rPr>
+              <a:t>• Deployed on Vercel</a:t>
             </a:r>
             <a:endParaRPr>
               <a:solidFill>
@@ -16027,7 +15622,7 @@
               <a:buNone/>
             </a:pPr>
             <a:r>
-              <a:rPr b="1" lang="en-GB" sz="1700">
+              <a:rPr b="1" lang="en-GB" sz="1100">
                 <a:solidFill>
                   <a:srgbClr val="202729"/>
                 </a:solidFill>
@@ -16063,7 +15658,7 @@
               <a:buNone/>
             </a:pPr>
             <a:r>
-              <a:rPr b="1" lang="en-GB" sz="1700">
+              <a:rPr b="1" lang="en-GB" sz="1100">
                 <a:solidFill>
                   <a:srgbClr val="202729"/>
                 </a:solidFill>
@@ -16099,16 +15694,16 @@
               <a:buNone/>
             </a:pPr>
             <a:r>
-              <a:rPr b="1" lang="en-GB" sz="1700">
-                <a:solidFill>
-                  <a:srgbClr val="202729"/>
-                </a:solidFill>
-                <a:latin typeface="Manrope"/>
-                <a:ea typeface="Manrope"/>
-                <a:cs typeface="Manrope"/>
-                <a:sym typeface="Manrope"/>
-              </a:rPr>
-              <a:t>Prototype (current):</a:t>
+              <a:rPr b="1" lang="en-GB" sz="1100">
+                <a:solidFill>
+                  <a:srgbClr val="202729"/>
+                </a:solidFill>
+                <a:latin typeface="Manrope"/>
+                <a:ea typeface="Manrope"/>
+                <a:cs typeface="Manrope"/>
+                <a:sym typeface="Manrope"/>
+              </a:rPr>
+              <a:t>Prototype (current spend):</a:t>
             </a:r>
             <a:endParaRPr>
               <a:solidFill>
@@ -16135,16 +15730,16 @@
               <a:buNone/>
             </a:pPr>
             <a:r>
-              <a:rPr b="1" lang="en-GB" sz="1700">
-                <a:solidFill>
-                  <a:srgbClr val="202729"/>
-                </a:solidFill>
-                <a:latin typeface="Manrope"/>
-                <a:ea typeface="Manrope"/>
-                <a:cs typeface="Manrope"/>
-                <a:sym typeface="Manrope"/>
-              </a:rPr>
-              <a:t>  - Lambda / API Gateway / DynamoDB: Covered under AWS Free Tier</a:t>
+              <a:rPr b="1" lang="en-GB" sz="1100">
+                <a:solidFill>
+                  <a:srgbClr val="202729"/>
+                </a:solidFill>
+                <a:latin typeface="Manrope"/>
+                <a:ea typeface="Manrope"/>
+                <a:cs typeface="Manrope"/>
+                <a:sym typeface="Manrope"/>
+              </a:rPr>
+              <a:t>• Lambda / API Gateway / DynamoDB — AWS Free Tier</a:t>
             </a:r>
             <a:endParaRPr>
               <a:solidFill>
@@ -16171,16 +15766,16 @@
               <a:buNone/>
             </a:pPr>
             <a:r>
-              <a:rPr b="1" lang="en-GB" sz="1700">
-                <a:solidFill>
-                  <a:srgbClr val="202729"/>
-                </a:solidFill>
-                <a:latin typeface="Manrope"/>
-                <a:ea typeface="Manrope"/>
-                <a:cs typeface="Manrope"/>
-                <a:sym typeface="Manrope"/>
-              </a:rPr>
-              <a:t>  - Bedrock inference: ~Rs.800/month at demo volume</a:t>
+              <a:rPr b="1" lang="en-GB" sz="1100">
+                <a:solidFill>
+                  <a:srgbClr val="202729"/>
+                </a:solidFill>
+                <a:latin typeface="Manrope"/>
+                <a:ea typeface="Manrope"/>
+                <a:cs typeface="Manrope"/>
+                <a:sym typeface="Manrope"/>
+              </a:rPr>
+              <a:t>• Bedrock model inference — ~Rs.800/month at demo volume</a:t>
             </a:r>
             <a:endParaRPr>
               <a:solidFill>
@@ -16207,16 +15802,16 @@
               <a:buNone/>
             </a:pPr>
             <a:r>
-              <a:rPr b="1" lang="en-GB" sz="1700">
-                <a:solidFill>
-                  <a:srgbClr val="202729"/>
-                </a:solidFill>
-                <a:latin typeface="Manrope"/>
-                <a:ea typeface="Manrope"/>
-                <a:cs typeface="Manrope"/>
-                <a:sym typeface="Manrope"/>
-              </a:rPr>
-              <a:t>  - S3 storage: &lt; Rs.50/month across all 5 buckets</a:t>
+              <a:rPr b="1" lang="en-GB" sz="1100">
+                <a:solidFill>
+                  <a:srgbClr val="202729"/>
+                </a:solidFill>
+                <a:latin typeface="Manrope"/>
+                <a:ea typeface="Manrope"/>
+                <a:cs typeface="Manrope"/>
+                <a:sym typeface="Manrope"/>
+              </a:rPr>
+              <a:t>• S3 storage — &lt; Rs.50/month across all buckets</a:t>
             </a:r>
             <a:endParaRPr>
               <a:solidFill>
@@ -16243,16 +15838,16 @@
               <a:buNone/>
             </a:pPr>
             <a:r>
-              <a:rPr b="1" lang="en-GB" sz="1700">
-                <a:solidFill>
-                  <a:srgbClr val="202729"/>
-                </a:solidFill>
-                <a:latin typeface="Manrope"/>
-                <a:ea typeface="Manrope"/>
-                <a:cs typeface="Manrope"/>
-                <a:sym typeface="Manrope"/>
-              </a:rPr>
-              <a:t>  - OpenSearch Serverless: Min-capacity provisions apply</a:t>
+              <a:rPr b="1" lang="en-GB" sz="1100">
+                <a:solidFill>
+                  <a:srgbClr val="202729"/>
+                </a:solidFill>
+                <a:latin typeface="Manrope"/>
+                <a:ea typeface="Manrope"/>
+                <a:cs typeface="Manrope"/>
+                <a:sym typeface="Manrope"/>
+              </a:rPr>
+              <a:t>• Total prototype spend to date: &lt; Rs.8,000</a:t>
             </a:r>
             <a:endParaRPr>
               <a:solidFill>
@@ -16279,16 +15874,16 @@
               <a:buNone/>
             </a:pPr>
             <a:r>
-              <a:rPr b="1" lang="en-GB" sz="1700">
-                <a:solidFill>
-                  <a:srgbClr val="202729"/>
-                </a:solidFill>
-                <a:latin typeface="Manrope"/>
-                <a:ea typeface="Manrope"/>
-                <a:cs typeface="Manrope"/>
-                <a:sym typeface="Manrope"/>
-              </a:rPr>
-              <a:t>  - Total prototype spend to date: &lt; Rs.8,000</a:t>
+              <a:rPr b="1" lang="en-GB" sz="1100">
+                <a:solidFill>
+                  <a:srgbClr val="202729"/>
+                </a:solidFill>
+                <a:latin typeface="Manrope"/>
+                <a:ea typeface="Manrope"/>
+                <a:cs typeface="Manrope"/>
+                <a:sym typeface="Manrope"/>
+              </a:rPr>
+              <a:t/>
             </a:r>
             <a:endParaRPr>
               <a:solidFill>
@@ -16315,7 +15910,187 @@
               <a:buNone/>
             </a:pPr>
             <a:r>
-              <a:rPr b="1" lang="en-GB" sz="1700">
+              <a:rPr b="1" lang="en-GB" sz="1100">
+                <a:solidFill>
+                  <a:srgbClr val="202729"/>
+                </a:solidFill>
+                <a:latin typeface="Manrope"/>
+                <a:ea typeface="Manrope"/>
+                <a:cs typeface="Manrope"/>
+                <a:sym typeface="Manrope"/>
+              </a:rPr>
+              <a:t>Unit Economics comparison:</a:t>
+            </a:r>
+            <a:endParaRPr>
+              <a:solidFill>
+                <a:srgbClr val="434343"/>
+              </a:solidFill>
+              <a:latin typeface="Manrope"/>
+              <a:ea typeface="Manrope"/>
+              <a:cs typeface="Manrope"/>
+              <a:sym typeface="Manrope"/>
+            </a:endParaRPr>
+          </a:p>
+          <a:p>
+            <a:pPr indent="0" lvl="0" marL="0" rtl="0" algn="l">
+              <a:lnSpc>
+                <a:spcPct val="115000"/>
+              </a:lnSpc>
+              <a:spcBef>
+                <a:spcPts val="0"/>
+              </a:spcBef>
+              <a:spcAft>
+                <a:spcPts val="1200"/>
+              </a:spcAft>
+              <a:buSzPts val="935"/>
+              <a:buNone/>
+            </a:pPr>
+            <a:r>
+              <a:rPr b="1" lang="en-GB" sz="1100">
+                <a:solidFill>
+                  <a:srgbClr val="202729"/>
+                </a:solidFill>
+                <a:latin typeface="Manrope"/>
+                <a:ea typeface="Manrope"/>
+                <a:cs typeface="Manrope"/>
+                <a:sym typeface="Manrope"/>
+              </a:rPr>
+              <a:t>• Cost per proposal — Traditional: Rs.50,000+ → NidhiAI: &lt; Rs.10</a:t>
+            </a:r>
+            <a:endParaRPr>
+              <a:solidFill>
+                <a:srgbClr val="434343"/>
+              </a:solidFill>
+              <a:latin typeface="Manrope"/>
+              <a:ea typeface="Manrope"/>
+              <a:cs typeface="Manrope"/>
+              <a:sym typeface="Manrope"/>
+            </a:endParaRPr>
+          </a:p>
+          <a:p>
+            <a:pPr indent="0" lvl="0" marL="0" rtl="0" algn="l">
+              <a:lnSpc>
+                <a:spcPct val="115000"/>
+              </a:lnSpc>
+              <a:spcBef>
+                <a:spcPts val="0"/>
+              </a:spcBef>
+              <a:spcAft>
+                <a:spcPts val="1200"/>
+              </a:spcAft>
+              <a:buSzPts val="935"/>
+              <a:buNone/>
+            </a:pPr>
+            <a:r>
+              <a:rPr b="1" lang="en-GB" sz="1100">
+                <a:solidFill>
+                  <a:srgbClr val="202729"/>
+                </a:solidFill>
+                <a:latin typeface="Manrope"/>
+                <a:ea typeface="Manrope"/>
+                <a:cs typeface="Manrope"/>
+                <a:sym typeface="Manrope"/>
+              </a:rPr>
+              <a:t>• Time per proposal — Traditional: 2-4 weeks → NidhiAI: &lt; 10 minutes</a:t>
+            </a:r>
+            <a:endParaRPr>
+              <a:solidFill>
+                <a:srgbClr val="434343"/>
+              </a:solidFill>
+              <a:latin typeface="Manrope"/>
+              <a:ea typeface="Manrope"/>
+              <a:cs typeface="Manrope"/>
+              <a:sym typeface="Manrope"/>
+            </a:endParaRPr>
+          </a:p>
+          <a:p>
+            <a:pPr indent="0" lvl="0" marL="0" rtl="0" algn="l">
+              <a:lnSpc>
+                <a:spcPct val="115000"/>
+              </a:lnSpc>
+              <a:spcBef>
+                <a:spcPts val="0"/>
+              </a:spcBef>
+              <a:spcAft>
+                <a:spcPts val="1200"/>
+              </a:spcAft>
+              <a:buSzPts val="935"/>
+              <a:buNone/>
+            </a:pPr>
+            <a:r>
+              <a:rPr b="1" lang="en-GB" sz="1100">
+                <a:solidFill>
+                  <a:srgbClr val="202729"/>
+                </a:solidFill>
+                <a:latin typeface="Manrope"/>
+                <a:ea typeface="Manrope"/>
+                <a:cs typeface="Manrope"/>
+                <a:sym typeface="Manrope"/>
+              </a:rPr>
+              <a:t>• Compliance check — Traditional: CA fees Rs.5,000+ → NidhiAI: automated</a:t>
+            </a:r>
+            <a:endParaRPr>
+              <a:solidFill>
+                <a:srgbClr val="434343"/>
+              </a:solidFill>
+              <a:latin typeface="Manrope"/>
+              <a:ea typeface="Manrope"/>
+              <a:cs typeface="Manrope"/>
+              <a:sym typeface="Manrope"/>
+            </a:endParaRPr>
+          </a:p>
+          <a:p>
+            <a:pPr indent="0" lvl="0" marL="0" rtl="0" algn="l">
+              <a:lnSpc>
+                <a:spcPct val="115000"/>
+              </a:lnSpc>
+              <a:spcBef>
+                <a:spcPts val="0"/>
+              </a:spcBef>
+              <a:spcAft>
+                <a:spcPts val="1200"/>
+              </a:spcAft>
+              <a:buSzPts val="935"/>
+              <a:buNone/>
+            </a:pPr>
+            <a:r>
+              <a:rPr b="1" lang="en-GB" sz="1100">
+                <a:solidFill>
+                  <a:srgbClr val="202729"/>
+                </a:solidFill>
+                <a:latin typeface="Manrope"/>
+                <a:ea typeface="Manrope"/>
+                <a:cs typeface="Manrope"/>
+                <a:sym typeface="Manrope"/>
+              </a:rPr>
+              <a:t>• Grant discovery — Traditional: manual search → NidhiAI: AI-matched</a:t>
+            </a:r>
+            <a:endParaRPr>
+              <a:solidFill>
+                <a:srgbClr val="434343"/>
+              </a:solidFill>
+              <a:latin typeface="Manrope"/>
+              <a:ea typeface="Manrope"/>
+              <a:cs typeface="Manrope"/>
+              <a:sym typeface="Manrope"/>
+            </a:endParaRPr>
+          </a:p>
+          <a:p>
+            <a:pPr indent="0" lvl="0" marL="0" rtl="0" algn="l">
+              <a:lnSpc>
+                <a:spcPct val="115000"/>
+              </a:lnSpc>
+              <a:spcBef>
+                <a:spcPts val="0"/>
+              </a:spcBef>
+              <a:spcAft>
+                <a:spcPts val="1200"/>
+              </a:spcAft>
+              <a:buSzPts val="935"/>
+              <a:buNone/>
+            </a:pPr>
+            <a:r>
+              <a:rPr b="1" lang="en-GB" sz="1100">
                 <a:solidFill>
                   <a:srgbClr val="202729"/>
                 </a:solidFill>
@@ -16351,16 +16126,16 @@
               <a:buNone/>
             </a:pPr>
             <a:r>
-              <a:rPr b="1" lang="en-GB" sz="1700">
-                <a:solidFill>
-                  <a:srgbClr val="202729"/>
-                </a:solidFill>
-                <a:latin typeface="Manrope"/>
-                <a:ea typeface="Manrope"/>
-                <a:cs typeface="Manrope"/>
-                <a:sym typeface="Manrope"/>
-              </a:rPr>
-              <a:t>Production (100 NGOs/month):</a:t>
+              <a:rPr b="1" lang="en-GB" sz="1100">
+                <a:solidFill>
+                  <a:srgbClr val="202729"/>
+                </a:solidFill>
+                <a:latin typeface="Manrope"/>
+                <a:ea typeface="Manrope"/>
+                <a:cs typeface="Manrope"/>
+                <a:sym typeface="Manrope"/>
+              </a:rPr>
+              <a:t>Production estimate (100 NGOs/month):</a:t>
             </a:r>
             <a:endParaRPr>
               <a:solidFill>
@@ -16387,16 +16162,16 @@
               <a:buNone/>
             </a:pPr>
             <a:r>
-              <a:rPr b="1" lang="en-GB" sz="1700">
-                <a:solidFill>
-                  <a:srgbClr val="202729"/>
-                </a:solidFill>
-                <a:latin typeface="Manrope"/>
-                <a:ea typeface="Manrope"/>
-                <a:cs typeface="Manrope"/>
-                <a:sym typeface="Manrope"/>
-              </a:rPr>
-              <a:t>  - Estimated Rs.15,000-25,000/month</a:t>
+              <a:rPr b="1" lang="en-GB" sz="1100">
+                <a:solidFill>
+                  <a:srgbClr val="202729"/>
+                </a:solidFill>
+                <a:latin typeface="Manrope"/>
+                <a:ea typeface="Manrope"/>
+                <a:cs typeface="Manrope"/>
+                <a:sym typeface="Manrope"/>
+              </a:rPr>
+              <a:t>• AWS infra cost: ~Rs.17,000/month (~$204)</a:t>
             </a:r>
             <a:endParaRPr>
               <a:solidFill>
@@ -16423,16 +16198,16 @@
               <a:buNone/>
             </a:pPr>
             <a:r>
-              <a:rPr b="1" lang="en-GB" sz="1700">
-                <a:solidFill>
-                  <a:srgbClr val="202729"/>
-                </a:solidFill>
-                <a:latin typeface="Manrope"/>
-                <a:ea typeface="Manrope"/>
-                <a:cs typeface="Manrope"/>
-                <a:sym typeface="Manrope"/>
-              </a:rPr>
-              <a:t>  - Per-proposal cost: ~Rs.25 vs. Rs.50,000+ for a human grant writer</a:t>
+              <a:rPr b="1" lang="en-GB" sz="1100">
+                <a:solidFill>
+                  <a:srgbClr val="202729"/>
+                </a:solidFill>
+                <a:latin typeface="Manrope"/>
+                <a:ea typeface="Manrope"/>
+                <a:cs typeface="Manrope"/>
+                <a:sym typeface="Manrope"/>
+              </a:rPr>
+              <a:t>• Revenue at Rs.999/NGO/month: Rs.99,900/month</a:t>
             </a:r>
             <a:endParaRPr>
               <a:solidFill>
@@ -16459,16 +16234,16 @@
               <a:buNone/>
             </a:pPr>
             <a:r>
-              <a:rPr b="1" lang="en-GB" sz="1700">
-                <a:solidFill>
-                  <a:srgbClr val="202729"/>
-                </a:solidFill>
-                <a:latin typeface="Manrope"/>
-                <a:ea typeface="Manrope"/>
-                <a:cs typeface="Manrope"/>
-                <a:sym typeface="Manrope"/>
-              </a:rPr>
-              <a:t>  - This represents a 2000x cost reduction for NGOs</a:t>
+              <a:rPr b="1" lang="en-GB" sz="1100">
+                <a:solidFill>
+                  <a:srgbClr val="202729"/>
+                </a:solidFill>
+                <a:latin typeface="Manrope"/>
+                <a:ea typeface="Manrope"/>
+                <a:cs typeface="Manrope"/>
+                <a:sym typeface="Manrope"/>
+              </a:rPr>
+              <a:t>• Gross margin: ~83%</a:t>
             </a:r>
             <a:endParaRPr>
               <a:solidFill>
@@ -16495,7 +16270,43 @@
               <a:buNone/>
             </a:pPr>
             <a:r>
-              <a:rPr b="1" lang="en-GB" sz="1700">
+              <a:rPr b="1" lang="en-GB" sz="1100">
+                <a:solidFill>
+                  <a:srgbClr val="202729"/>
+                </a:solidFill>
+                <a:latin typeface="Manrope"/>
+                <a:ea typeface="Manrope"/>
+                <a:cs typeface="Manrope"/>
+                <a:sym typeface="Manrope"/>
+              </a:rPr>
+              <a:t>• Break-even: 18 paying NGOs</a:t>
+            </a:r>
+            <a:endParaRPr>
+              <a:solidFill>
+                <a:srgbClr val="434343"/>
+              </a:solidFill>
+              <a:latin typeface="Manrope"/>
+              <a:ea typeface="Manrope"/>
+              <a:cs typeface="Manrope"/>
+              <a:sym typeface="Manrope"/>
+            </a:endParaRPr>
+          </a:p>
+          <a:p>
+            <a:pPr indent="0" lvl="0" marL="0" rtl="0" algn="l">
+              <a:lnSpc>
+                <a:spcPct val="115000"/>
+              </a:lnSpc>
+              <a:spcBef>
+                <a:spcPts val="0"/>
+              </a:spcBef>
+              <a:spcAft>
+                <a:spcPts val="1200"/>
+              </a:spcAft>
+              <a:buSzPts val="935"/>
+              <a:buNone/>
+            </a:pPr>
+            <a:r>
+              <a:rPr b="1" lang="en-GB" sz="1100">
                 <a:solidFill>
                   <a:srgbClr val="202729"/>
                 </a:solidFill>
@@ -16531,52 +16342,16 @@
               <a:buNone/>
             </a:pPr>
             <a:r>
-              <a:rPr b="1" lang="en-GB" sz="1700">
-                <a:solidFill>
-                  <a:srgbClr val="202729"/>
-                </a:solidFill>
-                <a:latin typeface="Manrope"/>
-                <a:ea typeface="Manrope"/>
-                <a:cs typeface="Manrope"/>
-                <a:sym typeface="Manrope"/>
-              </a:rPr>
-              <a:t>The serverless model means zero cost when idle — no NGO pays for</a:t>
-            </a:r>
-            <a:endParaRPr>
-              <a:solidFill>
-                <a:srgbClr val="434343"/>
-              </a:solidFill>
-              <a:latin typeface="Manrope"/>
-              <a:ea typeface="Manrope"/>
-              <a:cs typeface="Manrope"/>
-              <a:sym typeface="Manrope"/>
-            </a:endParaRPr>
-          </a:p>
-          <a:p>
-            <a:pPr indent="0" lvl="0" marL="0" rtl="0" algn="l">
-              <a:lnSpc>
-                <a:spcPct val="115000"/>
-              </a:lnSpc>
-              <a:spcBef>
-                <a:spcPts val="0"/>
-              </a:spcBef>
-              <a:spcAft>
-                <a:spcPts val="1200"/>
-              </a:spcAft>
-              <a:buSzPts val="935"/>
-              <a:buNone/>
-            </a:pPr>
-            <a:r>
-              <a:rPr b="1" lang="en-GB" sz="1700">
-                <a:solidFill>
-                  <a:srgbClr val="202729"/>
-                </a:solidFill>
-                <a:latin typeface="Manrope"/>
-                <a:ea typeface="Manrope"/>
-                <a:cs typeface="Manrope"/>
-                <a:sym typeface="Manrope"/>
-              </a:rPr>
-              <a:t>infrastructure they are not using.</a:t>
+              <a:rPr b="1" lang="en-GB" sz="1100">
+                <a:solidFill>
+                  <a:srgbClr val="202729"/>
+                </a:solidFill>
+                <a:latin typeface="Manrope"/>
+                <a:ea typeface="Manrope"/>
+                <a:cs typeface="Manrope"/>
+                <a:sym typeface="Manrope"/>
+              </a:rPr>
+              <a:t>Serverless model means zero cost when idle.</a:t>
             </a:r>
             <a:endParaRPr>
               <a:solidFill>
